--- a/MichiganPFAS_ResearchPoster.pptx
+++ b/MichiganPFAS_ResearchPoster.pptx
@@ -266,9 +266,126 @@
 <file path=ppt/revisionInfo.xml><?xml version="1.0" encoding="utf-8"?>
 <p1510:revInfo xmlns:a="http://schemas.openxmlformats.org/drawingml/2006/main" xmlns:r="http://schemas.openxmlformats.org/officeDocument/2006/relationships" xmlns:p1510="http://schemas.microsoft.com/office/powerpoint/2015/10/main">
   <p1510:revLst>
-    <p1510:client id="{E930288F-FEDA-6646-84E1-AC52C188561A}" v="273" dt="2026-03-18T12:57:36.893"/>
+    <p1510:client id="{6C20A5EC-8840-9940-BC91-4086AF4B13F5}" v="336" dt="2026-03-24T04:33:06.714"/>
   </p1510:revLst>
 </p1510:revInfo>
+</file>
+
+<file path=ppt/changesInfos/changesInfo1.xml><?xml version="1.0" encoding="utf-8"?>
+<pc:chgInfo xmlns:a="http://schemas.openxmlformats.org/drawingml/2006/main" xmlns:r="http://schemas.openxmlformats.org/officeDocument/2006/relationships" xmlns:ac="http://schemas.microsoft.com/office/drawing/2013/main/command" xmlns:pc="http://schemas.microsoft.com/office/powerpoint/2013/main/command">
+  <pc:docChgLst>
+    <pc:chgData name="Nancy A. Odhiambo" userId="9fd03ea9-f642-46ed-82e0-72dc91a725bc" providerId="ADAL" clId="{6B025E33-D5BB-5DD4-954E-4AC3FAD535B9}"/>
+    <pc:docChg chg="undo custSel modSld">
+      <pc:chgData name="Nancy A. Odhiambo" userId="9fd03ea9-f642-46ed-82e0-72dc91a725bc" providerId="ADAL" clId="{6B025E33-D5BB-5DD4-954E-4AC3FAD535B9}" dt="2026-03-24T04:35:00.185" v="1968" actId="20577"/>
+      <pc:docMkLst>
+        <pc:docMk/>
+      </pc:docMkLst>
+      <pc:sldChg chg="addSp delSp modSp mod">
+        <pc:chgData name="Nancy A. Odhiambo" userId="9fd03ea9-f642-46ed-82e0-72dc91a725bc" providerId="ADAL" clId="{6B025E33-D5BB-5DD4-954E-4AC3FAD535B9}" dt="2026-03-24T04:35:00.185" v="1968" actId="20577"/>
+        <pc:sldMkLst>
+          <pc:docMk/>
+          <pc:sldMk cId="3865402343" sldId="261"/>
+        </pc:sldMkLst>
+        <pc:spChg chg="add del mod">
+          <ac:chgData name="Nancy A. Odhiambo" userId="9fd03ea9-f642-46ed-82e0-72dc91a725bc" providerId="ADAL" clId="{6B025E33-D5BB-5DD4-954E-4AC3FAD535B9}" dt="2026-03-24T04:27:57.340" v="1938" actId="20577"/>
+          <ac:spMkLst>
+            <pc:docMk/>
+            <pc:sldMk cId="3865402343" sldId="261"/>
+            <ac:spMk id="2" creationId="{22F7C748-A7B8-994F-51B5-6A10DF850565}"/>
+          </ac:spMkLst>
+        </pc:spChg>
+        <pc:spChg chg="add del mod">
+          <ac:chgData name="Nancy A. Odhiambo" userId="9fd03ea9-f642-46ed-82e0-72dc91a725bc" providerId="ADAL" clId="{6B025E33-D5BB-5DD4-954E-4AC3FAD535B9}" dt="2026-03-24T04:09:39.296" v="1647" actId="478"/>
+          <ac:spMkLst>
+            <pc:docMk/>
+            <pc:sldMk cId="3865402343" sldId="261"/>
+            <ac:spMk id="3" creationId="{10DB3307-46A7-C7B7-5379-43CBB6320BF8}"/>
+          </ac:spMkLst>
+        </pc:spChg>
+        <pc:spChg chg="add mod">
+          <ac:chgData name="Nancy A. Odhiambo" userId="9fd03ea9-f642-46ed-82e0-72dc91a725bc" providerId="ADAL" clId="{6B025E33-D5BB-5DD4-954E-4AC3FAD535B9}" dt="2026-03-24T03:48:59.710" v="586"/>
+          <ac:spMkLst>
+            <pc:docMk/>
+            <pc:sldMk cId="3865402343" sldId="261"/>
+            <ac:spMk id="4" creationId="{E0AF4F27-BF7E-8C35-5EED-00A9A95028F6}"/>
+          </ac:spMkLst>
+        </pc:spChg>
+        <pc:spChg chg="add del mod">
+          <ac:chgData name="Nancy A. Odhiambo" userId="9fd03ea9-f642-46ed-82e0-72dc91a725bc" providerId="ADAL" clId="{6B025E33-D5BB-5DD4-954E-4AC3FAD535B9}" dt="2026-03-24T04:31:19.958" v="1939" actId="14100"/>
+          <ac:spMkLst>
+            <pc:docMk/>
+            <pc:sldMk cId="3865402343" sldId="261"/>
+            <ac:spMk id="5" creationId="{0F657839-AC5A-CBEC-68BD-5C169C5740B8}"/>
+          </ac:spMkLst>
+        </pc:spChg>
+        <pc:spChg chg="add mod">
+          <ac:chgData name="Nancy A. Odhiambo" userId="9fd03ea9-f642-46ed-82e0-72dc91a725bc" providerId="ADAL" clId="{6B025E33-D5BB-5DD4-954E-4AC3FAD535B9}" dt="2026-03-24T03:50:03.263" v="1053"/>
+          <ac:spMkLst>
+            <pc:docMk/>
+            <pc:sldMk cId="3865402343" sldId="261"/>
+            <ac:spMk id="6" creationId="{462E4BBD-A9E2-7A33-44CA-705C704EE9C3}"/>
+          </ac:spMkLst>
+        </pc:spChg>
+        <pc:spChg chg="add mod">
+          <ac:chgData name="Nancy A. Odhiambo" userId="9fd03ea9-f642-46ed-82e0-72dc91a725bc" providerId="ADAL" clId="{6B025E33-D5BB-5DD4-954E-4AC3FAD535B9}" dt="2026-03-24T04:08:42.917" v="1643" actId="478"/>
+          <ac:spMkLst>
+            <pc:docMk/>
+            <pc:sldMk cId="3865402343" sldId="261"/>
+            <ac:spMk id="7" creationId="{1375D565-B110-F90F-A070-10671DFEEB23}"/>
+          </ac:spMkLst>
+        </pc:spChg>
+        <pc:spChg chg="add del mod">
+          <ac:chgData name="Nancy A. Odhiambo" userId="9fd03ea9-f642-46ed-82e0-72dc91a725bc" providerId="ADAL" clId="{6B025E33-D5BB-5DD4-954E-4AC3FAD535B9}" dt="2026-03-24T04:08:44.616" v="1644" actId="478"/>
+          <ac:spMkLst>
+            <pc:docMk/>
+            <pc:sldMk cId="3865402343" sldId="261"/>
+            <ac:spMk id="8" creationId="{BAAC6169-C1CE-EE5A-EDB1-D24E66F4A940}"/>
+          </ac:spMkLst>
+        </pc:spChg>
+        <pc:spChg chg="add del mod">
+          <ac:chgData name="Nancy A. Odhiambo" userId="9fd03ea9-f642-46ed-82e0-72dc91a725bc" providerId="ADAL" clId="{6B025E33-D5BB-5DD4-954E-4AC3FAD535B9}" dt="2026-03-24T04:08:44.616" v="1644" actId="478"/>
+          <ac:spMkLst>
+            <pc:docMk/>
+            <pc:sldMk cId="3865402343" sldId="261"/>
+            <ac:spMk id="9" creationId="{7731369C-25C6-4539-52D3-470DF230526A}"/>
+          </ac:spMkLst>
+        </pc:spChg>
+        <pc:spChg chg="add mod">
+          <ac:chgData name="Nancy A. Odhiambo" userId="9fd03ea9-f642-46ed-82e0-72dc91a725bc" providerId="ADAL" clId="{6B025E33-D5BB-5DD4-954E-4AC3FAD535B9}" dt="2026-03-24T04:08:42.917" v="1643" actId="478"/>
+          <ac:spMkLst>
+            <pc:docMk/>
+            <pc:sldMk cId="3865402343" sldId="261"/>
+            <ac:spMk id="10" creationId="{9AFE843B-0EC6-7C80-72F9-2DA8A4E58788}"/>
+          </ac:spMkLst>
+        </pc:spChg>
+        <pc:spChg chg="add mod">
+          <ac:chgData name="Nancy A. Odhiambo" userId="9fd03ea9-f642-46ed-82e0-72dc91a725bc" providerId="ADAL" clId="{6B025E33-D5BB-5DD4-954E-4AC3FAD535B9}" dt="2026-03-24T04:08:42.917" v="1643" actId="478"/>
+          <ac:spMkLst>
+            <pc:docMk/>
+            <pc:sldMk cId="3865402343" sldId="261"/>
+            <ac:spMk id="12" creationId="{2FDC1D21-0ACE-1342-0B95-871DFDFBAA6C}"/>
+          </ac:spMkLst>
+        </pc:spChg>
+        <pc:spChg chg="add del mod">
+          <ac:chgData name="Nancy A. Odhiambo" userId="9fd03ea9-f642-46ed-82e0-72dc91a725bc" providerId="ADAL" clId="{6B025E33-D5BB-5DD4-954E-4AC3FAD535B9}" dt="2026-03-24T04:35:00.185" v="1968" actId="20577"/>
+          <ac:spMkLst>
+            <pc:docMk/>
+            <pc:sldMk cId="3865402343" sldId="261"/>
+            <ac:spMk id="50" creationId="{AB71F360-BB8B-D375-3180-E5F2E2514D50}"/>
+          </ac:spMkLst>
+        </pc:spChg>
+        <pc:picChg chg="add del mod">
+          <ac:chgData name="Nancy A. Odhiambo" userId="9fd03ea9-f642-46ed-82e0-72dc91a725bc" providerId="ADAL" clId="{6B025E33-D5BB-5DD4-954E-4AC3FAD535B9}" dt="2026-03-24T04:08:44.616" v="1644" actId="478"/>
+          <ac:picMkLst>
+            <pc:docMk/>
+            <pc:sldMk cId="3865402343" sldId="261"/>
+            <ac:picMk id="11" creationId="{BB728658-9F61-908A-3DCE-2DBBF3565C05}"/>
+          </ac:picMkLst>
+        </pc:picChg>
+      </pc:sldChg>
+    </pc:docChg>
+  </pc:docChgLst>
+</pc:chgInfo>
 </file>
 
 <file path=ppt/notesMasters/notesMaster1.xml><?xml version="1.0" encoding="utf-8"?>
@@ -6775,470 +6892,900 @@
           <a:chExt cx="0" cy="0"/>
         </a:xfrm>
       </p:grpSpPr>
-      <p:sp>
-        <p:nvSpPr>
-          <p:cNvPr id="2" name="Text Placeholder 1">
-            <a:extLst>
-              <a:ext uri="{FF2B5EF4-FFF2-40B4-BE49-F238E27FC236}">
-                <a16:creationId xmlns:a16="http://schemas.microsoft.com/office/drawing/2014/main" id="{22F7C748-A7B8-994F-51B5-6A10DF850565}"/>
-              </a:ext>
-            </a:extLst>
-          </p:cNvPr>
-          <p:cNvSpPr>
-            <a:spLocks noGrp="1"/>
-          </p:cNvSpPr>
-          <p:nvPr>
-            <p:ph type="body" idx="1"/>
-          </p:nvPr>
-        </p:nvSpPr>
-        <p:spPr>
-          <a:xfrm>
-            <a:off x="914398" y="5916167"/>
-            <a:ext cx="13716001" cy="24063089"/>
-          </a:xfrm>
-        </p:spPr>
-        <p:txBody>
-          <a:bodyPr/>
-          <a:lstStyle/>
-          <a:p>
-            <a:pPr marL="0" marR="0" lvl="0" indent="0" algn="l" rtl="0">
-              <a:lnSpc>
-                <a:spcPct val="95833"/>
-              </a:lnSpc>
-              <a:spcBef>
-                <a:spcPts val="0"/>
-              </a:spcBef>
-              <a:spcAft>
-                <a:spcPts val="0"/>
-              </a:spcAft>
-              <a:buNone/>
-            </a:pPr>
-            <a:r>
-              <a:rPr lang="en-US" sz="4800" b="1" i="0" u="none" strike="noStrike" cap="none" dirty="0">
-                <a:solidFill>
-                  <a:srgbClr val="005BBB"/>
-                </a:solidFill>
-                <a:latin typeface="Arial"/>
-                <a:ea typeface="Arial"/>
-                <a:cs typeface="Arial"/>
-                <a:sym typeface="Arial"/>
-              </a:rPr>
-              <a:t>Introduction</a:t>
-            </a:r>
-            <a:endParaRPr lang="en-US" dirty="0"/>
-          </a:p>
-          <a:p>
-            <a:pPr marL="914400" lvl="1" indent="-457200">
-              <a:lnSpc>
-                <a:spcPct val="164285"/>
-              </a:lnSpc>
-              <a:spcBef>
-                <a:spcPts val="1200"/>
-              </a:spcBef>
-              <a:buClr>
-                <a:schemeClr val="dk2"/>
-              </a:buClr>
-              <a:buSzPts val="3500"/>
-              <a:buFont typeface="Arial"/>
-              <a:buChar char="•"/>
-            </a:pPr>
-            <a:r>
-              <a:rPr lang="en-US" sz="3200" dirty="0">
-                <a:solidFill>
-                  <a:schemeClr val="accent4">
-                    <a:lumMod val="50000"/>
-                  </a:schemeClr>
-                </a:solidFill>
-              </a:rPr>
-              <a:t>Per- and polyfluoroalkyl substances (FFAS) are persistent environmental contaminants that have adverse health effects</a:t>
-            </a:r>
-          </a:p>
-          <a:p>
-            <a:pPr marL="914400" lvl="1" indent="-457200">
-              <a:lnSpc>
-                <a:spcPct val="164285"/>
-              </a:lnSpc>
-              <a:spcBef>
-                <a:spcPts val="1200"/>
-              </a:spcBef>
-              <a:buClr>
-                <a:schemeClr val="dk2"/>
-              </a:buClr>
-              <a:buSzPts val="3500"/>
-              <a:buFont typeface="Arial"/>
-              <a:buChar char="•"/>
-            </a:pPr>
-            <a:r>
-              <a:rPr lang="en-US" sz="3200" dirty="0">
-                <a:solidFill>
-                  <a:schemeClr val="accent4">
-                    <a:lumMod val="50000"/>
-                  </a:schemeClr>
-                </a:solidFill>
-              </a:rPr>
-              <a:t>Spatial analysis of PFAS monitoring data can support public health research and inform environmental policy decisions</a:t>
-            </a:r>
-          </a:p>
-          <a:p>
-            <a:pPr marL="914400" lvl="1" indent="-457200">
-              <a:lnSpc>
-                <a:spcPct val="164285"/>
-              </a:lnSpc>
-              <a:spcBef>
-                <a:spcPts val="1200"/>
-              </a:spcBef>
-              <a:buClr>
-                <a:schemeClr val="dk2"/>
-              </a:buClr>
-              <a:buSzPts val="3500"/>
-              <a:buFont typeface="Arial"/>
-              <a:buChar char="•"/>
-            </a:pPr>
-            <a:r>
-              <a:rPr lang="en-US" sz="3200" dirty="0">
-                <a:solidFill>
-                  <a:schemeClr val="accent4">
-                    <a:lumMod val="50000"/>
-                  </a:schemeClr>
-                </a:solidFill>
-              </a:rPr>
-              <a:t>We developed interactive dashboard to integrate, visualize, and summarize PFAS contamination patterns and cumulative health risks across Michigan  </a:t>
-            </a:r>
-          </a:p>
-          <a:p>
-            <a:pPr marL="0" marR="0" lvl="0" indent="0" algn="l" rtl="0">
-              <a:lnSpc>
-                <a:spcPct val="95833"/>
-              </a:lnSpc>
-              <a:spcBef>
-                <a:spcPts val="0"/>
-              </a:spcBef>
-              <a:spcAft>
-                <a:spcPts val="0"/>
-              </a:spcAft>
-              <a:buNone/>
-            </a:pPr>
-            <a:endParaRPr lang="en-US" sz="4800" b="1" dirty="0">
-              <a:solidFill>
-                <a:srgbClr val="005BBB"/>
-              </a:solidFill>
-            </a:endParaRPr>
-          </a:p>
-          <a:p>
-            <a:pPr marL="0" marR="0" lvl="0" indent="0" algn="l" rtl="0">
-              <a:lnSpc>
-                <a:spcPct val="95833"/>
-              </a:lnSpc>
-              <a:spcBef>
-                <a:spcPts val="0"/>
-              </a:spcBef>
-              <a:spcAft>
-                <a:spcPts val="0"/>
-              </a:spcAft>
-              <a:buNone/>
-            </a:pPr>
-            <a:r>
-              <a:rPr lang="en-US" sz="4800" b="1" dirty="0">
-                <a:solidFill>
-                  <a:srgbClr val="005BBB"/>
-                </a:solidFill>
-              </a:rPr>
-              <a:t>Data Source &amp; Structure</a:t>
-            </a:r>
-          </a:p>
-          <a:p>
-            <a:pPr marL="457200" marR="0" lvl="1" indent="0" algn="l" defTabSz="914400" rtl="0" eaLnBrk="1" fontAlgn="auto" latinLnBrk="0" hangingPunct="1">
-              <a:lnSpc>
-                <a:spcPct val="164285"/>
-              </a:lnSpc>
-              <a:spcBef>
-                <a:spcPts val="1200"/>
-              </a:spcBef>
-              <a:spcAft>
-                <a:spcPts val="0"/>
-              </a:spcAft>
-              <a:buClr>
-                <a:srgbClr val="005BBB"/>
-              </a:buClr>
-              <a:buSzPts val="3500"/>
-              <a:buFont typeface="Arial"/>
-              <a:buNone/>
-              <a:tabLst/>
-              <a:defRPr/>
-            </a:pPr>
-            <a:r>
-              <a:rPr kumimoji="0" lang="en-US" sz="3200" b="0" i="0" u="none" strike="noStrike" kern="0" cap="none" spc="0" normalizeH="0" baseline="0" noProof="0" dirty="0">
-                <a:ln>
-                  <a:noFill/>
-                </a:ln>
-                <a:solidFill>
-                  <a:srgbClr val="666666">
-                    <a:lumMod val="50000"/>
-                  </a:srgbClr>
-                </a:solidFill>
-                <a:effectLst/>
-                <a:uLnTx/>
-                <a:uFillTx/>
-                <a:latin typeface="Arial"/>
-                <a:cs typeface="Arial"/>
-                <a:sym typeface="Arial"/>
-              </a:rPr>
-              <a:t>This project uses publicly available PFAS datasets provided by the Michigan Department of Environment, Great Lakes, and Energy (EGLE) and the Michigan PFAS Action Response Team (MPART). The datasets used are;</a:t>
-            </a:r>
-          </a:p>
-          <a:p>
-            <a:pPr marL="971550" marR="0" lvl="1" indent="-514350" algn="l" defTabSz="914400" rtl="0" eaLnBrk="1" fontAlgn="auto" latinLnBrk="0" hangingPunct="1">
-              <a:lnSpc>
-                <a:spcPct val="164285"/>
-              </a:lnSpc>
-              <a:spcBef>
-                <a:spcPts val="1200"/>
-              </a:spcBef>
-              <a:spcAft>
-                <a:spcPts val="0"/>
-              </a:spcAft>
-              <a:buClr>
-                <a:srgbClr val="005BBB"/>
-              </a:buClr>
-              <a:buSzPts val="3500"/>
-              <a:buFont typeface="Arial" panose="020B0604020202020204" pitchFamily="34" charset="0"/>
-              <a:buChar char="•"/>
-              <a:tabLst/>
-              <a:defRPr/>
-            </a:pPr>
-            <a:r>
-              <a:rPr kumimoji="0" lang="en-US" sz="3200" b="0" i="1" u="none" strike="noStrike" kern="0" cap="none" spc="0" normalizeH="0" baseline="0" noProof="0" dirty="0">
-                <a:ln>
-                  <a:noFill/>
-                </a:ln>
-                <a:solidFill>
-                  <a:srgbClr val="666666">
-                    <a:lumMod val="50000"/>
-                  </a:srgbClr>
-                </a:solidFill>
-                <a:effectLst/>
-                <a:uLnTx/>
-                <a:uFillTx/>
-                <a:latin typeface="Arial"/>
-                <a:cs typeface="Arial"/>
-                <a:sym typeface="Arial"/>
-              </a:rPr>
-              <a:t>Surface Water Sampling Data</a:t>
-            </a:r>
-          </a:p>
-          <a:p>
-            <a:pPr marL="971550" marR="0" lvl="1" indent="-514350" algn="l" defTabSz="914400" rtl="0" eaLnBrk="1" fontAlgn="auto" latinLnBrk="0" hangingPunct="1">
-              <a:lnSpc>
-                <a:spcPct val="164285"/>
-              </a:lnSpc>
-              <a:spcBef>
-                <a:spcPts val="1200"/>
-              </a:spcBef>
-              <a:spcAft>
-                <a:spcPts val="0"/>
-              </a:spcAft>
-              <a:buClr>
-                <a:srgbClr val="005BBB"/>
-              </a:buClr>
-              <a:buSzPts val="3500"/>
-              <a:buFont typeface="Arial" panose="020B0604020202020204" pitchFamily="34" charset="0"/>
-              <a:buChar char="•"/>
-              <a:tabLst/>
-              <a:defRPr/>
-            </a:pPr>
-            <a:r>
-              <a:rPr kumimoji="0" lang="en-US" sz="3200" b="0" i="1" u="none" strike="noStrike" kern="0" cap="none" spc="0" normalizeH="0" baseline="0" noProof="0" dirty="0">
-                <a:ln>
-                  <a:noFill/>
-                </a:ln>
-                <a:solidFill>
-                  <a:srgbClr val="666666">
-                    <a:lumMod val="50000"/>
-                  </a:srgbClr>
-                </a:solidFill>
-                <a:effectLst/>
-                <a:uLnTx/>
-                <a:uFillTx/>
-                <a:latin typeface="Arial"/>
-                <a:cs typeface="Arial"/>
-                <a:sym typeface="Arial"/>
-              </a:rPr>
-              <a:t>Public Water Supply Sampling Data</a:t>
-            </a:r>
-          </a:p>
-          <a:p>
-            <a:pPr marL="971550" marR="0" lvl="1" indent="-514350" algn="l" defTabSz="914400" rtl="0" eaLnBrk="1" fontAlgn="auto" latinLnBrk="0" hangingPunct="1">
-              <a:lnSpc>
-                <a:spcPct val="164285"/>
-              </a:lnSpc>
-              <a:spcBef>
-                <a:spcPts val="1200"/>
-              </a:spcBef>
-              <a:spcAft>
-                <a:spcPts val="0"/>
-              </a:spcAft>
-              <a:buClr>
-                <a:srgbClr val="005BBB"/>
-              </a:buClr>
-              <a:buSzPts val="3500"/>
-              <a:buFont typeface="Arial" panose="020B0604020202020204" pitchFamily="34" charset="0"/>
-              <a:buChar char="•"/>
-              <a:tabLst/>
-              <a:defRPr/>
-            </a:pPr>
-            <a:r>
-              <a:rPr kumimoji="0" lang="en-US" sz="3200" b="0" i="1" u="none" strike="noStrike" kern="0" cap="none" spc="0" normalizeH="0" baseline="0" noProof="0" dirty="0">
-                <a:ln>
-                  <a:noFill/>
-                </a:ln>
-                <a:solidFill>
-                  <a:srgbClr val="666666">
-                    <a:lumMod val="50000"/>
-                  </a:srgbClr>
-                </a:solidFill>
-                <a:effectLst/>
-                <a:uLnTx/>
-                <a:uFillTx/>
-                <a:latin typeface="Arial"/>
-                <a:cs typeface="Arial"/>
-                <a:sym typeface="Arial"/>
-              </a:rPr>
-              <a:t>Michigan PFAS Sites Data</a:t>
-            </a:r>
-          </a:p>
-          <a:p>
-            <a:pPr marL="971550" marR="0" lvl="1" indent="-514350" algn="l" defTabSz="914400" rtl="0" eaLnBrk="1" fontAlgn="auto" latinLnBrk="0" hangingPunct="1">
-              <a:lnSpc>
-                <a:spcPct val="164285"/>
-              </a:lnSpc>
-              <a:spcBef>
-                <a:spcPts val="1200"/>
-              </a:spcBef>
-              <a:spcAft>
-                <a:spcPts val="0"/>
-              </a:spcAft>
-              <a:buClr>
-                <a:srgbClr val="005BBB"/>
-              </a:buClr>
-              <a:buSzPts val="3500"/>
-              <a:buFont typeface="Arial" panose="020B0604020202020204" pitchFamily="34" charset="0"/>
-              <a:buChar char="•"/>
-              <a:tabLst/>
-              <a:defRPr/>
-            </a:pPr>
-            <a:r>
-              <a:rPr kumimoji="0" lang="en-US" sz="3200" b="0" i="1" u="none" strike="noStrike" kern="0" cap="none" spc="0" normalizeH="0" baseline="0" noProof="0" dirty="0">
-                <a:ln>
-                  <a:noFill/>
-                </a:ln>
-                <a:solidFill>
-                  <a:srgbClr val="666666">
-                    <a:lumMod val="50000"/>
-                  </a:srgbClr>
-                </a:solidFill>
-                <a:effectLst/>
-                <a:uLnTx/>
-                <a:uFillTx/>
-                <a:latin typeface="Arial"/>
-                <a:cs typeface="Arial"/>
-                <a:sym typeface="Arial"/>
-              </a:rPr>
-              <a:t>PFAS Laboratory Analyte List (PDF)</a:t>
-            </a:r>
-          </a:p>
-          <a:p>
-            <a:pPr marL="457200" marR="0" lvl="1" indent="0" algn="l" defTabSz="914400" rtl="0" eaLnBrk="1" fontAlgn="auto" latinLnBrk="0" hangingPunct="1">
-              <a:lnSpc>
-                <a:spcPct val="164285"/>
-              </a:lnSpc>
-              <a:spcBef>
-                <a:spcPts val="1200"/>
-              </a:spcBef>
-              <a:spcAft>
-                <a:spcPts val="0"/>
-              </a:spcAft>
-              <a:buClr>
-                <a:srgbClr val="005BBB"/>
-              </a:buClr>
-              <a:buSzPts val="3500"/>
-              <a:buFont typeface="Arial"/>
-              <a:buNone/>
-              <a:tabLst/>
-              <a:defRPr/>
-            </a:pPr>
-            <a:endParaRPr kumimoji="0" lang="en-US" sz="3200" b="0" i="0" u="none" strike="noStrike" kern="0" cap="none" spc="0" normalizeH="0" baseline="0" noProof="0" dirty="0">
-              <a:ln>
-                <a:noFill/>
-              </a:ln>
-              <a:solidFill>
-                <a:srgbClr val="666666">
-                  <a:lumMod val="50000"/>
-                </a:srgbClr>
-              </a:solidFill>
-              <a:effectLst/>
-              <a:uLnTx/>
-              <a:uFillTx/>
-              <a:latin typeface="Arial"/>
-              <a:cs typeface="Arial"/>
-              <a:sym typeface="Arial"/>
-            </a:endParaRPr>
-          </a:p>
-          <a:p>
-            <a:pPr marL="0" marR="0" lvl="0" indent="0" algn="l" rtl="0">
-              <a:lnSpc>
-                <a:spcPct val="95833"/>
-              </a:lnSpc>
-              <a:spcBef>
-                <a:spcPts val="0"/>
-              </a:spcBef>
-              <a:spcAft>
-                <a:spcPts val="0"/>
-              </a:spcAft>
-              <a:buNone/>
-            </a:pPr>
-            <a:endParaRPr lang="en-US" dirty="0"/>
-          </a:p>
-          <a:p>
-            <a:endParaRPr lang="en-US" dirty="0"/>
-          </a:p>
-          <a:p>
-            <a:endParaRPr lang="en-US" dirty="0"/>
-          </a:p>
-          <a:p>
-            <a:endParaRPr lang="en-US" dirty="0"/>
-          </a:p>
-          <a:p>
-            <a:endParaRPr lang="en-US" dirty="0"/>
-          </a:p>
-          <a:p>
-            <a:endParaRPr lang="en-US" dirty="0"/>
-          </a:p>
-          <a:p>
-            <a:endParaRPr lang="en-US" dirty="0"/>
-          </a:p>
-          <a:p>
-            <a:endParaRPr lang="en-US" dirty="0"/>
-          </a:p>
-          <a:p>
-            <a:endParaRPr lang="en-US" dirty="0"/>
-          </a:p>
-          <a:p>
-            <a:endParaRPr lang="en-US" dirty="0"/>
-          </a:p>
-          <a:p>
-            <a:endParaRPr lang="en-US" dirty="0"/>
-          </a:p>
-          <a:p>
-            <a:endParaRPr lang="en-US" dirty="0"/>
-          </a:p>
-          <a:p>
-            <a:endParaRPr lang="en-US" dirty="0"/>
-          </a:p>
-          <a:p>
-            <a:endParaRPr lang="en-US" dirty="0"/>
-          </a:p>
-        </p:txBody>
-      </p:sp>
+      <mc:AlternateContent xmlns:mc="http://schemas.openxmlformats.org/markup-compatibility/2006">
+        <mc:Choice xmlns:a14="http://schemas.microsoft.com/office/drawing/2010/main" Requires="a14">
+          <p:sp>
+            <p:nvSpPr>
+              <p:cNvPr id="2" name="Text Placeholder 1">
+                <a:extLst>
+                  <a:ext uri="{FF2B5EF4-FFF2-40B4-BE49-F238E27FC236}">
+                    <a16:creationId xmlns:a16="http://schemas.microsoft.com/office/drawing/2014/main" id="{22F7C748-A7B8-994F-51B5-6A10DF850565}"/>
+                  </a:ext>
+                </a:extLst>
+              </p:cNvPr>
+              <p:cNvSpPr>
+                <a:spLocks noGrp="1"/>
+              </p:cNvSpPr>
+              <p:nvPr>
+                <p:ph type="body" idx="1"/>
+              </p:nvPr>
+            </p:nvSpPr>
+            <p:spPr>
+              <a:xfrm>
+                <a:off x="0" y="5619555"/>
+                <a:ext cx="14630399" cy="24821957"/>
+              </a:xfrm>
+            </p:spPr>
+            <p:txBody>
+              <a:bodyPr/>
+              <a:lstStyle/>
+              <a:p>
+                <a:pPr marL="0" marR="0" lvl="0" indent="0" algn="l" rtl="0">
+                  <a:lnSpc>
+                    <a:spcPct val="95833"/>
+                  </a:lnSpc>
+                  <a:spcBef>
+                    <a:spcPts val="0"/>
+                  </a:spcBef>
+                  <a:spcAft>
+                    <a:spcPts val="0"/>
+                  </a:spcAft>
+                  <a:buNone/>
+                </a:pPr>
+                <a:r>
+                  <a:rPr lang="en-US" sz="4800" b="1" i="0" u="none" strike="noStrike" cap="none" dirty="0">
+                    <a:solidFill>
+                      <a:srgbClr val="005BBB"/>
+                    </a:solidFill>
+                    <a:latin typeface="Arial"/>
+                    <a:ea typeface="Arial"/>
+                    <a:cs typeface="Arial"/>
+                    <a:sym typeface="Arial"/>
+                  </a:rPr>
+                  <a:t>Introduction</a:t>
+                </a:r>
+                <a:endParaRPr lang="en-US" dirty="0"/>
+              </a:p>
+              <a:p>
+                <a:pPr marL="914400" lvl="1" indent="-457200">
+                  <a:lnSpc>
+                    <a:spcPct val="164285"/>
+                  </a:lnSpc>
+                  <a:spcBef>
+                    <a:spcPts val="1200"/>
+                  </a:spcBef>
+                  <a:buClr>
+                    <a:schemeClr val="dk2"/>
+                  </a:buClr>
+                  <a:buSzPts val="3500"/>
+                  <a:buFont typeface="Arial"/>
+                  <a:buChar char="•"/>
+                </a:pPr>
+                <a:r>
+                  <a:rPr lang="en-US" sz="3200" dirty="0">
+                    <a:solidFill>
+                      <a:schemeClr val="accent4">
+                        <a:lumMod val="50000"/>
+                      </a:schemeClr>
+                    </a:solidFill>
+                  </a:rPr>
+                  <a:t>PFAS are persistent environmental contaminants with adverse health effects.</a:t>
+                </a:r>
+              </a:p>
+              <a:p>
+                <a:pPr marL="914400" lvl="1" indent="-457200">
+                  <a:spcBef>
+                    <a:spcPts val="1200"/>
+                  </a:spcBef>
+                  <a:buSzPts val="3500"/>
+                  <a:buFont typeface="Arial"/>
+                  <a:buChar char="•"/>
+                </a:pPr>
+                <a:r>
+                  <a:rPr lang="en-US" sz="3200" dirty="0">
+                    <a:solidFill>
+                      <a:schemeClr val="accent4">
+                        <a:lumMod val="50000"/>
+                      </a:schemeClr>
+                    </a:solidFill>
+                  </a:rPr>
+                  <a:t>Analysis of monitoring data provides key insights into contamination patterns and cumulative health risks, supporting research and evidence-based policy decisions.</a:t>
+                </a:r>
+              </a:p>
+              <a:p>
+                <a:pPr marL="914400" lvl="1" indent="-457200">
+                  <a:spcBef>
+                    <a:spcPts val="1200"/>
+                  </a:spcBef>
+                  <a:buSzPts val="3500"/>
+                  <a:buFont typeface="Arial"/>
+                  <a:buChar char="•"/>
+                </a:pPr>
+                <a:r>
+                  <a:rPr lang="en-US" sz="3200" dirty="0">
+                    <a:solidFill>
+                      <a:schemeClr val="accent4">
+                        <a:lumMod val="50000"/>
+                      </a:schemeClr>
+                    </a:solidFill>
+                  </a:rPr>
+                  <a:t>As part of this work, an interactive dashboard was also developed to visualize and summarize the findings across Michigan.</a:t>
+                </a:r>
+                <a:endParaRPr lang="en-US" sz="4800" b="1" dirty="0">
+                  <a:solidFill>
+                    <a:srgbClr val="005BBB"/>
+                  </a:solidFill>
+                </a:endParaRPr>
+              </a:p>
+              <a:p>
+                <a:pPr marL="0" marR="0" lvl="0" indent="0" algn="l" rtl="0">
+                  <a:lnSpc>
+                    <a:spcPct val="95833"/>
+                  </a:lnSpc>
+                  <a:spcBef>
+                    <a:spcPts val="0"/>
+                  </a:spcBef>
+                  <a:spcAft>
+                    <a:spcPts val="0"/>
+                  </a:spcAft>
+                  <a:buNone/>
+                </a:pPr>
+                <a:r>
+                  <a:rPr lang="en-US" sz="4800" b="1" dirty="0">
+                    <a:solidFill>
+                      <a:srgbClr val="005BBB"/>
+                    </a:solidFill>
+                  </a:rPr>
+                  <a:t>Data Source</a:t>
+                </a:r>
+              </a:p>
+              <a:p>
+                <a:pPr marL="457200" marR="0" lvl="1" indent="0" algn="l" defTabSz="914400" rtl="0" eaLnBrk="1" fontAlgn="auto" latinLnBrk="0" hangingPunct="1">
+                  <a:lnSpc>
+                    <a:spcPct val="164285"/>
+                  </a:lnSpc>
+                  <a:spcBef>
+                    <a:spcPts val="1200"/>
+                  </a:spcBef>
+                  <a:spcAft>
+                    <a:spcPts val="0"/>
+                  </a:spcAft>
+                  <a:buClr>
+                    <a:srgbClr val="005BBB"/>
+                  </a:buClr>
+                  <a:buSzPts val="3500"/>
+                  <a:buFont typeface="Arial"/>
+                  <a:buNone/>
+                  <a:tabLst/>
+                  <a:defRPr/>
+                </a:pPr>
+                <a:r>
+                  <a:rPr lang="en-US" sz="3200" dirty="0">
+                    <a:solidFill>
+                      <a:srgbClr val="666666">
+                        <a:lumMod val="50000"/>
+                      </a:srgbClr>
+                    </a:solidFill>
+                  </a:rPr>
+                  <a:t>T</a:t>
+                </a:r>
+                <a:r>
+                  <a:rPr kumimoji="0" lang="en-US" sz="3200" b="0" i="0" u="none" strike="noStrike" kern="0" cap="none" spc="0" normalizeH="0" baseline="0" noProof="0" dirty="0">
+                    <a:ln>
+                      <a:noFill/>
+                    </a:ln>
+                    <a:solidFill>
+                      <a:srgbClr val="666666">
+                        <a:lumMod val="50000"/>
+                      </a:srgbClr>
+                    </a:solidFill>
+                    <a:effectLst/>
+                    <a:uLnTx/>
+                    <a:uFillTx/>
+                    <a:latin typeface="Arial"/>
+                    <a:cs typeface="Arial"/>
+                    <a:sym typeface="Arial"/>
+                  </a:rPr>
+                  <a:t>he Michigan Department of Environment, Great Lakes, and Energy (EGLE) and the Michigan PFAS Action Response Team (MPART). Datasets used;</a:t>
+                </a:r>
+              </a:p>
+              <a:p>
+                <a:pPr marL="971550" marR="0" lvl="1" indent="-514350" algn="l" defTabSz="914400" rtl="0" eaLnBrk="1" fontAlgn="auto" latinLnBrk="0" hangingPunct="1">
+                  <a:lnSpc>
+                    <a:spcPct val="164285"/>
+                  </a:lnSpc>
+                  <a:spcBef>
+                    <a:spcPts val="1200"/>
+                  </a:spcBef>
+                  <a:spcAft>
+                    <a:spcPts val="0"/>
+                  </a:spcAft>
+                  <a:buClr>
+                    <a:srgbClr val="005BBB"/>
+                  </a:buClr>
+                  <a:buSzPts val="3500"/>
+                  <a:buFont typeface="Arial" panose="020B0604020202020204" pitchFamily="34" charset="0"/>
+                  <a:buChar char="•"/>
+                  <a:tabLst/>
+                  <a:defRPr/>
+                </a:pPr>
+                <a:r>
+                  <a:rPr kumimoji="0" lang="en-US" sz="3200" b="0" i="1" u="none" strike="noStrike" kern="0" cap="none" spc="0" normalizeH="0" baseline="0" noProof="0" dirty="0">
+                    <a:ln>
+                      <a:noFill/>
+                    </a:ln>
+                    <a:solidFill>
+                      <a:srgbClr val="666666">
+                        <a:lumMod val="50000"/>
+                      </a:srgbClr>
+                    </a:solidFill>
+                    <a:effectLst/>
+                    <a:uLnTx/>
+                    <a:uFillTx/>
+                    <a:latin typeface="Arial"/>
+                    <a:cs typeface="Arial"/>
+                    <a:sym typeface="Arial"/>
+                  </a:rPr>
+                  <a:t>Surface Water Sampling Data</a:t>
+                </a:r>
+              </a:p>
+              <a:p>
+                <a:pPr marL="971550" marR="0" lvl="1" indent="-514350" algn="l" defTabSz="914400" rtl="0" eaLnBrk="1" fontAlgn="auto" latinLnBrk="0" hangingPunct="1">
+                  <a:lnSpc>
+                    <a:spcPct val="164285"/>
+                  </a:lnSpc>
+                  <a:spcBef>
+                    <a:spcPts val="1200"/>
+                  </a:spcBef>
+                  <a:spcAft>
+                    <a:spcPts val="0"/>
+                  </a:spcAft>
+                  <a:buClr>
+                    <a:srgbClr val="005BBB"/>
+                  </a:buClr>
+                  <a:buSzPts val="3500"/>
+                  <a:buFont typeface="Arial" panose="020B0604020202020204" pitchFamily="34" charset="0"/>
+                  <a:buChar char="•"/>
+                  <a:tabLst/>
+                  <a:defRPr/>
+                </a:pPr>
+                <a:r>
+                  <a:rPr kumimoji="0" lang="en-US" sz="3200" b="0" i="1" u="none" strike="noStrike" kern="0" cap="none" spc="0" normalizeH="0" baseline="0" noProof="0" dirty="0">
+                    <a:ln>
+                      <a:noFill/>
+                    </a:ln>
+                    <a:solidFill>
+                      <a:srgbClr val="666666">
+                        <a:lumMod val="50000"/>
+                      </a:srgbClr>
+                    </a:solidFill>
+                    <a:effectLst/>
+                    <a:uLnTx/>
+                    <a:uFillTx/>
+                    <a:latin typeface="Arial"/>
+                    <a:cs typeface="Arial"/>
+                    <a:sym typeface="Arial"/>
+                  </a:rPr>
+                  <a:t>Public Water Supply Sampling Data</a:t>
+                </a:r>
+              </a:p>
+              <a:p>
+                <a:pPr marL="971550" marR="0" lvl="1" indent="-514350" algn="l" defTabSz="914400" rtl="0" eaLnBrk="1" fontAlgn="auto" latinLnBrk="0" hangingPunct="1">
+                  <a:lnSpc>
+                    <a:spcPct val="164285"/>
+                  </a:lnSpc>
+                  <a:spcBef>
+                    <a:spcPts val="1200"/>
+                  </a:spcBef>
+                  <a:spcAft>
+                    <a:spcPts val="0"/>
+                  </a:spcAft>
+                  <a:buClr>
+                    <a:srgbClr val="005BBB"/>
+                  </a:buClr>
+                  <a:buSzPts val="3500"/>
+                  <a:buFont typeface="Arial" panose="020B0604020202020204" pitchFamily="34" charset="0"/>
+                  <a:buChar char="•"/>
+                  <a:tabLst/>
+                  <a:defRPr/>
+                </a:pPr>
+                <a:r>
+                  <a:rPr kumimoji="0" lang="en-US" sz="3200" b="0" i="1" u="none" strike="noStrike" kern="0" cap="none" spc="0" normalizeH="0" baseline="0" noProof="0" dirty="0">
+                    <a:ln>
+                      <a:noFill/>
+                    </a:ln>
+                    <a:solidFill>
+                      <a:srgbClr val="666666">
+                        <a:lumMod val="50000"/>
+                      </a:srgbClr>
+                    </a:solidFill>
+                    <a:effectLst/>
+                    <a:uLnTx/>
+                    <a:uFillTx/>
+                    <a:latin typeface="Arial"/>
+                    <a:cs typeface="Arial"/>
+                    <a:sym typeface="Arial"/>
+                  </a:rPr>
+                  <a:t>Michigan PFAS Sites Data</a:t>
+                </a:r>
+              </a:p>
+              <a:p>
+                <a:pPr marL="971550" marR="0" lvl="1" indent="-514350" algn="l" defTabSz="914400" rtl="0" eaLnBrk="1" fontAlgn="auto" latinLnBrk="0" hangingPunct="1">
+                  <a:lnSpc>
+                    <a:spcPct val="164285"/>
+                  </a:lnSpc>
+                  <a:spcBef>
+                    <a:spcPts val="1200"/>
+                  </a:spcBef>
+                  <a:spcAft>
+                    <a:spcPts val="0"/>
+                  </a:spcAft>
+                  <a:buClr>
+                    <a:srgbClr val="005BBB"/>
+                  </a:buClr>
+                  <a:buSzPts val="3500"/>
+                  <a:buFont typeface="Arial" panose="020B0604020202020204" pitchFamily="34" charset="0"/>
+                  <a:buChar char="•"/>
+                  <a:tabLst/>
+                  <a:defRPr/>
+                </a:pPr>
+                <a:r>
+                  <a:rPr kumimoji="0" lang="en-US" sz="3200" b="0" i="1" u="none" strike="noStrike" kern="0" cap="none" spc="0" normalizeH="0" baseline="0" noProof="0" dirty="0">
+                    <a:ln>
+                      <a:noFill/>
+                    </a:ln>
+                    <a:solidFill>
+                      <a:srgbClr val="666666">
+                        <a:lumMod val="50000"/>
+                      </a:srgbClr>
+                    </a:solidFill>
+                    <a:effectLst/>
+                    <a:uLnTx/>
+                    <a:uFillTx/>
+                    <a:latin typeface="Arial"/>
+                    <a:cs typeface="Arial"/>
+                    <a:sym typeface="Arial"/>
+                  </a:rPr>
+                  <a:t>PFAS Laboratory Analyte List (PDF)</a:t>
+                </a:r>
+              </a:p>
+              <a:p>
+                <a:pPr marL="0" lvl="0" indent="0">
+                  <a:lnSpc>
+                    <a:spcPct val="95833"/>
+                  </a:lnSpc>
+                </a:pPr>
+                <a:endParaRPr lang="en-US" sz="4800" b="1" dirty="0">
+                  <a:solidFill>
+                    <a:srgbClr val="005BBB"/>
+                  </a:solidFill>
+                </a:endParaRPr>
+              </a:p>
+              <a:p>
+                <a:pPr marL="0" lvl="0" indent="0">
+                  <a:lnSpc>
+                    <a:spcPct val="95833"/>
+                  </a:lnSpc>
+                </a:pPr>
+                <a:r>
+                  <a:rPr lang="en-US" sz="4800" b="1" dirty="0">
+                    <a:solidFill>
+                      <a:srgbClr val="005BBB"/>
+                    </a:solidFill>
+                  </a:rPr>
+                  <a:t>Hazard Index EPA Definition</a:t>
+                </a:r>
+              </a:p>
+              <a:p>
+                <a:pPr marL="0" lvl="0" indent="0">
+                  <a:lnSpc>
+                    <a:spcPct val="95833"/>
+                  </a:lnSpc>
+                </a:pPr>
+                <a:endParaRPr lang="en-US" sz="3200" dirty="0">
+                  <a:solidFill>
+                    <a:srgbClr val="666666">
+                      <a:lumMod val="50000"/>
+                    </a:srgbClr>
+                  </a:solidFill>
+                </a:endParaRPr>
+              </a:p>
+              <a:p>
+                <a14:m>
+                  <m:oMath xmlns:m="http://schemas.openxmlformats.org/officeDocument/2006/math">
+                    <m:r>
+                      <a:rPr lang="en-US" sz="3200" b="1" i="1" smtClean="0">
+                        <a:solidFill>
+                          <a:schemeClr val="accent1">
+                            <a:lumMod val="50000"/>
+                          </a:schemeClr>
+                        </a:solidFill>
+                        <a:latin typeface="Cambria Math" panose="02040503050406030204" pitchFamily="18" charset="0"/>
+                      </a:rPr>
+                      <m:t>𝑯𝑰</m:t>
+                    </m:r>
+                    <m:r>
+                      <a:rPr lang="en-US" sz="3200" b="1" i="1" smtClean="0">
+                        <a:solidFill>
+                          <a:schemeClr val="accent1">
+                            <a:lumMod val="50000"/>
+                          </a:schemeClr>
+                        </a:solidFill>
+                        <a:latin typeface="Cambria Math" panose="02040503050406030204" pitchFamily="18" charset="0"/>
+                      </a:rPr>
+                      <m:t> </m:t>
+                    </m:r>
+                    <m:d>
+                      <m:dPr>
+                        <m:ctrlPr>
+                          <a:rPr lang="en-US" sz="3200" b="1" i="1" smtClean="0">
+                            <a:solidFill>
+                              <a:schemeClr val="accent1">
+                                <a:lumMod val="50000"/>
+                              </a:schemeClr>
+                            </a:solidFill>
+                            <a:latin typeface="Cambria Math" panose="02040503050406030204" pitchFamily="18" charset="0"/>
+                          </a:rPr>
+                        </m:ctrlPr>
+                      </m:dPr>
+                      <m:e>
+                        <m:r>
+                          <a:rPr lang="en-US" sz="3200" b="1" i="1" smtClean="0">
+                            <a:solidFill>
+                              <a:schemeClr val="accent1">
+                                <a:lumMod val="50000"/>
+                              </a:schemeClr>
+                            </a:solidFill>
+                            <a:latin typeface="Cambria Math" panose="02040503050406030204" pitchFamily="18" charset="0"/>
+                          </a:rPr>
+                          <m:t>𝒖𝒏𝒊𝒕𝒍𝒆𝒔𝒔</m:t>
+                        </m:r>
+                      </m:e>
+                    </m:d>
+                    <m:r>
+                      <a:rPr lang="en-US" sz="3200" b="1" i="1" smtClean="0">
+                        <a:solidFill>
+                          <a:schemeClr val="accent1">
+                            <a:lumMod val="50000"/>
+                          </a:schemeClr>
+                        </a:solidFill>
+                        <a:latin typeface="Cambria Math" panose="02040503050406030204" pitchFamily="18" charset="0"/>
+                      </a:rPr>
+                      <m:t>=(</m:t>
+                    </m:r>
+                    <m:r>
+                      <a:rPr lang="en-US" sz="3200" b="1" i="1" smtClean="0">
+                        <a:solidFill>
+                          <a:schemeClr val="accent1">
+                            <a:lumMod val="50000"/>
+                          </a:schemeClr>
+                        </a:solidFill>
+                        <a:latin typeface="Cambria Math" panose="02040503050406030204" pitchFamily="18" charset="0"/>
+                      </a:rPr>
+                      <m:t>𝑯𝑭𝑷𝑶</m:t>
+                    </m:r>
+                    <m:r>
+                      <a:rPr lang="en-US" sz="3200" b="1" i="1" smtClean="0">
+                        <a:solidFill>
+                          <a:schemeClr val="accent1">
+                            <a:lumMod val="50000"/>
+                          </a:schemeClr>
+                        </a:solidFill>
+                        <a:latin typeface="Cambria Math" panose="02040503050406030204" pitchFamily="18" charset="0"/>
+                      </a:rPr>
+                      <m:t>−</m:t>
+                    </m:r>
+                    <m:r>
+                      <a:rPr lang="en-US" sz="3200" b="1" i="1" smtClean="0">
+                        <a:solidFill>
+                          <a:schemeClr val="accent1">
+                            <a:lumMod val="50000"/>
+                          </a:schemeClr>
+                        </a:solidFill>
+                        <a:latin typeface="Cambria Math" panose="02040503050406030204" pitchFamily="18" charset="0"/>
+                      </a:rPr>
+                      <m:t>𝑫𝑨</m:t>
+                    </m:r>
+                    <m:d>
+                      <m:dPr>
+                        <m:ctrlPr>
+                          <a:rPr lang="en-US" sz="3200" b="1" i="1" smtClean="0">
+                            <a:solidFill>
+                              <a:schemeClr val="accent1">
+                                <a:lumMod val="50000"/>
+                              </a:schemeClr>
+                            </a:solidFill>
+                            <a:latin typeface="Cambria Math" panose="02040503050406030204" pitchFamily="18" charset="0"/>
+                          </a:rPr>
+                        </m:ctrlPr>
+                      </m:dPr>
+                      <m:e>
+                        <m:r>
+                          <a:rPr lang="en-US" sz="3200" b="1" i="1" smtClean="0">
+                            <a:solidFill>
+                              <a:schemeClr val="accent1">
+                                <a:lumMod val="50000"/>
+                              </a:schemeClr>
+                            </a:solidFill>
+                            <a:latin typeface="Cambria Math" panose="02040503050406030204" pitchFamily="18" charset="0"/>
+                          </a:rPr>
+                          <m:t>𝒑𝒑𝒕</m:t>
+                        </m:r>
+                      </m:e>
+                    </m:d>
+                    <m:r>
+                      <a:rPr lang="en-US" sz="3200" b="1" i="1" smtClean="0">
+                        <a:solidFill>
+                          <a:schemeClr val="accent1">
+                            <a:lumMod val="50000"/>
+                          </a:schemeClr>
+                        </a:solidFill>
+                        <a:latin typeface="Cambria Math" panose="02040503050406030204" pitchFamily="18" charset="0"/>
+                      </a:rPr>
+                      <m:t>/</m:t>
+                    </m:r>
+                    <m:r>
+                      <a:rPr lang="en-US" sz="3200" b="1" i="1" smtClean="0">
+                        <a:solidFill>
+                          <a:schemeClr val="accent1">
+                            <a:lumMod val="50000"/>
+                          </a:schemeClr>
+                        </a:solidFill>
+                        <a:latin typeface="Cambria Math" panose="02040503050406030204" pitchFamily="18" charset="0"/>
+                      </a:rPr>
+                      <m:t>𝟏𝟎</m:t>
+                    </m:r>
+                  </m:oMath>
+                </a14:m>
+                <a:r>
+                  <a:rPr lang="en-US" sz="3200" b="1" dirty="0">
+                    <a:solidFill>
+                      <a:schemeClr val="accent1">
+                        <a:lumMod val="50000"/>
+                      </a:schemeClr>
+                    </a:solidFill>
+                  </a:rPr>
+                  <a:t> (ppt) ) + </a:t>
+                </a:r>
+                <a14:m>
+                  <m:oMath xmlns:m="http://schemas.openxmlformats.org/officeDocument/2006/math">
+                    <m:r>
+                      <a:rPr lang="en-US" sz="3200" b="1" i="1">
+                        <a:solidFill>
+                          <a:schemeClr val="accent1">
+                            <a:lumMod val="50000"/>
+                          </a:schemeClr>
+                        </a:solidFill>
+                        <a:latin typeface="Cambria Math" panose="02040503050406030204" pitchFamily="18" charset="0"/>
+                      </a:rPr>
+                      <m:t>(</m:t>
+                    </m:r>
+                    <m:r>
+                      <a:rPr lang="en-US" sz="3200" b="1" i="1" smtClean="0">
+                        <a:solidFill>
+                          <a:schemeClr val="accent1">
+                            <a:lumMod val="50000"/>
+                          </a:schemeClr>
+                        </a:solidFill>
+                        <a:latin typeface="Cambria Math" panose="02040503050406030204" pitchFamily="18" charset="0"/>
+                      </a:rPr>
+                      <m:t>𝑷𝑭𝑩𝑺</m:t>
+                    </m:r>
+                    <m:d>
+                      <m:dPr>
+                        <m:ctrlPr>
+                          <a:rPr lang="en-US" sz="3200" b="1" i="1">
+                            <a:solidFill>
+                              <a:schemeClr val="accent1">
+                                <a:lumMod val="50000"/>
+                              </a:schemeClr>
+                            </a:solidFill>
+                            <a:latin typeface="Cambria Math" panose="02040503050406030204" pitchFamily="18" charset="0"/>
+                          </a:rPr>
+                        </m:ctrlPr>
+                      </m:dPr>
+                      <m:e>
+                        <m:r>
+                          <a:rPr lang="en-US" sz="3200" b="1" i="1">
+                            <a:solidFill>
+                              <a:schemeClr val="accent1">
+                                <a:lumMod val="50000"/>
+                              </a:schemeClr>
+                            </a:solidFill>
+                            <a:latin typeface="Cambria Math" panose="02040503050406030204" pitchFamily="18" charset="0"/>
+                          </a:rPr>
+                          <m:t>𝒑𝒑𝒕</m:t>
+                        </m:r>
+                      </m:e>
+                    </m:d>
+                    <m:r>
+                      <a:rPr lang="en-US" sz="3200" b="1" i="1">
+                        <a:solidFill>
+                          <a:schemeClr val="accent1">
+                            <a:lumMod val="50000"/>
+                          </a:schemeClr>
+                        </a:solidFill>
+                        <a:latin typeface="Cambria Math" panose="02040503050406030204" pitchFamily="18" charset="0"/>
+                      </a:rPr>
+                      <m:t>/</m:t>
+                    </m:r>
+                    <m:r>
+                      <a:rPr lang="en-US" sz="3200" b="1" i="1" smtClean="0">
+                        <a:solidFill>
+                          <a:schemeClr val="accent1">
+                            <a:lumMod val="50000"/>
+                          </a:schemeClr>
+                        </a:solidFill>
+                        <a:latin typeface="Cambria Math" panose="02040503050406030204" pitchFamily="18" charset="0"/>
+                      </a:rPr>
+                      <m:t>𝟐𝟎𝟎</m:t>
+                    </m:r>
+                    <m:r>
+                      <a:rPr lang="en-US" sz="3200" b="1" i="1">
+                        <a:solidFill>
+                          <a:schemeClr val="accent1">
+                            <a:lumMod val="50000"/>
+                          </a:schemeClr>
+                        </a:solidFill>
+                        <a:latin typeface="Cambria Math" panose="02040503050406030204" pitchFamily="18" charset="0"/>
+                      </a:rPr>
+                      <m:t>𝟎</m:t>
+                    </m:r>
+                  </m:oMath>
+                </a14:m>
+                <a:r>
+                  <a:rPr lang="en-US" sz="3200" b="1" dirty="0">
+                    <a:solidFill>
+                      <a:schemeClr val="accent1">
+                        <a:lumMod val="50000"/>
+                      </a:schemeClr>
+                    </a:solidFill>
+                  </a:rPr>
+                  <a:t> (ppt) ) + </a:t>
+                </a:r>
+                <a14:m>
+                  <m:oMath xmlns:m="http://schemas.openxmlformats.org/officeDocument/2006/math">
+                    <m:r>
+                      <a:rPr lang="en-US" sz="3200" b="1" i="1">
+                        <a:solidFill>
+                          <a:schemeClr val="accent1">
+                            <a:lumMod val="50000"/>
+                          </a:schemeClr>
+                        </a:solidFill>
+                        <a:latin typeface="Cambria Math" panose="02040503050406030204" pitchFamily="18" charset="0"/>
+                      </a:rPr>
+                      <m:t>(</m:t>
+                    </m:r>
+                    <m:r>
+                      <a:rPr lang="en-US" sz="3200" b="1" i="1" smtClean="0">
+                        <a:solidFill>
+                          <a:schemeClr val="accent1">
+                            <a:lumMod val="50000"/>
+                          </a:schemeClr>
+                        </a:solidFill>
+                        <a:latin typeface="Cambria Math" panose="02040503050406030204" pitchFamily="18" charset="0"/>
+                      </a:rPr>
+                      <m:t>𝑷𝑭𝑵𝑨</m:t>
+                    </m:r>
+                    <m:d>
+                      <m:dPr>
+                        <m:ctrlPr>
+                          <a:rPr lang="en-US" sz="3200" b="1" i="1">
+                            <a:solidFill>
+                              <a:schemeClr val="accent1">
+                                <a:lumMod val="50000"/>
+                              </a:schemeClr>
+                            </a:solidFill>
+                            <a:latin typeface="Cambria Math" panose="02040503050406030204" pitchFamily="18" charset="0"/>
+                          </a:rPr>
+                        </m:ctrlPr>
+                      </m:dPr>
+                      <m:e>
+                        <m:r>
+                          <a:rPr lang="en-US" sz="3200" b="1" i="1">
+                            <a:solidFill>
+                              <a:schemeClr val="accent1">
+                                <a:lumMod val="50000"/>
+                              </a:schemeClr>
+                            </a:solidFill>
+                            <a:latin typeface="Cambria Math" panose="02040503050406030204" pitchFamily="18" charset="0"/>
+                          </a:rPr>
+                          <m:t>𝒑𝒑𝒕</m:t>
+                        </m:r>
+                      </m:e>
+                    </m:d>
+                    <m:r>
+                      <a:rPr lang="en-US" sz="3200" b="1" i="1">
+                        <a:solidFill>
+                          <a:schemeClr val="accent1">
+                            <a:lumMod val="50000"/>
+                          </a:schemeClr>
+                        </a:solidFill>
+                        <a:latin typeface="Cambria Math" panose="02040503050406030204" pitchFamily="18" charset="0"/>
+                      </a:rPr>
+                      <m:t>/</m:t>
+                    </m:r>
+                    <m:r>
+                      <a:rPr lang="en-US" sz="3200" b="1" i="1">
+                        <a:solidFill>
+                          <a:schemeClr val="accent1">
+                            <a:lumMod val="50000"/>
+                          </a:schemeClr>
+                        </a:solidFill>
+                        <a:latin typeface="Cambria Math" panose="02040503050406030204" pitchFamily="18" charset="0"/>
+                      </a:rPr>
+                      <m:t>𝟏𝟎</m:t>
+                    </m:r>
+                  </m:oMath>
+                </a14:m>
+                <a:r>
+                  <a:rPr lang="en-US" sz="3200" b="1" dirty="0">
+                    <a:solidFill>
+                      <a:schemeClr val="accent1">
+                        <a:lumMod val="50000"/>
+                      </a:schemeClr>
+                    </a:solidFill>
+                  </a:rPr>
+                  <a:t> (ppt) ) + </a:t>
+                </a:r>
+                <a14:m>
+                  <m:oMath xmlns:m="http://schemas.openxmlformats.org/officeDocument/2006/math">
+                    <m:r>
+                      <a:rPr lang="en-US" sz="3200" b="1" i="1">
+                        <a:solidFill>
+                          <a:schemeClr val="accent1">
+                            <a:lumMod val="50000"/>
+                          </a:schemeClr>
+                        </a:solidFill>
+                        <a:latin typeface="Cambria Math" panose="02040503050406030204" pitchFamily="18" charset="0"/>
+                      </a:rPr>
+                      <m:t>(</m:t>
+                    </m:r>
+                    <m:r>
+                      <a:rPr lang="en-US" sz="3200" b="1" i="1" smtClean="0">
+                        <a:solidFill>
+                          <a:schemeClr val="accent1">
+                            <a:lumMod val="50000"/>
+                          </a:schemeClr>
+                        </a:solidFill>
+                        <a:latin typeface="Cambria Math" panose="02040503050406030204" pitchFamily="18" charset="0"/>
+                      </a:rPr>
+                      <m:t>𝑷𝑭𝑯𝒙𝑺</m:t>
+                    </m:r>
+                    <m:r>
+                      <a:rPr lang="en-US" sz="3200" b="1" i="1">
+                        <a:solidFill>
+                          <a:schemeClr val="accent1">
+                            <a:lumMod val="50000"/>
+                          </a:schemeClr>
+                        </a:solidFill>
+                        <a:latin typeface="Cambria Math" panose="02040503050406030204" pitchFamily="18" charset="0"/>
+                      </a:rPr>
+                      <m:t>/</m:t>
+                    </m:r>
+                    <m:r>
+                      <a:rPr lang="en-US" sz="3200" b="1" i="1">
+                        <a:solidFill>
+                          <a:schemeClr val="accent1">
+                            <a:lumMod val="50000"/>
+                          </a:schemeClr>
+                        </a:solidFill>
+                        <a:latin typeface="Cambria Math" panose="02040503050406030204" pitchFamily="18" charset="0"/>
+                      </a:rPr>
+                      <m:t>𝟏𝟎</m:t>
+                    </m:r>
+                  </m:oMath>
+                </a14:m>
+                <a:r>
+                  <a:rPr lang="en-US" sz="3200" b="1" dirty="0">
+                    <a:solidFill>
+                      <a:schemeClr val="accent1">
+                        <a:lumMod val="50000"/>
+                      </a:schemeClr>
+                    </a:solidFill>
+                  </a:rPr>
+                  <a:t> (ppt ) ) </a:t>
+                </a:r>
+              </a:p>
+              <a:p>
+                <a:endParaRPr lang="en-US" sz="3200" b="1" dirty="0"/>
+              </a:p>
+              <a:p>
+                <a:pPr marL="0" indent="0">
+                  <a:lnSpc>
+                    <a:spcPct val="95833"/>
+                  </a:lnSpc>
+                </a:pPr>
+                <a:r>
+                  <a:rPr lang="en-US" sz="4800" b="1" dirty="0">
+                    <a:solidFill>
+                      <a:srgbClr val="005BBB"/>
+                    </a:solidFill>
+                  </a:rPr>
+                  <a:t>Analytical Framework</a:t>
+                </a:r>
+              </a:p>
+              <a:p>
+                <a:pPr lvl="1">
+                  <a:spcBef>
+                    <a:spcPts val="1200"/>
+                  </a:spcBef>
+                  <a:buSzPts val="3500"/>
+                </a:pPr>
+                <a:r>
+                  <a:rPr lang="en-US" sz="3200" dirty="0"/>
+                  <a:t>This analysis integrates PFAS datasets into a unified framework for geospatial harmonization, data transformation, and construction of a weighted Hazard Index from key analytes, enabling hierarchical aggregation and decomposition of risk across sites, systems, and counties. It emphasizes multi-scale analytical exploration to identify dominant contributors, quantify cumulative exposure, and reveal spatial patterns of PFAS risk in Michigan</a:t>
+                </a:r>
+                <a:endParaRPr lang="en-US" sz="3200" dirty="0">
+                  <a:solidFill>
+                    <a:srgbClr val="666666">
+                      <a:lumMod val="50000"/>
+                    </a:srgbClr>
+                  </a:solidFill>
+                </a:endParaRPr>
+              </a:p>
+              <a:p>
+                <a:endParaRPr lang="en-US" dirty="0"/>
+              </a:p>
+              <a:p>
+                <a:endParaRPr lang="en-US" dirty="0"/>
+              </a:p>
+              <a:p>
+                <a:endParaRPr lang="en-US" dirty="0"/>
+              </a:p>
+              <a:p>
+                <a:endParaRPr lang="en-US" dirty="0"/>
+              </a:p>
+              <a:p>
+                <a:endParaRPr lang="en-US" dirty="0"/>
+              </a:p>
+            </p:txBody>
+          </p:sp>
+        </mc:Choice>
+        <mc:Fallback>
+          <p:sp>
+            <p:nvSpPr>
+              <p:cNvPr id="2" name="Text Placeholder 1">
+                <a:extLst>
+                  <a:ext uri="{FF2B5EF4-FFF2-40B4-BE49-F238E27FC236}">
+                    <a16:creationId xmlns:a16="http://schemas.microsoft.com/office/drawing/2014/main" id="{22F7C748-A7B8-994F-51B5-6A10DF850565}"/>
+                  </a:ext>
+                </a:extLst>
+              </p:cNvPr>
+              <p:cNvSpPr>
+                <a:spLocks noGrp="1" noRot="1" noChangeAspect="1" noMove="1" noResize="1" noEditPoints="1" noAdjustHandles="1" noChangeArrowheads="1" noChangeShapeType="1" noTextEdit="1"/>
+              </p:cNvSpPr>
+              <p:nvPr>
+                <p:ph type="body" idx="1"/>
+              </p:nvPr>
+            </p:nvSpPr>
+            <p:spPr>
+              <a:xfrm>
+                <a:off x="0" y="5619555"/>
+                <a:ext cx="14630399" cy="24821957"/>
+              </a:xfrm>
+              <a:blipFill>
+                <a:blip r:embed="rId2"/>
+                <a:stretch>
+                  <a:fillRect l="-1997" t="-716" r="-1649"/>
+                </a:stretch>
+              </a:blipFill>
+            </p:spPr>
+            <p:txBody>
+              <a:bodyPr/>
+              <a:lstStyle/>
+              <a:p>
+                <a:r>
+                  <a:rPr lang="en-US">
+                    <a:noFill/>
+                  </a:rPr>
+                  <a:t> </a:t>
+                </a:r>
+              </a:p>
+            </p:txBody>
+          </p:sp>
+        </mc:Fallback>
+      </mc:AlternateContent>
       <p:sp>
         <p:nvSpPr>
           <p:cNvPr id="5" name="Text Placeholder 4">
@@ -7257,245 +7804,13 @@
         </p:nvSpPr>
         <p:spPr>
           <a:xfrm>
-            <a:off x="15220335" y="5918525"/>
-            <a:ext cx="13775770" cy="24224017"/>
+            <a:off x="14895095" y="5629335"/>
+            <a:ext cx="14101012" cy="24812177"/>
           </a:xfrm>
         </p:spPr>
         <p:txBody>
           <a:bodyPr/>
           <a:lstStyle/>
-          <a:p>
-            <a:pPr marL="0" indent="0">
-              <a:lnSpc>
-                <a:spcPct val="95833"/>
-              </a:lnSpc>
-            </a:pPr>
-            <a:r>
-              <a:rPr lang="en-US" sz="4800" b="1" dirty="0">
-                <a:solidFill>
-                  <a:srgbClr val="005BBB"/>
-                </a:solidFill>
-              </a:rPr>
-              <a:t>Hazard Index Formula</a:t>
-            </a:r>
-          </a:p>
-          <a:p>
-            <a:pPr marL="0" indent="0">
-              <a:lnSpc>
-                <a:spcPct val="95833"/>
-              </a:lnSpc>
-            </a:pPr>
-            <a:endParaRPr lang="en-US" sz="4800" b="1" dirty="0">
-              <a:solidFill>
-                <a:srgbClr val="005BBB"/>
-              </a:solidFill>
-            </a:endParaRPr>
-          </a:p>
-          <a:p>
-            <a:pPr marL="0" indent="0">
-              <a:lnSpc>
-                <a:spcPct val="95833"/>
-              </a:lnSpc>
-            </a:pPr>
-            <a:endParaRPr lang="en-US" sz="4800" b="1" dirty="0">
-              <a:solidFill>
-                <a:srgbClr val="005BBB"/>
-              </a:solidFill>
-            </a:endParaRPr>
-          </a:p>
-          <a:p>
-            <a:pPr marL="0" indent="0">
-              <a:lnSpc>
-                <a:spcPct val="95833"/>
-              </a:lnSpc>
-            </a:pPr>
-            <a:endParaRPr lang="en-US" sz="4800" b="1" dirty="0">
-              <a:solidFill>
-                <a:srgbClr val="005BBB"/>
-              </a:solidFill>
-            </a:endParaRPr>
-          </a:p>
-          <a:p>
-            <a:pPr marL="0" indent="0">
-              <a:lnSpc>
-                <a:spcPct val="95833"/>
-              </a:lnSpc>
-            </a:pPr>
-            <a:endParaRPr lang="en-US" sz="4800" b="1" dirty="0">
-              <a:solidFill>
-                <a:srgbClr val="005BBB"/>
-              </a:solidFill>
-            </a:endParaRPr>
-          </a:p>
-          <a:p>
-            <a:pPr marL="0" lvl="0" indent="0">
-              <a:spcBef>
-                <a:spcPts val="1200"/>
-              </a:spcBef>
-              <a:spcAft>
-                <a:spcPts val="1200"/>
-              </a:spcAft>
-              <a:buClr>
-                <a:srgbClr val="7F7F7F"/>
-              </a:buClr>
-            </a:pPr>
-            <a:endParaRPr lang="en-US" sz="3200" dirty="0">
-              <a:solidFill>
-                <a:schemeClr val="accent4">
-                  <a:lumMod val="50000"/>
-                </a:schemeClr>
-              </a:solidFill>
-            </a:endParaRPr>
-          </a:p>
-          <a:p>
-            <a:pPr marL="0" indent="0">
-              <a:lnSpc>
-                <a:spcPct val="95833"/>
-              </a:lnSpc>
-            </a:pPr>
-            <a:r>
-              <a:rPr lang="en-US" sz="4800" b="1" dirty="0">
-                <a:solidFill>
-                  <a:srgbClr val="005BBB"/>
-                </a:solidFill>
-              </a:rPr>
-              <a:t>Analytical Framework</a:t>
-            </a:r>
-          </a:p>
-          <a:p>
-            <a:pPr marL="457200" lvl="1" indent="0">
-              <a:spcBef>
-                <a:spcPts val="1200"/>
-              </a:spcBef>
-              <a:buSzPts val="3500"/>
-              <a:buNone/>
-            </a:pPr>
-            <a:r>
-              <a:rPr lang="en-US" sz="3200" dirty="0">
-                <a:solidFill>
-                  <a:schemeClr val="accent4">
-                    <a:lumMod val="50000"/>
-                  </a:schemeClr>
-                </a:solidFill>
-              </a:rPr>
-              <a:t>The  analysis integrates multiple datasets into a unified framework that supports spatial visualization of PFAS concentrations, aggregation of hazard analytes into a cumulative risk metric(Hazard Index), and interactive exploration at multiple geographic scales.</a:t>
-            </a:r>
-          </a:p>
-          <a:p>
-            <a:pPr marL="457200" lvl="1" indent="0">
-              <a:spcBef>
-                <a:spcPts val="1200"/>
-              </a:spcBef>
-              <a:buSzPts val="3500"/>
-              <a:buNone/>
-            </a:pPr>
-            <a:endParaRPr lang="en-US" sz="3200" dirty="0">
-              <a:solidFill>
-                <a:schemeClr val="accent4">
-                  <a:lumMod val="50000"/>
-                </a:schemeClr>
-              </a:solidFill>
-            </a:endParaRPr>
-          </a:p>
-          <a:p>
-            <a:pPr marL="0" indent="0">
-              <a:lnSpc>
-                <a:spcPct val="95833"/>
-              </a:lnSpc>
-            </a:pPr>
-            <a:r>
-              <a:rPr lang="en-US" sz="4800" b="1" dirty="0">
-                <a:solidFill>
-                  <a:srgbClr val="005BBB"/>
-                </a:solidFill>
-              </a:rPr>
-              <a:t>Dashboard Implementation</a:t>
-            </a:r>
-            <a:endParaRPr kumimoji="0" lang="en-US" sz="3200" b="0" i="0" u="none" strike="noStrike" kern="0" cap="none" spc="0" normalizeH="0" baseline="0" noProof="0" dirty="0">
-              <a:ln>
-                <a:noFill/>
-              </a:ln>
-              <a:solidFill>
-                <a:srgbClr val="666666">
-                  <a:lumMod val="50000"/>
-                </a:srgbClr>
-              </a:solidFill>
-              <a:effectLst/>
-              <a:uLnTx/>
-              <a:uFillTx/>
-              <a:latin typeface="Arial"/>
-              <a:cs typeface="Arial"/>
-              <a:sym typeface="Arial"/>
-            </a:endParaRPr>
-          </a:p>
-          <a:p>
-            <a:pPr marL="457200" marR="0" lvl="1" indent="0" algn="l" defTabSz="914400" rtl="0" eaLnBrk="1" fontAlgn="auto" latinLnBrk="0" hangingPunct="1">
-              <a:lnSpc>
-                <a:spcPct val="164285"/>
-              </a:lnSpc>
-              <a:spcBef>
-                <a:spcPts val="1200"/>
-              </a:spcBef>
-              <a:spcAft>
-                <a:spcPts val="0"/>
-              </a:spcAft>
-              <a:buClr>
-                <a:srgbClr val="005BBB"/>
-              </a:buClr>
-              <a:buSzPts val="3500"/>
-              <a:buFont typeface="Arial"/>
-              <a:buNone/>
-              <a:tabLst/>
-              <a:defRPr/>
-            </a:pPr>
-            <a:r>
-              <a:rPr lang="en-US" sz="3200" dirty="0">
-                <a:solidFill>
-                  <a:srgbClr val="666666">
-                    <a:lumMod val="50000"/>
-                  </a:srgbClr>
-                </a:solidFill>
-              </a:rPr>
-              <a:t>The interactive dashboard was built in R and Quarto. Leaflet maps display spatial patterns of PFAS concentration and cumulative health risks across Michigan while Plotly charts allow user to freely examine the cumulative health risks levels together with the metrics tables. The data processing was done in R , contents structured using Markdown with some interactivity and user navigation supported in JavaScript. This dashboard is deployed on GitHub pages providing open access for research, policy makers, the public, and for future works.</a:t>
-            </a:r>
-          </a:p>
-          <a:p>
-            <a:pPr marL="457200" marR="0" lvl="1" indent="0" algn="l" defTabSz="914400" rtl="0" eaLnBrk="1" fontAlgn="auto" latinLnBrk="0" hangingPunct="1">
-              <a:lnSpc>
-                <a:spcPct val="164285"/>
-              </a:lnSpc>
-              <a:spcBef>
-                <a:spcPts val="1200"/>
-              </a:spcBef>
-              <a:spcAft>
-                <a:spcPts val="0"/>
-              </a:spcAft>
-              <a:buClr>
-                <a:srgbClr val="005BBB"/>
-              </a:buClr>
-              <a:buSzPts val="3500"/>
-              <a:buFont typeface="Arial"/>
-              <a:buNone/>
-              <a:tabLst/>
-              <a:defRPr/>
-            </a:pPr>
-            <a:endParaRPr kumimoji="0" lang="en-US" sz="3200" b="0" i="0" u="none" strike="noStrike" kern="0" cap="none" spc="0" normalizeH="0" baseline="0" noProof="0" dirty="0">
-              <a:ln>
-                <a:noFill/>
-              </a:ln>
-              <a:solidFill>
-                <a:srgbClr val="666666">
-                  <a:lumMod val="50000"/>
-                </a:srgbClr>
-              </a:solidFill>
-              <a:effectLst/>
-              <a:uLnTx/>
-              <a:uFillTx/>
-              <a:latin typeface="Arial"/>
-              <a:cs typeface="Arial"/>
-              <a:sym typeface="Arial"/>
-            </a:endParaRPr>
-          </a:p>
           <a:p>
             <a:pPr marL="0" marR="0" lvl="0" indent="0" algn="l" defTabSz="914400" rtl="0" eaLnBrk="1" fontAlgn="auto" latinLnBrk="0" hangingPunct="1">
               <a:lnSpc>
@@ -7517,15 +7832,7 @@
               <a:defRPr/>
             </a:pPr>
             <a:r>
-              <a:rPr lang="en-US" sz="4800" b="1" dirty="0">
-                <a:solidFill>
-                  <a:srgbClr val="005BBB"/>
-                </a:solidFill>
-              </a:rPr>
-              <a:t>M</a:t>
-            </a:r>
-            <a:r>
-              <a:rPr kumimoji="0" lang="en-US" sz="4800" b="1" i="0" u="none" strike="noStrike" kern="0" cap="none" spc="0" normalizeH="0" baseline="0" noProof="0" dirty="0" err="1">
+              <a:rPr kumimoji="0" lang="en-US" sz="4800" b="1" i="0" u="none" strike="noStrike" kern="0" cap="none" spc="0" normalizeH="0" baseline="0" noProof="0" dirty="0">
                 <a:ln>
                   <a:noFill/>
                 </a:ln>
@@ -7539,25 +7846,29 @@
                 <a:cs typeface="Arial"/>
                 <a:sym typeface="Arial"/>
               </a:rPr>
-              <a:t>etric</a:t>
+              <a:t>Results and Findings</a:t>
             </a:r>
-            <a:r>
-              <a:rPr kumimoji="0" lang="en-US" sz="4800" b="1" i="0" u="none" strike="noStrike" kern="0" cap="none" spc="0" normalizeH="0" baseline="0" noProof="0" dirty="0">
-                <a:ln>
-                  <a:noFill/>
-                </a:ln>
-                <a:solidFill>
-                  <a:srgbClr val="005BBB"/>
-                </a:solidFill>
-                <a:effectLst/>
-                <a:uLnTx/>
-                <a:uFillTx/>
-                <a:latin typeface="Arial"/>
-                <a:cs typeface="Arial"/>
-                <a:sym typeface="Arial"/>
-              </a:rPr>
-              <a:t> Tables, Maps, and Charts</a:t>
-            </a:r>
+          </a:p>
+          <a:p>
+            <a:pPr marL="0" marR="0" lvl="0" indent="0" algn="l" defTabSz="914400" rtl="0" eaLnBrk="1" fontAlgn="auto" latinLnBrk="0" hangingPunct="1">
+              <a:lnSpc>
+                <a:spcPct val="95833"/>
+              </a:lnSpc>
+              <a:spcBef>
+                <a:spcPts val="0"/>
+              </a:spcBef>
+              <a:spcAft>
+                <a:spcPts val="0"/>
+              </a:spcAft>
+              <a:buClr>
+                <a:srgbClr val="666666"/>
+              </a:buClr>
+              <a:buSzPts val="2800"/>
+              <a:buFont typeface="Arial"/>
+              <a:buNone/>
+              <a:tabLst/>
+              <a:defRPr/>
+            </a:pPr>
             <a:endParaRPr kumimoji="0" lang="en-US" sz="3200" b="0" i="0" u="none" strike="noStrike" kern="0" cap="none" spc="0" normalizeH="0" baseline="0" noProof="0" dirty="0">
               <a:ln>
                 <a:noFill/>
@@ -7752,10 +8063,38 @@
                 <a:cs typeface="Arial"/>
                 <a:sym typeface="Arial"/>
               </a:rPr>
+              <a:t>Nancy Odhiambo</a:t>
+            </a:r>
+            <a:r>
+              <a:rPr lang="en-US" sz="3600" baseline="30000" dirty="0">
+                <a:solidFill>
+                  <a:schemeClr val="lt1"/>
+                </a:solidFill>
+              </a:rPr>
+              <a:t>, </a:t>
+            </a:r>
+            <a:r>
+              <a:rPr lang="en-US" sz="3600" dirty="0">
+                <a:solidFill>
+                  <a:schemeClr val="lt1"/>
+                </a:solidFill>
+              </a:rPr>
               <a:t>Andrew DiLernia</a:t>
             </a:r>
+            <a:endParaRPr lang="en-US" sz="3600" baseline="30000" dirty="0">
+              <a:solidFill>
+                <a:schemeClr val="lt1"/>
+              </a:solidFill>
+            </a:endParaRPr>
+          </a:p>
+          <a:p>
+            <a:pPr lvl="0">
+              <a:spcBef>
+                <a:spcPts val="1800"/>
+              </a:spcBef>
+            </a:pPr>
             <a:r>
-              <a:rPr lang="en-US" sz="3600" b="0" i="0" u="none" strike="noStrike" cap="none" baseline="30000" dirty="0">
+              <a:rPr lang="en-US" sz="3600" b="0" i="0" u="none" strike="noStrike" cap="none" dirty="0">
                 <a:solidFill>
                   <a:schemeClr val="lt1"/>
                 </a:solidFill>
@@ -7764,54 +8103,7 @@
                 <a:cs typeface="Arial"/>
                 <a:sym typeface="Arial"/>
               </a:rPr>
-              <a:t>1</a:t>
-            </a:r>
-            <a:r>
-              <a:rPr lang="en-US" sz="3600" b="0" i="0" u="none" strike="noStrike" cap="none" dirty="0">
-                <a:solidFill>
-                  <a:schemeClr val="lt1"/>
-                </a:solidFill>
-                <a:latin typeface="Arial"/>
-                <a:ea typeface="Arial"/>
-                <a:cs typeface="Arial"/>
-                <a:sym typeface="Arial"/>
-              </a:rPr>
-              <a:t>, Nancy Odhiambo</a:t>
-            </a:r>
-            <a:r>
-              <a:rPr lang="en-US" sz="3600" baseline="30000" dirty="0">
-                <a:solidFill>
-                  <a:schemeClr val="lt1"/>
-                </a:solidFill>
-              </a:rPr>
-              <a:t>2</a:t>
-            </a:r>
-          </a:p>
-          <a:p>
-            <a:pPr lvl="0">
-              <a:spcBef>
-                <a:spcPts val="1800"/>
-              </a:spcBef>
-            </a:pPr>
-            <a:r>
-              <a:rPr lang="en-US" sz="3600" baseline="30000" dirty="0">
-                <a:solidFill>
-                  <a:schemeClr val="lt1"/>
-                </a:solidFill>
-              </a:rPr>
-              <a:t>1</a:t>
-            </a:r>
-            <a:r>
-              <a:rPr lang="en-US" sz="3600" b="0" i="0" u="none" strike="noStrike" cap="none" dirty="0">
-                <a:solidFill>
-                  <a:schemeClr val="lt1"/>
-                </a:solidFill>
-                <a:latin typeface="Arial"/>
-                <a:ea typeface="Arial"/>
-                <a:cs typeface="Arial"/>
-                <a:sym typeface="Arial"/>
-              </a:rPr>
-              <a:t>Department of Statistics, Grand Valley State University; </a:t>
+              <a:t>Department of Statistics, Grand Valley State University </a:t>
             </a:r>
             <a:endParaRPr dirty="0"/>
           </a:p>
@@ -7973,7 +8265,7 @@
           <p:nvPr/>
         </p:nvPicPr>
         <p:blipFill rotWithShape="1">
-          <a:blip r:embed="rId2">
+          <a:blip r:embed="rId3">
             <a:alphaModFix/>
           </a:blip>
           <a:srcRect/>
@@ -8014,7 +8306,7 @@
         <p:spPr>
           <a:xfrm>
             <a:off x="28996106" y="5619555"/>
-            <a:ext cx="14523620" cy="24812177"/>
+            <a:ext cx="14895094" cy="24812177"/>
           </a:xfrm>
         </p:spPr>
         <p:txBody>
@@ -8171,60 +8463,33 @@
               <a:lnSpc>
                 <a:spcPct val="95833"/>
               </a:lnSpc>
+              <a:buNone/>
             </a:pPr>
-            <a:r>
-              <a:rPr lang="en-US" sz="4800" b="1" dirty="0">
-                <a:solidFill>
-                  <a:srgbClr val="005BBB"/>
-                </a:solidFill>
-              </a:rPr>
-              <a:t>Discussion</a:t>
-            </a:r>
-          </a:p>
-          <a:p>
-            <a:pPr lvl="1" indent="-457200">
-              <a:spcBef>
-                <a:spcPts val="1200"/>
-              </a:spcBef>
-              <a:buSzPts val="3500"/>
-            </a:pPr>
-            <a:r>
-              <a:rPr lang="en-US" sz="3200" dirty="0">
-                <a:solidFill>
-                  <a:schemeClr val="accent4">
-                    <a:lumMod val="50000"/>
-                  </a:schemeClr>
-                </a:solidFill>
-              </a:rPr>
-              <a:t>Project demonstrates how integrating PFAS datasets into a spatial tool improves accessibility and understanding</a:t>
-            </a:r>
-          </a:p>
-          <a:p>
-            <a:pPr lvl="1" indent="-457200">
-              <a:spcBef>
-                <a:spcPts val="1200"/>
-              </a:spcBef>
-              <a:spcAft>
-                <a:spcPts val="1200"/>
-              </a:spcAft>
-              <a:buSzPts val="3500"/>
-            </a:pPr>
-            <a:r>
-              <a:rPr lang="en-US" sz="3200" dirty="0">
-                <a:solidFill>
-                  <a:schemeClr val="accent4">
-                    <a:lumMod val="50000"/>
-                  </a:schemeClr>
-                </a:solidFill>
-              </a:rPr>
-              <a:t>The hazard Index provides an intuitive common scale summary of cumulative risk supporting public awareness and policy research</a:t>
-            </a:r>
+            <a:endParaRPr lang="en-US" sz="4800" b="1" dirty="0">
+              <a:solidFill>
+                <a:srgbClr val="005BBB"/>
+              </a:solidFill>
+            </a:endParaRPr>
           </a:p>
           <a:p>
             <a:pPr marL="0" lvl="0" indent="0">
               <a:lnSpc>
                 <a:spcPct val="95833"/>
               </a:lnSpc>
+              <a:buNone/>
+            </a:pPr>
+            <a:endParaRPr lang="en-US" sz="4800" b="1" dirty="0">
+              <a:solidFill>
+                <a:srgbClr val="005BBB"/>
+              </a:solidFill>
+            </a:endParaRPr>
+          </a:p>
+          <a:p>
+            <a:pPr marL="0" lvl="0" indent="0">
+              <a:lnSpc>
+                <a:spcPct val="95833"/>
+              </a:lnSpc>
+              <a:buNone/>
             </a:pPr>
             <a:r>
               <a:rPr lang="en-US" sz="4800" b="1" dirty="0">
@@ -8250,7 +8515,7 @@
                   </a:schemeClr>
                 </a:solidFill>
               </a:rPr>
-              <a:t>An interactive spatial dashboard can transform complex datasets like PFAS datasets into actionable information</a:t>
+              <a:t>PFAS data analysis enhances accessibility to the cumulative risk </a:t>
             </a:r>
           </a:p>
           <a:p>
@@ -8258,69 +8523,43 @@
               <a:spcBef>
                 <a:spcPts val="1200"/>
               </a:spcBef>
-              <a:spcAft>
-                <a:spcPts val="1200"/>
-              </a:spcAft>
               <a:buSzPts val="3500"/>
             </a:pPr>
             <a:r>
-              <a:rPr kumimoji="0" lang="en-US" sz="3200" i="0" u="none" strike="noStrike" kern="0" cap="none" spc="0" normalizeH="0" baseline="0" noProof="0" dirty="0">
-                <a:ln>
-                  <a:noFill/>
-                </a:ln>
+              <a:rPr lang="en-US" sz="3200" dirty="0">
                 <a:solidFill>
                   <a:schemeClr val="accent4">
                     <a:lumMod val="50000"/>
                   </a:schemeClr>
                 </a:solidFill>
-                <a:effectLst/>
-                <a:uLnTx/>
-                <a:uFillTx/>
-                <a:latin typeface="Arial"/>
-                <a:cs typeface="Arial"/>
-                <a:sym typeface="Arial"/>
               </a:rPr>
-              <a:t>This dashboard enhances transparency, support evidence driven decision making, and promotes public engagement</a:t>
+              <a:t>The hazard Index consolidates multiple chemicals into an intuitive scale for public awareness and policy improvement</a:t>
             </a:r>
-            <a:endParaRPr kumimoji="0" lang="en-US" sz="4800" i="0" u="none" strike="noStrike" kern="0" cap="none" spc="0" normalizeH="0" baseline="0" noProof="0" dirty="0">
-              <a:ln>
-                <a:noFill/>
-              </a:ln>
-              <a:solidFill>
-                <a:srgbClr val="005BBB"/>
-              </a:solidFill>
-              <a:effectLst/>
-              <a:uLnTx/>
-              <a:uFillTx/>
-              <a:latin typeface="Arial"/>
-              <a:cs typeface="Arial"/>
-              <a:sym typeface="Arial"/>
-            </a:endParaRPr>
           </a:p>
           <a:p>
-            <a:pPr marL="457200" lvl="1" indent="0">
+            <a:pPr lvl="1" indent="-457200">
               <a:spcBef>
                 <a:spcPts val="1200"/>
               </a:spcBef>
-              <a:spcAft>
-                <a:spcPts val="1200"/>
-              </a:spcAft>
               <a:buSzPts val="3500"/>
-              <a:buNone/>
             </a:pPr>
-            <a:endParaRPr lang="en-US" sz="1600" dirty="0">
-              <a:solidFill>
-                <a:schemeClr val="accent4">
-                  <a:lumMod val="50000"/>
-                </a:schemeClr>
-              </a:solidFill>
-            </a:endParaRPr>
+            <a:r>
+              <a:rPr lang="en-US" sz="3200" dirty="0">
+                <a:solidFill>
+                  <a:schemeClr val="accent4">
+                    <a:lumMod val="50000"/>
+                  </a:schemeClr>
+                </a:solidFill>
+              </a:rPr>
+              <a:t>The insights that have been discovered from this analysis enables evidence-based decisions, improve transparency, and guide environmental management</a:t>
+            </a:r>
           </a:p>
           <a:p>
             <a:pPr marL="0" indent="0">
               <a:lnSpc>
                 <a:spcPct val="95833"/>
               </a:lnSpc>
+              <a:buNone/>
             </a:pPr>
             <a:r>
               <a:rPr lang="en-US" sz="4800" b="1" dirty="0">
@@ -8368,7 +8607,7 @@
                   </a:schemeClr>
                 </a:solidFill>
               </a:rPr>
-              <a:t>Hosting: GitHub Pages: </a:t>
+              <a:t>Hosting: GitHub: </a:t>
             </a:r>
             <a:r>
               <a:rPr lang="en-US" sz="3200" dirty="0">
@@ -8377,7 +8616,7 @@
                     <a:lumMod val="50000"/>
                   </a:schemeClr>
                 </a:solidFill>
-                <a:hlinkClick r:id="rId3"/>
+                <a:hlinkClick r:id="rId4"/>
               </a:rPr>
               <a:t>https://github.com/Nancy-Odhiambo/Michigan-PFAS-Data</a:t>
             </a:r>
@@ -8394,6 +8633,7 @@
               <a:lnSpc>
                 <a:spcPct val="95833"/>
               </a:lnSpc>
+              <a:buNone/>
             </a:pPr>
             <a:r>
               <a:rPr lang="en-US" sz="4800" b="1" dirty="0">
@@ -8447,12 +8687,20 @@
                     <a:lumMod val="50000"/>
                   </a:schemeClr>
                 </a:solidFill>
+                <a:hlinkClick r:id="rId5"/>
               </a:rPr>
-              <a:t>M</a:t>
+              <a:t>https://www.epa.gov/system/files/documents/2024-04/pfas-npdwr_fact-sheet_hazard-index_4.8.24.pdf</a:t>
             </a:r>
+            <a:endParaRPr lang="en-US" sz="2500" dirty="0">
+              <a:solidFill>
+                <a:schemeClr val="accent4">
+                  <a:lumMod val="50000"/>
+                </a:schemeClr>
+              </a:solidFill>
+            </a:endParaRPr>
           </a:p>
           <a:p>
-            <a:pPr marL="0" lvl="0" indent="0">
+            <a:pPr marL="514350" lvl="0" indent="-514350">
               <a:lnSpc>
                 <a:spcPct val="95833"/>
               </a:lnSpc>
@@ -8465,7 +8713,152 @@
               <a:buClr>
                 <a:schemeClr val="dk1"/>
               </a:buClr>
-              <a:buNone/>
+              <a:buFont typeface="+mj-lt"/>
+              <a:buAutoNum type="arabicPeriod"/>
+            </a:pPr>
+            <a:r>
+              <a:rPr lang="en-US" sz="2500" dirty="0">
+                <a:solidFill>
+                  <a:schemeClr val="accent4">
+                    <a:lumMod val="50000"/>
+                  </a:schemeClr>
+                </a:solidFill>
+                <a:hlinkClick r:id="rId6"/>
+              </a:rPr>
+              <a:t>https://gis-egle.hub.arcgis.com/datasets/egle::pfas-surface-water-sampling/about</a:t>
+            </a:r>
+            <a:endParaRPr lang="en-US" sz="2500" dirty="0">
+              <a:solidFill>
+                <a:schemeClr val="accent4">
+                  <a:lumMod val="50000"/>
+                </a:schemeClr>
+              </a:solidFill>
+            </a:endParaRPr>
+          </a:p>
+          <a:p>
+            <a:pPr marL="514350" lvl="0" indent="-514350">
+              <a:lnSpc>
+                <a:spcPct val="95833"/>
+              </a:lnSpc>
+              <a:spcBef>
+                <a:spcPts val="1200"/>
+              </a:spcBef>
+              <a:spcAft>
+                <a:spcPts val="1200"/>
+              </a:spcAft>
+              <a:buClr>
+                <a:schemeClr val="dk1"/>
+              </a:buClr>
+              <a:buFont typeface="+mj-lt"/>
+              <a:buAutoNum type="arabicPeriod"/>
+            </a:pPr>
+            <a:r>
+              <a:rPr lang="en-US" sz="2500" dirty="0">
+                <a:solidFill>
+                  <a:schemeClr val="accent4">
+                    <a:lumMod val="50000"/>
+                  </a:schemeClr>
+                </a:solidFill>
+                <a:hlinkClick r:id="rId7"/>
+              </a:rPr>
+              <a:t>https://gis-egle.hub.arcgis.com/search?q=pfasgis</a:t>
+            </a:r>
+            <a:endParaRPr lang="en-US" sz="2500" dirty="0">
+              <a:solidFill>
+                <a:schemeClr val="accent4">
+                  <a:lumMod val="50000"/>
+                </a:schemeClr>
+              </a:solidFill>
+            </a:endParaRPr>
+          </a:p>
+          <a:p>
+            <a:pPr marL="514350" lvl="0" indent="-514350">
+              <a:lnSpc>
+                <a:spcPct val="95833"/>
+              </a:lnSpc>
+              <a:spcBef>
+                <a:spcPts val="1200"/>
+              </a:spcBef>
+              <a:spcAft>
+                <a:spcPts val="1200"/>
+              </a:spcAft>
+              <a:buClr>
+                <a:schemeClr val="dk1"/>
+              </a:buClr>
+              <a:buFont typeface="+mj-lt"/>
+              <a:buAutoNum type="arabicPeriod"/>
+            </a:pPr>
+            <a:r>
+              <a:rPr lang="en-US" sz="2500" dirty="0">
+                <a:solidFill>
+                  <a:schemeClr val="accent4">
+                    <a:lumMod val="50000"/>
+                  </a:schemeClr>
+                </a:solidFill>
+                <a:hlinkClick r:id="rId8"/>
+              </a:rPr>
+              <a:t>https://www.michigan.gov/pfasresponse/investigations/sites-aoi</a:t>
+            </a:r>
+            <a:endParaRPr lang="en-US" sz="2500" dirty="0">
+              <a:solidFill>
+                <a:schemeClr val="accent4">
+                  <a:lumMod val="50000"/>
+                </a:schemeClr>
+              </a:solidFill>
+            </a:endParaRPr>
+          </a:p>
+          <a:p>
+            <a:pPr marL="514350" lvl="0" indent="-514350">
+              <a:lnSpc>
+                <a:spcPct val="95833"/>
+              </a:lnSpc>
+              <a:spcBef>
+                <a:spcPts val="1200"/>
+              </a:spcBef>
+              <a:spcAft>
+                <a:spcPts val="1200"/>
+              </a:spcAft>
+              <a:buClr>
+                <a:schemeClr val="dk1"/>
+              </a:buClr>
+              <a:buFont typeface="+mj-lt"/>
+              <a:buAutoNum type="arabicPeriod"/>
+            </a:pPr>
+            <a:r>
+              <a:rPr lang="en-US" sz="2500" dirty="0">
+                <a:solidFill>
+                  <a:schemeClr val="accent4">
+                    <a:lumMod val="50000"/>
+                  </a:schemeClr>
+                </a:solidFill>
+                <a:hlinkClick r:id="rId9"/>
+              </a:rPr>
+              <a:t>https://www.michigan.gov/pfasresponse/-/media/Project/Websites/PFAS-Response/Sampling-Guidance/Minimum-Laboratory-Analyte-List.pdf?rev=a35aba56ec5a4922b986f01e25c1a19d&amp;hash=04E6F164AA5F5CD29B83B39983341345</a:t>
+            </a:r>
+            <a:endParaRPr lang="en-US" sz="2500" dirty="0">
+              <a:solidFill>
+                <a:schemeClr val="accent4">
+                  <a:lumMod val="50000"/>
+                </a:schemeClr>
+              </a:solidFill>
+            </a:endParaRPr>
+          </a:p>
+          <a:p>
+            <a:pPr marL="514350" lvl="0" indent="-514350">
+              <a:lnSpc>
+                <a:spcPct val="95833"/>
+              </a:lnSpc>
+              <a:spcBef>
+                <a:spcPts val="1200"/>
+              </a:spcBef>
+              <a:spcAft>
+                <a:spcPts val="1200"/>
+              </a:spcAft>
+              <a:buClr>
+                <a:schemeClr val="dk1"/>
+              </a:buClr>
+              <a:buFont typeface="+mj-lt"/>
+              <a:buAutoNum type="arabicPeriod"/>
             </a:pPr>
             <a:endParaRPr lang="en-US" sz="2500" dirty="0">
               <a:solidFill>
@@ -8476,26 +8869,115 @@
             </a:endParaRPr>
           </a:p>
           <a:p>
-            <a:pPr marL="514350" indent="-514350">
+            <a:pPr marL="514350" lvl="0" indent="-514350">
+              <a:lnSpc>
+                <a:spcPct val="95833"/>
+              </a:lnSpc>
+              <a:spcBef>
+                <a:spcPts val="1200"/>
+              </a:spcBef>
+              <a:spcAft>
+                <a:spcPts val="1200"/>
+              </a:spcAft>
+              <a:buClr>
+                <a:schemeClr val="dk1"/>
+              </a:buClr>
+              <a:buFont typeface="+mj-lt"/>
+              <a:buAutoNum type="arabicPeriod"/>
+            </a:pPr>
+            <a:endParaRPr lang="en-US" sz="2500" dirty="0">
+              <a:solidFill>
+                <a:schemeClr val="accent4">
+                  <a:lumMod val="50000"/>
+                </a:schemeClr>
+              </a:solidFill>
+            </a:endParaRPr>
+          </a:p>
+          <a:p>
+            <a:pPr marL="514350" lvl="0" indent="-514350">
+              <a:lnSpc>
+                <a:spcPct val="95833"/>
+              </a:lnSpc>
+              <a:spcBef>
+                <a:spcPts val="1200"/>
+              </a:spcBef>
+              <a:spcAft>
+                <a:spcPts val="1200"/>
+              </a:spcAft>
+              <a:buClr>
+                <a:schemeClr val="dk1"/>
+              </a:buClr>
+              <a:buFont typeface="+mj-lt"/>
+              <a:buAutoNum type="arabicPeriod"/>
+            </a:pPr>
+            <a:endParaRPr lang="en-US" sz="2500" dirty="0">
+              <a:solidFill>
+                <a:schemeClr val="accent4">
+                  <a:lumMod val="50000"/>
+                </a:schemeClr>
+              </a:solidFill>
+            </a:endParaRPr>
+          </a:p>
+          <a:p>
+            <a:pPr marL="514350" lvl="0" indent="-514350">
+              <a:lnSpc>
+                <a:spcPct val="95833"/>
+              </a:lnSpc>
+              <a:spcBef>
+                <a:spcPts val="1200"/>
+              </a:spcBef>
+              <a:spcAft>
+                <a:spcPts val="1200"/>
+              </a:spcAft>
+              <a:buClr>
+                <a:schemeClr val="dk1"/>
+              </a:buClr>
+              <a:buFont typeface="+mj-lt"/>
+              <a:buAutoNum type="arabicPeriod"/>
+            </a:pPr>
+            <a:endParaRPr lang="en-US" sz="2500" dirty="0">
+              <a:solidFill>
+                <a:schemeClr val="accent4">
+                  <a:lumMod val="50000"/>
+                </a:schemeClr>
+              </a:solidFill>
+            </a:endParaRPr>
+          </a:p>
+          <a:p>
+            <a:pPr marL="514350" lvl="0" indent="-514350">
+              <a:lnSpc>
+                <a:spcPct val="95833"/>
+              </a:lnSpc>
+              <a:spcBef>
+                <a:spcPts val="1200"/>
+              </a:spcBef>
+              <a:spcAft>
+                <a:spcPts val="1200"/>
+              </a:spcAft>
+              <a:buClr>
+                <a:schemeClr val="dk1"/>
+              </a:buClr>
+              <a:buFont typeface="+mj-lt"/>
+              <a:buAutoNum type="arabicPeriod"/>
+            </a:pPr>
+            <a:endParaRPr lang="en-US" sz="2500" dirty="0">
+              <a:solidFill>
+                <a:schemeClr val="accent4">
+                  <a:lumMod val="50000"/>
+                </a:schemeClr>
+              </a:solidFill>
+            </a:endParaRPr>
+          </a:p>
+          <a:p>
+            <a:pPr marL="0" indent="0">
               <a:lnSpc>
                 <a:spcPct val="95833"/>
               </a:lnSpc>
               <a:buClr>
                 <a:schemeClr val="dk1"/>
               </a:buClr>
-              <a:buFont typeface="+mj-lt"/>
-              <a:buAutoNum type="arabicPeriod"/>
+              <a:buNone/>
             </a:pPr>
-            <a:r>
-              <a:rPr lang="en-US" sz="2500" dirty="0">
-                <a:solidFill>
-                  <a:schemeClr val="accent4">
-                    <a:lumMod val="50000"/>
-                  </a:schemeClr>
-                </a:solidFill>
-              </a:rPr>
-              <a:t>R </a:t>
-            </a:r>
             <a:endParaRPr lang="en-US" sz="2500" dirty="0"/>
           </a:p>
           <a:p>

--- a/MichiganPFAS_ResearchPoster.pptx
+++ b/MichiganPFAS_ResearchPoster.pptx
@@ -257,7 +257,7 @@
       </p15:sldGuideLst>
     </p:ext>
     <p:ext uri="http://customooxmlschemas.google.com/">
-      <go:slidesCustomData xmlns:go="http://customooxmlschemas.google.com/" xmlns:ahyp="http://schemas.microsoft.com/office/drawing/2018/hyperlinkcolor" xmlns:p15="http://schemas.microsoft.com/office/powerpoint/2012/main" xmlns:p14="http://schemas.microsoft.com/office/powerpoint/2010/main" xmlns:com="http://schemas.openxmlformats.org/drawingml/2006/compatibility" xmlns:pvml="urn:schemas-microsoft-com:office:powerpoint" xmlns:v="urn:schemas-microsoft-com:vml" xmlns:o="urn:schemas-microsoft-com:office:office" xmlns:dgm="http://schemas.openxmlformats.org/drawingml/2006/diagram" xmlns:c="http://schemas.openxmlformats.org/drawingml/2006/chart" xmlns:mv="urn:schemas-microsoft-com:mac:vml" xmlns:mc="http://schemas.openxmlformats.org/markup-compatibility/2006" xmlns="" r:id="rId9" roundtripDataSignature="AMtx7mi8fLYElh59t4jHQwYsQUndL0Eu8g=="/>
+      <go:slidesCustomData xmlns="" xmlns:mc="http://schemas.openxmlformats.org/markup-compatibility/2006" xmlns:mv="urn:schemas-microsoft-com:mac:vml" xmlns:c="http://schemas.openxmlformats.org/drawingml/2006/chart" xmlns:dgm="http://schemas.openxmlformats.org/drawingml/2006/diagram" xmlns:o="urn:schemas-microsoft-com:office:office" xmlns:v="urn:schemas-microsoft-com:vml" xmlns:pvml="urn:schemas-microsoft-com:office:powerpoint" xmlns:com="http://schemas.openxmlformats.org/drawingml/2006/compatibility" xmlns:p14="http://schemas.microsoft.com/office/powerpoint/2010/main" xmlns:p15="http://schemas.microsoft.com/office/powerpoint/2012/main" xmlns:ahyp="http://schemas.microsoft.com/office/drawing/2018/hyperlinkcolor" xmlns:go="http://customooxmlschemas.google.com/" r:id="rId9" roundtripDataSignature="AMtx7mi8fLYElh59t4jHQwYsQUndL0Eu8g=="/>
     </p:ext>
   </p:extLst>
 </p:presentation>
@@ -266,7 +266,7 @@
 <file path=ppt/revisionInfo.xml><?xml version="1.0" encoding="utf-8"?>
 <p1510:revInfo xmlns:a="http://schemas.openxmlformats.org/drawingml/2006/main" xmlns:r="http://schemas.openxmlformats.org/officeDocument/2006/relationships" xmlns:p1510="http://schemas.microsoft.com/office/powerpoint/2015/10/main">
   <p1510:revLst>
-    <p1510:client id="{6C20A5EC-8840-9940-BC91-4086AF4B13F5}" v="336" dt="2026-03-24T04:33:06.714"/>
+    <p1510:client id="{6C20A5EC-8840-9940-BC91-4086AF4B13F5}" v="33" dt="2026-03-25T11:29:17.515"/>
   </p1510:revLst>
 </p1510:revInfo>
 </file>
@@ -276,18 +276,18 @@
   <pc:docChgLst>
     <pc:chgData name="Nancy A. Odhiambo" userId="9fd03ea9-f642-46ed-82e0-72dc91a725bc" providerId="ADAL" clId="{6B025E33-D5BB-5DD4-954E-4AC3FAD535B9}"/>
     <pc:docChg chg="undo custSel modSld">
-      <pc:chgData name="Nancy A. Odhiambo" userId="9fd03ea9-f642-46ed-82e0-72dc91a725bc" providerId="ADAL" clId="{6B025E33-D5BB-5DD4-954E-4AC3FAD535B9}" dt="2026-03-24T04:35:00.185" v="1968" actId="20577"/>
+      <pc:chgData name="Nancy A. Odhiambo" userId="9fd03ea9-f642-46ed-82e0-72dc91a725bc" providerId="ADAL" clId="{6B025E33-D5BB-5DD4-954E-4AC3FAD535B9}" dt="2026-03-25T11:29:17.515" v="2034" actId="255"/>
       <pc:docMkLst>
         <pc:docMk/>
       </pc:docMkLst>
       <pc:sldChg chg="addSp delSp modSp mod">
-        <pc:chgData name="Nancy A. Odhiambo" userId="9fd03ea9-f642-46ed-82e0-72dc91a725bc" providerId="ADAL" clId="{6B025E33-D5BB-5DD4-954E-4AC3FAD535B9}" dt="2026-03-24T04:35:00.185" v="1968" actId="20577"/>
+        <pc:chgData name="Nancy A. Odhiambo" userId="9fd03ea9-f642-46ed-82e0-72dc91a725bc" providerId="ADAL" clId="{6B025E33-D5BB-5DD4-954E-4AC3FAD535B9}" dt="2026-03-25T11:29:17.515" v="2034" actId="255"/>
         <pc:sldMkLst>
           <pc:docMk/>
           <pc:sldMk cId="3865402343" sldId="261"/>
         </pc:sldMkLst>
         <pc:spChg chg="add del mod">
-          <ac:chgData name="Nancy A. Odhiambo" userId="9fd03ea9-f642-46ed-82e0-72dc91a725bc" providerId="ADAL" clId="{6B025E33-D5BB-5DD4-954E-4AC3FAD535B9}" dt="2026-03-24T04:27:57.340" v="1938" actId="20577"/>
+          <ac:chgData name="Nancy A. Odhiambo" userId="9fd03ea9-f642-46ed-82e0-72dc91a725bc" providerId="ADAL" clId="{6B025E33-D5BB-5DD4-954E-4AC3FAD535B9}" dt="2026-03-25T11:29:17.515" v="2034" actId="255"/>
           <ac:spMkLst>
             <pc:docMk/>
             <pc:sldMk cId="3865402343" sldId="261"/>
@@ -367,19 +367,51 @@
           </ac:spMkLst>
         </pc:spChg>
         <pc:spChg chg="add del mod">
-          <ac:chgData name="Nancy A. Odhiambo" userId="9fd03ea9-f642-46ed-82e0-72dc91a725bc" providerId="ADAL" clId="{6B025E33-D5BB-5DD4-954E-4AC3FAD535B9}" dt="2026-03-24T04:35:00.185" v="1968" actId="20577"/>
+          <ac:chgData name="Nancy A. Odhiambo" userId="9fd03ea9-f642-46ed-82e0-72dc91a725bc" providerId="ADAL" clId="{6B025E33-D5BB-5DD4-954E-4AC3FAD535B9}" dt="2026-03-25T11:24:12.261" v="2008" actId="14100"/>
           <ac:spMkLst>
             <pc:docMk/>
             <pc:sldMk cId="3865402343" sldId="261"/>
             <ac:spMk id="50" creationId="{AB71F360-BB8B-D375-3180-E5F2E2514D50}"/>
           </ac:spMkLst>
         </pc:spChg>
+        <pc:picChg chg="add mod">
+          <ac:chgData name="Nancy A. Odhiambo" userId="9fd03ea9-f642-46ed-82e0-72dc91a725bc" providerId="ADAL" clId="{6B025E33-D5BB-5DD4-954E-4AC3FAD535B9}" dt="2026-03-25T11:08:20.240" v="1998" actId="14100"/>
+          <ac:picMkLst>
+            <pc:docMk/>
+            <pc:sldMk cId="3865402343" sldId="261"/>
+            <ac:picMk id="4" creationId="{2275A505-4BB7-0C64-4386-A57A3D5AAC1E}"/>
+          </ac:picMkLst>
+        </pc:picChg>
+        <pc:picChg chg="add mod">
+          <ac:chgData name="Nancy A. Odhiambo" userId="9fd03ea9-f642-46ed-82e0-72dc91a725bc" providerId="ADAL" clId="{6B025E33-D5BB-5DD4-954E-4AC3FAD535B9}" dt="2026-03-25T11:08:52.323" v="2001" actId="14100"/>
+          <ac:picMkLst>
+            <pc:docMk/>
+            <pc:sldMk cId="3865402343" sldId="261"/>
+            <ac:picMk id="7" creationId="{8DB399D0-5D23-D139-707D-865B3CB825B9}"/>
+          </ac:picMkLst>
+        </pc:picChg>
         <pc:picChg chg="add del mod">
           <ac:chgData name="Nancy A. Odhiambo" userId="9fd03ea9-f642-46ed-82e0-72dc91a725bc" providerId="ADAL" clId="{6B025E33-D5BB-5DD4-954E-4AC3FAD535B9}" dt="2026-03-24T04:08:44.616" v="1644" actId="478"/>
           <ac:picMkLst>
             <pc:docMk/>
             <pc:sldMk cId="3865402343" sldId="261"/>
             <ac:picMk id="11" creationId="{BB728658-9F61-908A-3DCE-2DBBF3565C05}"/>
+          </ac:picMkLst>
+        </pc:picChg>
+        <pc:picChg chg="add mod">
+          <ac:chgData name="Nancy A. Odhiambo" userId="9fd03ea9-f642-46ed-82e0-72dc91a725bc" providerId="ADAL" clId="{6B025E33-D5BB-5DD4-954E-4AC3FAD535B9}" dt="2026-03-25T11:06:58.889" v="1995" actId="14100"/>
+          <ac:picMkLst>
+            <pc:docMk/>
+            <pc:sldMk cId="3865402343" sldId="261"/>
+            <ac:picMk id="12" creationId="{04858FAE-1C8D-0946-B8C3-06B7A8DBCB97}"/>
+          </ac:picMkLst>
+        </pc:picChg>
+        <pc:picChg chg="add mod">
+          <ac:chgData name="Nancy A. Odhiambo" userId="9fd03ea9-f642-46ed-82e0-72dc91a725bc" providerId="ADAL" clId="{6B025E33-D5BB-5DD4-954E-4AC3FAD535B9}" dt="2026-03-25T11:23:58.160" v="2007" actId="14100"/>
+          <ac:picMkLst>
+            <pc:docMk/>
+            <pc:sldMk cId="3865402343" sldId="261"/>
+            <ac:picMk id="14" creationId="{B5BA9DBB-2550-B185-75A1-8A4A4386A3B4}"/>
           </ac:picMkLst>
         </pc:picChg>
       </pc:sldChg>
@@ -7282,6 +7314,36 @@
                     <a:spcPct val="95833"/>
                   </a:lnSpc>
                 </a:pPr>
+                <a14:m>
+                  <m:oMathPara xmlns:m="http://schemas.openxmlformats.org/officeDocument/2006/math">
+                    <m:oMathParaPr>
+                      <m:jc m:val="centerGroup"/>
+                    </m:oMathParaPr>
+                    <m:oMath xmlns:m="http://schemas.openxmlformats.org/officeDocument/2006/math">
+                      <a:fld id="{825F15A7-03F4-43D7-82C5-3E23DA2F108C}" type="mathplaceholder">
+                        <a:rPr lang="en-US" sz="4800" b="1" i="1" smtClean="0">
+                          <a:solidFill>
+                            <a:srgbClr val="005BBB"/>
+                          </a:solidFill>
+                          <a:latin typeface="Cambria Math" panose="02040503050406030204" pitchFamily="18" charset="0"/>
+                        </a:rPr>
+                        <a:t>Type equation here.</a:t>
+                      </a:fld>
+                    </m:oMath>
+                  </m:oMathPara>
+                </a14:m>
+                <a:endParaRPr lang="en-US" sz="4800" b="1" dirty="0">
+                  <a:solidFill>
+                    <a:srgbClr val="005BBB"/>
+                  </a:solidFill>
+                </a:endParaRPr>
+              </a:p>
+              <a:p>
+                <a:pPr marL="0" lvl="0" indent="0">
+                  <a:lnSpc>
+                    <a:spcPct val="95833"/>
+                  </a:lnSpc>
+                </a:pPr>
                 <a:endParaRPr lang="en-US" sz="3200" dirty="0">
                   <a:solidFill>
                     <a:srgbClr val="666666">
@@ -7294,7 +7356,7 @@
                 <a14:m>
                   <m:oMath xmlns:m="http://schemas.openxmlformats.org/officeDocument/2006/math">
                     <m:r>
-                      <a:rPr lang="en-US" sz="3200" b="1" i="1" smtClean="0">
+                      <a:rPr lang="en-US" b="1" i="1" smtClean="0">
                         <a:solidFill>
                           <a:schemeClr val="accent1">
                             <a:lumMod val="50000"/>
@@ -7305,7 +7367,7 @@
                       <m:t>𝑯𝑰</m:t>
                     </m:r>
                     <m:r>
-                      <a:rPr lang="en-US" sz="3200" b="1" i="1" smtClean="0">
+                      <a:rPr lang="en-US" b="1" i="1" smtClean="0">
                         <a:solidFill>
                           <a:schemeClr val="accent1">
                             <a:lumMod val="50000"/>
@@ -7318,7 +7380,7 @@
                     <m:d>
                       <m:dPr>
                         <m:ctrlPr>
-                          <a:rPr lang="en-US" sz="3200" b="1" i="1" smtClean="0">
+                          <a:rPr lang="en-US" b="1" i="1" smtClean="0">
                             <a:solidFill>
                               <a:schemeClr val="accent1">
                                 <a:lumMod val="50000"/>
@@ -7330,7 +7392,7 @@
                       </m:dPr>
                       <m:e>
                         <m:r>
-                          <a:rPr lang="en-US" sz="3200" b="1" i="1" smtClean="0">
+                          <a:rPr lang="en-US" b="1" i="1" smtClean="0">
                             <a:solidFill>
                               <a:schemeClr val="accent1">
                                 <a:lumMod val="50000"/>
@@ -7343,7 +7405,7 @@
                       </m:e>
                     </m:d>
                     <m:r>
-                      <a:rPr lang="en-US" sz="3200" b="1" i="1" smtClean="0">
+                      <a:rPr lang="en-US" b="1" i="1" smtClean="0">
                         <a:solidFill>
                           <a:schemeClr val="accent1">
                             <a:lumMod val="50000"/>
@@ -7354,7 +7416,7 @@
                       <m:t>=(</m:t>
                     </m:r>
                     <m:r>
-                      <a:rPr lang="en-US" sz="3200" b="1" i="1" smtClean="0">
+                      <a:rPr lang="en-US" b="1" i="1" smtClean="0">
                         <a:solidFill>
                           <a:schemeClr val="accent1">
                             <a:lumMod val="50000"/>
@@ -7365,7 +7427,7 @@
                       <m:t>𝑯𝑭𝑷𝑶</m:t>
                     </m:r>
                     <m:r>
-                      <a:rPr lang="en-US" sz="3200" b="1" i="1" smtClean="0">
+                      <a:rPr lang="en-US" b="1" i="1" smtClean="0">
                         <a:solidFill>
                           <a:schemeClr val="accent1">
                             <a:lumMod val="50000"/>
@@ -7376,7 +7438,7 @@
                       <m:t>−</m:t>
                     </m:r>
                     <m:r>
-                      <a:rPr lang="en-US" sz="3200" b="1" i="1" smtClean="0">
+                      <a:rPr lang="en-US" b="1" i="1" smtClean="0">
                         <a:solidFill>
                           <a:schemeClr val="accent1">
                             <a:lumMod val="50000"/>
@@ -7389,7 +7451,7 @@
                     <m:d>
                       <m:dPr>
                         <m:ctrlPr>
-                          <a:rPr lang="en-US" sz="3200" b="1" i="1" smtClean="0">
+                          <a:rPr lang="en-US" b="1" i="1" smtClean="0">
                             <a:solidFill>
                               <a:schemeClr val="accent1">
                                 <a:lumMod val="50000"/>
@@ -7401,7 +7463,7 @@
                       </m:dPr>
                       <m:e>
                         <m:r>
-                          <a:rPr lang="en-US" sz="3200" b="1" i="1" smtClean="0">
+                          <a:rPr lang="en-US" b="1" i="1" smtClean="0">
                             <a:solidFill>
                               <a:schemeClr val="accent1">
                                 <a:lumMod val="50000"/>
@@ -7414,7 +7476,7 @@
                       </m:e>
                     </m:d>
                     <m:r>
-                      <a:rPr lang="en-US" sz="3200" b="1" i="1" smtClean="0">
+                      <a:rPr lang="en-US" b="1" i="1" smtClean="0">
                         <a:solidFill>
                           <a:schemeClr val="accent1">
                             <a:lumMod val="50000"/>
@@ -7425,7 +7487,7 @@
                       <m:t>/</m:t>
                     </m:r>
                     <m:r>
-                      <a:rPr lang="en-US" sz="3200" b="1" i="1" smtClean="0">
+                      <a:rPr lang="en-US" b="1" i="1" smtClean="0">
                         <a:solidFill>
                           <a:schemeClr val="accent1">
                             <a:lumMod val="50000"/>
@@ -7438,7 +7500,7 @@
                   </m:oMath>
                 </a14:m>
                 <a:r>
-                  <a:rPr lang="en-US" sz="3200" b="1" dirty="0">
+                  <a:rPr lang="en-US" b="1" dirty="0">
                     <a:solidFill>
                       <a:schemeClr val="accent1">
                         <a:lumMod val="50000"/>
@@ -7450,7 +7512,7 @@
                 <a14:m>
                   <m:oMath xmlns:m="http://schemas.openxmlformats.org/officeDocument/2006/math">
                     <m:r>
-                      <a:rPr lang="en-US" sz="3200" b="1" i="1">
+                      <a:rPr lang="en-US" b="1" i="1">
                         <a:solidFill>
                           <a:schemeClr val="accent1">
                             <a:lumMod val="50000"/>
@@ -7461,7 +7523,7 @@
                       <m:t>(</m:t>
                     </m:r>
                     <m:r>
-                      <a:rPr lang="en-US" sz="3200" b="1" i="1" smtClean="0">
+                      <a:rPr lang="en-US" b="1" i="1" smtClean="0">
                         <a:solidFill>
                           <a:schemeClr val="accent1">
                             <a:lumMod val="50000"/>
@@ -7474,7 +7536,7 @@
                     <m:d>
                       <m:dPr>
                         <m:ctrlPr>
-                          <a:rPr lang="en-US" sz="3200" b="1" i="1">
+                          <a:rPr lang="en-US" b="1" i="1">
                             <a:solidFill>
                               <a:schemeClr val="accent1">
                                 <a:lumMod val="50000"/>
@@ -7486,7 +7548,7 @@
                       </m:dPr>
                       <m:e>
                         <m:r>
-                          <a:rPr lang="en-US" sz="3200" b="1" i="1">
+                          <a:rPr lang="en-US" b="1" i="1">
                             <a:solidFill>
                               <a:schemeClr val="accent1">
                                 <a:lumMod val="50000"/>
@@ -7499,7 +7561,7 @@
                       </m:e>
                     </m:d>
                     <m:r>
-                      <a:rPr lang="en-US" sz="3200" b="1" i="1">
+                      <a:rPr lang="en-US" b="1" i="1">
                         <a:solidFill>
                           <a:schemeClr val="accent1">
                             <a:lumMod val="50000"/>
@@ -7510,7 +7572,7 @@
                       <m:t>/</m:t>
                     </m:r>
                     <m:r>
-                      <a:rPr lang="en-US" sz="3200" b="1" i="1" smtClean="0">
+                      <a:rPr lang="en-US" b="1" i="1" smtClean="0">
                         <a:solidFill>
                           <a:schemeClr val="accent1">
                             <a:lumMod val="50000"/>
@@ -7521,7 +7583,7 @@
                       <m:t>𝟐𝟎𝟎</m:t>
                     </m:r>
                     <m:r>
-                      <a:rPr lang="en-US" sz="3200" b="1" i="1">
+                      <a:rPr lang="en-US" b="1" i="1">
                         <a:solidFill>
                           <a:schemeClr val="accent1">
                             <a:lumMod val="50000"/>
@@ -7534,7 +7596,7 @@
                   </m:oMath>
                 </a14:m>
                 <a:r>
-                  <a:rPr lang="en-US" sz="3200" b="1" dirty="0">
+                  <a:rPr lang="en-US" b="1" dirty="0">
                     <a:solidFill>
                       <a:schemeClr val="accent1">
                         <a:lumMod val="50000"/>
@@ -7546,7 +7608,7 @@
                 <a14:m>
                   <m:oMath xmlns:m="http://schemas.openxmlformats.org/officeDocument/2006/math">
                     <m:r>
-                      <a:rPr lang="en-US" sz="3200" b="1" i="1">
+                      <a:rPr lang="en-US" b="1" i="1">
                         <a:solidFill>
                           <a:schemeClr val="accent1">
                             <a:lumMod val="50000"/>
@@ -7557,7 +7619,7 @@
                       <m:t>(</m:t>
                     </m:r>
                     <m:r>
-                      <a:rPr lang="en-US" sz="3200" b="1" i="1" smtClean="0">
+                      <a:rPr lang="en-US" b="1" i="1" smtClean="0">
                         <a:solidFill>
                           <a:schemeClr val="accent1">
                             <a:lumMod val="50000"/>
@@ -7570,7 +7632,7 @@
                     <m:d>
                       <m:dPr>
                         <m:ctrlPr>
-                          <a:rPr lang="en-US" sz="3200" b="1" i="1">
+                          <a:rPr lang="en-US" b="1" i="1">
                             <a:solidFill>
                               <a:schemeClr val="accent1">
                                 <a:lumMod val="50000"/>
@@ -7582,7 +7644,7 @@
                       </m:dPr>
                       <m:e>
                         <m:r>
-                          <a:rPr lang="en-US" sz="3200" b="1" i="1">
+                          <a:rPr lang="en-US" b="1" i="1">
                             <a:solidFill>
                               <a:schemeClr val="accent1">
                                 <a:lumMod val="50000"/>
@@ -7595,7 +7657,7 @@
                       </m:e>
                     </m:d>
                     <m:r>
-                      <a:rPr lang="en-US" sz="3200" b="1" i="1">
+                      <a:rPr lang="en-US" b="1" i="1">
                         <a:solidFill>
                           <a:schemeClr val="accent1">
                             <a:lumMod val="50000"/>
@@ -7606,7 +7668,7 @@
                       <m:t>/</m:t>
                     </m:r>
                     <m:r>
-                      <a:rPr lang="en-US" sz="3200" b="1" i="1">
+                      <a:rPr lang="en-US" b="1" i="1">
                         <a:solidFill>
                           <a:schemeClr val="accent1">
                             <a:lumMod val="50000"/>
@@ -7619,7 +7681,7 @@
                   </m:oMath>
                 </a14:m>
                 <a:r>
-                  <a:rPr lang="en-US" sz="3200" b="1" dirty="0">
+                  <a:rPr lang="en-US" b="1" dirty="0">
                     <a:solidFill>
                       <a:schemeClr val="accent1">
                         <a:lumMod val="50000"/>
@@ -7631,7 +7693,7 @@
                 <a14:m>
                   <m:oMath xmlns:m="http://schemas.openxmlformats.org/officeDocument/2006/math">
                     <m:r>
-                      <a:rPr lang="en-US" sz="3200" b="1" i="1">
+                      <a:rPr lang="en-US" b="1" i="1">
                         <a:solidFill>
                           <a:schemeClr val="accent1">
                             <a:lumMod val="50000"/>
@@ -7642,7 +7704,7 @@
                       <m:t>(</m:t>
                     </m:r>
                     <m:r>
-                      <a:rPr lang="en-US" sz="3200" b="1" i="1" smtClean="0">
+                      <a:rPr lang="en-US" b="1" i="1" smtClean="0">
                         <a:solidFill>
                           <a:schemeClr val="accent1">
                             <a:lumMod val="50000"/>
@@ -7653,7 +7715,7 @@
                       <m:t>𝑷𝑭𝑯𝒙𝑺</m:t>
                     </m:r>
                     <m:r>
-                      <a:rPr lang="en-US" sz="3200" b="1" i="1">
+                      <a:rPr lang="en-US" b="1" i="1">
                         <a:solidFill>
                           <a:schemeClr val="accent1">
                             <a:lumMod val="50000"/>
@@ -7664,7 +7726,7 @@
                       <m:t>/</m:t>
                     </m:r>
                     <m:r>
-                      <a:rPr lang="en-US" sz="3200" b="1" i="1">
+                      <a:rPr lang="en-US" b="1" i="1">
                         <a:solidFill>
                           <a:schemeClr val="accent1">
                             <a:lumMod val="50000"/>
@@ -7677,7 +7739,7 @@
                   </m:oMath>
                 </a14:m>
                 <a:r>
-                  <a:rPr lang="en-US" sz="3200" b="1" dirty="0">
+                  <a:rPr lang="en-US" b="1" dirty="0">
                     <a:solidFill>
                       <a:schemeClr val="accent1">
                         <a:lumMod val="50000"/>
@@ -7767,7 +7829,7 @@
               <a:blipFill>
                 <a:blip r:embed="rId2"/>
                 <a:stretch>
-                  <a:fillRect l="-1997" t="-716" r="-1649"/>
+                  <a:fillRect l="-1997" t="-716" r="-1649" b="-256"/>
                 </a:stretch>
               </a:blipFill>
             </p:spPr>
@@ -8305,8 +8367,8 @@
         </p:nvSpPr>
         <p:spPr>
           <a:xfrm>
-            <a:off x="28996106" y="5619555"/>
-            <a:ext cx="14895094" cy="24812177"/>
+            <a:off x="29260800" y="5619555"/>
+            <a:ext cx="14630400" cy="24812177"/>
           </a:xfrm>
         </p:spPr>
         <p:txBody>
@@ -9006,6 +9068,126 @@
           </a:p>
         </p:txBody>
       </p:sp>
+      <p:pic>
+        <p:nvPicPr>
+          <p:cNvPr id="4" name="Picture 3">
+            <a:extLst>
+              <a:ext uri="{FF2B5EF4-FFF2-40B4-BE49-F238E27FC236}">
+                <a16:creationId xmlns:a16="http://schemas.microsoft.com/office/drawing/2014/main" id="{2275A505-4BB7-0C64-4386-A57A3D5AAC1E}"/>
+              </a:ext>
+            </a:extLst>
+          </p:cNvPr>
+          <p:cNvPicPr>
+            <a:picLocks noChangeAspect="1"/>
+          </p:cNvPicPr>
+          <p:nvPr/>
+        </p:nvPicPr>
+        <p:blipFill>
+          <a:blip r:embed="rId10"/>
+          <a:stretch>
+            <a:fillRect/>
+          </a:stretch>
+        </p:blipFill>
+        <p:spPr>
+          <a:xfrm>
+            <a:off x="14951033" y="6614556"/>
+            <a:ext cx="12365181" cy="8243454"/>
+          </a:xfrm>
+          <a:prstGeom prst="rect">
+            <a:avLst/>
+          </a:prstGeom>
+        </p:spPr>
+      </p:pic>
+      <p:pic>
+        <p:nvPicPr>
+          <p:cNvPr id="7" name="Picture 6">
+            <a:extLst>
+              <a:ext uri="{FF2B5EF4-FFF2-40B4-BE49-F238E27FC236}">
+                <a16:creationId xmlns:a16="http://schemas.microsoft.com/office/drawing/2014/main" id="{8DB399D0-5D23-D139-707D-865B3CB825B9}"/>
+              </a:ext>
+            </a:extLst>
+          </p:cNvPr>
+          <p:cNvPicPr>
+            <a:picLocks noChangeAspect="1"/>
+          </p:cNvPicPr>
+          <p:nvPr/>
+        </p:nvPicPr>
+        <p:blipFill>
+          <a:blip r:embed="rId11"/>
+          <a:stretch>
+            <a:fillRect/>
+          </a:stretch>
+        </p:blipFill>
+        <p:spPr>
+          <a:xfrm>
+            <a:off x="14065131" y="15267285"/>
+            <a:ext cx="12670183" cy="9050129"/>
+          </a:xfrm>
+          <a:prstGeom prst="rect">
+            <a:avLst/>
+          </a:prstGeom>
+        </p:spPr>
+      </p:pic>
+      <p:pic>
+        <p:nvPicPr>
+          <p:cNvPr id="12" name="Picture 11">
+            <a:extLst>
+              <a:ext uri="{FF2B5EF4-FFF2-40B4-BE49-F238E27FC236}">
+                <a16:creationId xmlns:a16="http://schemas.microsoft.com/office/drawing/2014/main" id="{04858FAE-1C8D-0946-B8C3-06B7A8DBCB97}"/>
+              </a:ext>
+            </a:extLst>
+          </p:cNvPr>
+          <p:cNvPicPr>
+            <a:picLocks noChangeAspect="1"/>
+          </p:cNvPicPr>
+          <p:nvPr/>
+        </p:nvPicPr>
+        <p:blipFill>
+          <a:blip r:embed="rId12"/>
+          <a:stretch>
+            <a:fillRect/>
+          </a:stretch>
+        </p:blipFill>
+        <p:spPr>
+          <a:xfrm>
+            <a:off x="29812065" y="5707504"/>
+            <a:ext cx="13383695" cy="9559782"/>
+          </a:xfrm>
+          <a:prstGeom prst="rect">
+            <a:avLst/>
+          </a:prstGeom>
+        </p:spPr>
+      </p:pic>
+      <p:pic>
+        <p:nvPicPr>
+          <p:cNvPr id="14" name="Picture 13">
+            <a:extLst>
+              <a:ext uri="{FF2B5EF4-FFF2-40B4-BE49-F238E27FC236}">
+                <a16:creationId xmlns:a16="http://schemas.microsoft.com/office/drawing/2014/main" id="{B5BA9DBB-2550-B185-75A1-8A4A4386A3B4}"/>
+              </a:ext>
+            </a:extLst>
+          </p:cNvPr>
+          <p:cNvPicPr>
+            <a:picLocks noChangeAspect="1"/>
+          </p:cNvPicPr>
+          <p:nvPr/>
+        </p:nvPicPr>
+        <p:blipFill>
+          <a:blip r:embed="rId13"/>
+          <a:stretch>
+            <a:fillRect/>
+          </a:stretch>
+        </p:blipFill>
+        <p:spPr>
+          <a:xfrm>
+            <a:off x="15179475" y="24561462"/>
+            <a:ext cx="13816630" cy="5526652"/>
+          </a:xfrm>
+          <a:prstGeom prst="rect">
+            <a:avLst/>
+          </a:prstGeom>
+        </p:spPr>
+      </p:pic>
     </p:spTree>
     <p:extLst>
       <p:ext uri="{BB962C8B-B14F-4D97-AF65-F5344CB8AC3E}">

--- a/MichiganPFAS_ResearchPoster.pptx
+++ b/MichiganPFAS_ResearchPoster.pptx
@@ -257,7 +257,7 @@
       </p15:sldGuideLst>
     </p:ext>
     <p:ext uri="http://customooxmlschemas.google.com/">
-      <go:slidesCustomData xmlns="" xmlns:mc="http://schemas.openxmlformats.org/markup-compatibility/2006" xmlns:mv="urn:schemas-microsoft-com:mac:vml" xmlns:c="http://schemas.openxmlformats.org/drawingml/2006/chart" xmlns:dgm="http://schemas.openxmlformats.org/drawingml/2006/diagram" xmlns:o="urn:schemas-microsoft-com:office:office" xmlns:v="urn:schemas-microsoft-com:vml" xmlns:pvml="urn:schemas-microsoft-com:office:powerpoint" xmlns:com="http://schemas.openxmlformats.org/drawingml/2006/compatibility" xmlns:p14="http://schemas.microsoft.com/office/powerpoint/2010/main" xmlns:p15="http://schemas.microsoft.com/office/powerpoint/2012/main" xmlns:ahyp="http://schemas.microsoft.com/office/drawing/2018/hyperlinkcolor" xmlns:go="http://customooxmlschemas.google.com/" r:id="rId9" roundtripDataSignature="AMtx7mi8fLYElh59t4jHQwYsQUndL0Eu8g=="/>
+      <go:slidesCustomData xmlns="" xmlns:go="http://customooxmlschemas.google.com/" xmlns:ahyp="http://schemas.microsoft.com/office/drawing/2018/hyperlinkcolor" xmlns:p15="http://schemas.microsoft.com/office/powerpoint/2012/main" xmlns:p14="http://schemas.microsoft.com/office/powerpoint/2010/main" xmlns:com="http://schemas.openxmlformats.org/drawingml/2006/compatibility" xmlns:pvml="urn:schemas-microsoft-com:office:powerpoint" xmlns:v="urn:schemas-microsoft-com:vml" xmlns:o="urn:schemas-microsoft-com:office:office" xmlns:dgm="http://schemas.openxmlformats.org/drawingml/2006/diagram" xmlns:c="http://schemas.openxmlformats.org/drawingml/2006/chart" xmlns:mv="urn:schemas-microsoft-com:mac:vml" xmlns:mc="http://schemas.openxmlformats.org/markup-compatibility/2006" r:id="rId9" roundtripDataSignature="AMtx7mi8fLYElh59t4jHQwYsQUndL0Eu8g=="/>
     </p:ext>
   </p:extLst>
 </p:presentation>
@@ -266,7 +266,7 @@
 <file path=ppt/revisionInfo.xml><?xml version="1.0" encoding="utf-8"?>
 <p1510:revInfo xmlns:a="http://schemas.openxmlformats.org/drawingml/2006/main" xmlns:r="http://schemas.openxmlformats.org/officeDocument/2006/relationships" xmlns:p1510="http://schemas.microsoft.com/office/powerpoint/2015/10/main">
   <p1510:revLst>
-    <p1510:client id="{6C20A5EC-8840-9940-BC91-4086AF4B13F5}" v="33" dt="2026-03-25T11:29:17.515"/>
+    <p1510:client id="{878780F1-3F5F-9B49-AE34-5CCFF222A762}" v="33" dt="2026-04-01T03:48:39.410"/>
   </p1510:revLst>
 </p1510:revInfo>
 </file>
@@ -276,114 +276,74 @@
   <pc:docChgLst>
     <pc:chgData name="Nancy A. Odhiambo" userId="9fd03ea9-f642-46ed-82e0-72dc91a725bc" providerId="ADAL" clId="{6B025E33-D5BB-5DD4-954E-4AC3FAD535B9}"/>
     <pc:docChg chg="undo custSel modSld">
-      <pc:chgData name="Nancy A. Odhiambo" userId="9fd03ea9-f642-46ed-82e0-72dc91a725bc" providerId="ADAL" clId="{6B025E33-D5BB-5DD4-954E-4AC3FAD535B9}" dt="2026-03-25T11:29:17.515" v="2034" actId="255"/>
+      <pc:chgData name="Nancy A. Odhiambo" userId="9fd03ea9-f642-46ed-82e0-72dc91a725bc" providerId="ADAL" clId="{6B025E33-D5BB-5DD4-954E-4AC3FAD535B9}" dt="2026-04-01T04:31:07.747" v="260" actId="14100"/>
       <pc:docMkLst>
         <pc:docMk/>
       </pc:docMkLst>
       <pc:sldChg chg="addSp delSp modSp mod">
-        <pc:chgData name="Nancy A. Odhiambo" userId="9fd03ea9-f642-46ed-82e0-72dc91a725bc" providerId="ADAL" clId="{6B025E33-D5BB-5DD4-954E-4AC3FAD535B9}" dt="2026-03-25T11:29:17.515" v="2034" actId="255"/>
+        <pc:chgData name="Nancy A. Odhiambo" userId="9fd03ea9-f642-46ed-82e0-72dc91a725bc" providerId="ADAL" clId="{6B025E33-D5BB-5DD4-954E-4AC3FAD535B9}" dt="2026-04-01T04:31:07.747" v="260" actId="14100"/>
         <pc:sldMkLst>
           <pc:docMk/>
           <pc:sldMk cId="3865402343" sldId="261"/>
         </pc:sldMkLst>
-        <pc:spChg chg="add del mod">
-          <ac:chgData name="Nancy A. Odhiambo" userId="9fd03ea9-f642-46ed-82e0-72dc91a725bc" providerId="ADAL" clId="{6B025E33-D5BB-5DD4-954E-4AC3FAD535B9}" dt="2026-03-25T11:29:17.515" v="2034" actId="255"/>
-          <ac:spMkLst>
-            <pc:docMk/>
-            <pc:sldMk cId="3865402343" sldId="261"/>
-            <ac:spMk id="2" creationId="{22F7C748-A7B8-994F-51B5-6A10DF850565}"/>
-          </ac:spMkLst>
-        </pc:spChg>
-        <pc:spChg chg="add del mod">
-          <ac:chgData name="Nancy A. Odhiambo" userId="9fd03ea9-f642-46ed-82e0-72dc91a725bc" providerId="ADAL" clId="{6B025E33-D5BB-5DD4-954E-4AC3FAD535B9}" dt="2026-03-24T04:09:39.296" v="1647" actId="478"/>
-          <ac:spMkLst>
-            <pc:docMk/>
-            <pc:sldMk cId="3865402343" sldId="261"/>
-            <ac:spMk id="3" creationId="{10DB3307-46A7-C7B7-5379-43CBB6320BF8}"/>
-          </ac:spMkLst>
-        </pc:spChg>
-        <pc:spChg chg="add mod">
-          <ac:chgData name="Nancy A. Odhiambo" userId="9fd03ea9-f642-46ed-82e0-72dc91a725bc" providerId="ADAL" clId="{6B025E33-D5BB-5DD4-954E-4AC3FAD535B9}" dt="2026-03-24T03:48:59.710" v="586"/>
-          <ac:spMkLst>
-            <pc:docMk/>
-            <pc:sldMk cId="3865402343" sldId="261"/>
-            <ac:spMk id="4" creationId="{E0AF4F27-BF7E-8C35-5EED-00A9A95028F6}"/>
-          </ac:spMkLst>
-        </pc:spChg>
-        <pc:spChg chg="add del mod">
-          <ac:chgData name="Nancy A. Odhiambo" userId="9fd03ea9-f642-46ed-82e0-72dc91a725bc" providerId="ADAL" clId="{6B025E33-D5BB-5DD4-954E-4AC3FAD535B9}" dt="2026-03-24T04:31:19.958" v="1939" actId="14100"/>
+        <pc:spChg chg="mod">
+          <ac:chgData name="Nancy A. Odhiambo" userId="9fd03ea9-f642-46ed-82e0-72dc91a725bc" providerId="ADAL" clId="{6B025E33-D5BB-5DD4-954E-4AC3FAD535B9}" dt="2026-04-01T03:31:22.403" v="73" actId="20577"/>
           <ac:spMkLst>
             <pc:docMk/>
             <pc:sldMk cId="3865402343" sldId="261"/>
             <ac:spMk id="5" creationId="{0F657839-AC5A-CBEC-68BD-5C169C5740B8}"/>
           </ac:spMkLst>
         </pc:spChg>
-        <pc:spChg chg="add mod">
-          <ac:chgData name="Nancy A. Odhiambo" userId="9fd03ea9-f642-46ed-82e0-72dc91a725bc" providerId="ADAL" clId="{6B025E33-D5BB-5DD4-954E-4AC3FAD535B9}" dt="2026-03-24T03:50:03.263" v="1053"/>
+        <pc:spChg chg="mod">
+          <ac:chgData name="Nancy A. Odhiambo" userId="9fd03ea9-f642-46ed-82e0-72dc91a725bc" providerId="ADAL" clId="{6B025E33-D5BB-5DD4-954E-4AC3FAD535B9}" dt="2026-04-01T03:56:14.901" v="226" actId="14100"/>
           <ac:spMkLst>
             <pc:docMk/>
             <pc:sldMk cId="3865402343" sldId="261"/>
-            <ac:spMk id="6" creationId="{462E4BBD-A9E2-7A33-44CA-705C704EE9C3}"/>
+            <ac:spMk id="6" creationId="{61173C06-0403-2A94-6AF8-40D60FE4BD9D}"/>
           </ac:spMkLst>
         </pc:spChg>
-        <pc:spChg chg="add mod">
-          <ac:chgData name="Nancy A. Odhiambo" userId="9fd03ea9-f642-46ed-82e0-72dc91a725bc" providerId="ADAL" clId="{6B025E33-D5BB-5DD4-954E-4AC3FAD535B9}" dt="2026-03-24T04:08:42.917" v="1643" actId="478"/>
-          <ac:spMkLst>
-            <pc:docMk/>
-            <pc:sldMk cId="3865402343" sldId="261"/>
-            <ac:spMk id="7" creationId="{1375D565-B110-F90F-A070-10671DFEEB23}"/>
-          </ac:spMkLst>
-        </pc:spChg>
-        <pc:spChg chg="add del mod">
-          <ac:chgData name="Nancy A. Odhiambo" userId="9fd03ea9-f642-46ed-82e0-72dc91a725bc" providerId="ADAL" clId="{6B025E33-D5BB-5DD4-954E-4AC3FAD535B9}" dt="2026-03-24T04:08:44.616" v="1644" actId="478"/>
+        <pc:spChg chg="mod">
+          <ac:chgData name="Nancy A. Odhiambo" userId="9fd03ea9-f642-46ed-82e0-72dc91a725bc" providerId="ADAL" clId="{6B025E33-D5BB-5DD4-954E-4AC3FAD535B9}" dt="2026-04-01T01:25:19.194" v="33" actId="255"/>
           <ac:spMkLst>
             <pc:docMk/>
             <pc:sldMk cId="3865402343" sldId="261"/>
             <ac:spMk id="8" creationId="{BAAC6169-C1CE-EE5A-EDB1-D24E66F4A940}"/>
           </ac:spMkLst>
         </pc:spChg>
-        <pc:spChg chg="add del mod">
-          <ac:chgData name="Nancy A. Odhiambo" userId="9fd03ea9-f642-46ed-82e0-72dc91a725bc" providerId="ADAL" clId="{6B025E33-D5BB-5DD4-954E-4AC3FAD535B9}" dt="2026-03-24T04:08:44.616" v="1644" actId="478"/>
+        <pc:spChg chg="mod">
+          <ac:chgData name="Nancy A. Odhiambo" userId="9fd03ea9-f642-46ed-82e0-72dc91a725bc" providerId="ADAL" clId="{6B025E33-D5BB-5DD4-954E-4AC3FAD535B9}" dt="2026-04-01T01:23:01.154" v="6" actId="255"/>
           <ac:spMkLst>
             <pc:docMk/>
             <pc:sldMk cId="3865402343" sldId="261"/>
             <ac:spMk id="9" creationId="{7731369C-25C6-4539-52D3-470DF230526A}"/>
           </ac:spMkLst>
         </pc:spChg>
-        <pc:spChg chg="add mod">
-          <ac:chgData name="Nancy A. Odhiambo" userId="9fd03ea9-f642-46ed-82e0-72dc91a725bc" providerId="ADAL" clId="{6B025E33-D5BB-5DD4-954E-4AC3FAD535B9}" dt="2026-03-24T04:08:42.917" v="1643" actId="478"/>
-          <ac:spMkLst>
-            <pc:docMk/>
-            <pc:sldMk cId="3865402343" sldId="261"/>
-            <ac:spMk id="10" creationId="{9AFE843B-0EC6-7C80-72F9-2DA8A4E58788}"/>
-          </ac:spMkLst>
-        </pc:spChg>
-        <pc:spChg chg="add mod">
-          <ac:chgData name="Nancy A. Odhiambo" userId="9fd03ea9-f642-46ed-82e0-72dc91a725bc" providerId="ADAL" clId="{6B025E33-D5BB-5DD4-954E-4AC3FAD535B9}" dt="2026-03-24T04:08:42.917" v="1643" actId="478"/>
-          <ac:spMkLst>
-            <pc:docMk/>
-            <pc:sldMk cId="3865402343" sldId="261"/>
-            <ac:spMk id="12" creationId="{2FDC1D21-0ACE-1342-0B95-871DFDFBAA6C}"/>
-          </ac:spMkLst>
-        </pc:spChg>
-        <pc:spChg chg="add del mod">
-          <ac:chgData name="Nancy A. Odhiambo" userId="9fd03ea9-f642-46ed-82e0-72dc91a725bc" providerId="ADAL" clId="{6B025E33-D5BB-5DD4-954E-4AC3FAD535B9}" dt="2026-03-25T11:24:12.261" v="2008" actId="14100"/>
+        <pc:spChg chg="mod">
+          <ac:chgData name="Nancy A. Odhiambo" userId="9fd03ea9-f642-46ed-82e0-72dc91a725bc" providerId="ADAL" clId="{6B025E33-D5BB-5DD4-954E-4AC3FAD535B9}" dt="2026-04-01T03:34:53.556" v="89" actId="20577"/>
           <ac:spMkLst>
             <pc:docMk/>
             <pc:sldMk cId="3865402343" sldId="261"/>
             <ac:spMk id="50" creationId="{AB71F360-BB8B-D375-3180-E5F2E2514D50}"/>
           </ac:spMkLst>
         </pc:spChg>
-        <pc:picChg chg="add mod">
-          <ac:chgData name="Nancy A. Odhiambo" userId="9fd03ea9-f642-46ed-82e0-72dc91a725bc" providerId="ADAL" clId="{6B025E33-D5BB-5DD4-954E-4AC3FAD535B9}" dt="2026-03-25T11:08:20.240" v="1998" actId="14100"/>
+        <pc:picChg chg="add del mod">
+          <ac:chgData name="Nancy A. Odhiambo" userId="9fd03ea9-f642-46ed-82e0-72dc91a725bc" providerId="ADAL" clId="{6B025E33-D5BB-5DD4-954E-4AC3FAD535B9}" dt="2026-04-01T03:50:56.812" v="202" actId="478"/>
+          <ac:picMkLst>
+            <pc:docMk/>
+            <pc:sldMk cId="3865402343" sldId="261"/>
+            <ac:picMk id="3" creationId="{F112226C-EE2D-5A8B-9F43-5BDFAC2D8184}"/>
+          </ac:picMkLst>
+        </pc:picChg>
+        <pc:picChg chg="del mod">
+          <ac:chgData name="Nancy A. Odhiambo" userId="9fd03ea9-f642-46ed-82e0-72dc91a725bc" providerId="ADAL" clId="{6B025E33-D5BB-5DD4-954E-4AC3FAD535B9}" dt="2026-04-01T03:26:10.654" v="35" actId="478"/>
           <ac:picMkLst>
             <pc:docMk/>
             <pc:sldMk cId="3865402343" sldId="261"/>
             <ac:picMk id="4" creationId="{2275A505-4BB7-0C64-4386-A57A3D5AAC1E}"/>
           </ac:picMkLst>
         </pc:picChg>
-        <pc:picChg chg="add mod">
-          <ac:chgData name="Nancy A. Odhiambo" userId="9fd03ea9-f642-46ed-82e0-72dc91a725bc" providerId="ADAL" clId="{6B025E33-D5BB-5DD4-954E-4AC3FAD535B9}" dt="2026-03-25T11:08:52.323" v="2001" actId="14100"/>
+        <pc:picChg chg="del mod">
+          <ac:chgData name="Nancy A. Odhiambo" userId="9fd03ea9-f642-46ed-82e0-72dc91a725bc" providerId="ADAL" clId="{6B025E33-D5BB-5DD4-954E-4AC3FAD535B9}" dt="2026-04-01T03:26:12.367" v="36" actId="478"/>
           <ac:picMkLst>
             <pc:docMk/>
             <pc:sldMk cId="3865402343" sldId="261"/>
@@ -391,27 +351,107 @@
           </ac:picMkLst>
         </pc:picChg>
         <pc:picChg chg="add del mod">
-          <ac:chgData name="Nancy A. Odhiambo" userId="9fd03ea9-f642-46ed-82e0-72dc91a725bc" providerId="ADAL" clId="{6B025E33-D5BB-5DD4-954E-4AC3FAD535B9}" dt="2026-03-24T04:08:44.616" v="1644" actId="478"/>
+          <ac:chgData name="Nancy A. Odhiambo" userId="9fd03ea9-f642-46ed-82e0-72dc91a725bc" providerId="ADAL" clId="{6B025E33-D5BB-5DD4-954E-4AC3FAD535B9}" dt="2026-04-01T03:54:59.313" v="218" actId="478"/>
           <ac:picMkLst>
             <pc:docMk/>
             <pc:sldMk cId="3865402343" sldId="261"/>
-            <ac:picMk id="11" creationId="{BB728658-9F61-908A-3DCE-2DBBF3565C05}"/>
+            <ac:picMk id="11" creationId="{DDE1DC23-53A1-CA14-5554-8E2D674EE7A9}"/>
           </ac:picMkLst>
         </pc:picChg>
-        <pc:picChg chg="add mod">
-          <ac:chgData name="Nancy A. Odhiambo" userId="9fd03ea9-f642-46ed-82e0-72dc91a725bc" providerId="ADAL" clId="{6B025E33-D5BB-5DD4-954E-4AC3FAD535B9}" dt="2026-03-25T11:06:58.889" v="1995" actId="14100"/>
+        <pc:picChg chg="del mod">
+          <ac:chgData name="Nancy A. Odhiambo" userId="9fd03ea9-f642-46ed-82e0-72dc91a725bc" providerId="ADAL" clId="{6B025E33-D5BB-5DD4-954E-4AC3FAD535B9}" dt="2026-04-01T03:26:16.491" v="38" actId="478"/>
           <ac:picMkLst>
             <pc:docMk/>
             <pc:sldMk cId="3865402343" sldId="261"/>
             <ac:picMk id="12" creationId="{04858FAE-1C8D-0946-B8C3-06B7A8DBCB97}"/>
           </ac:picMkLst>
         </pc:picChg>
-        <pc:picChg chg="add mod">
-          <ac:chgData name="Nancy A. Odhiambo" userId="9fd03ea9-f642-46ed-82e0-72dc91a725bc" providerId="ADAL" clId="{6B025E33-D5BB-5DD4-954E-4AC3FAD535B9}" dt="2026-03-25T11:23:58.160" v="2007" actId="14100"/>
+        <pc:picChg chg="del mod">
+          <ac:chgData name="Nancy A. Odhiambo" userId="9fd03ea9-f642-46ed-82e0-72dc91a725bc" providerId="ADAL" clId="{6B025E33-D5BB-5DD4-954E-4AC3FAD535B9}" dt="2026-04-01T03:26:13.990" v="37" actId="478"/>
           <ac:picMkLst>
             <pc:docMk/>
             <pc:sldMk cId="3865402343" sldId="261"/>
             <ac:picMk id="14" creationId="{B5BA9DBB-2550-B185-75A1-8A4A4386A3B4}"/>
+          </ac:picMkLst>
+        </pc:picChg>
+        <pc:picChg chg="add del mod">
+          <ac:chgData name="Nancy A. Odhiambo" userId="9fd03ea9-f642-46ed-82e0-72dc91a725bc" providerId="ADAL" clId="{6B025E33-D5BB-5DD4-954E-4AC3FAD535B9}" dt="2026-04-01T03:55:06.268" v="220" actId="478"/>
+          <ac:picMkLst>
+            <pc:docMk/>
+            <pc:sldMk cId="3865402343" sldId="261"/>
+            <ac:picMk id="15" creationId="{7CF0013B-E5BC-D50D-FE0E-5D0656FCFE24}"/>
+          </ac:picMkLst>
+        </pc:picChg>
+        <pc:picChg chg="add del mod">
+          <ac:chgData name="Nancy A. Odhiambo" userId="9fd03ea9-f642-46ed-82e0-72dc91a725bc" providerId="ADAL" clId="{6B025E33-D5BB-5DD4-954E-4AC3FAD535B9}" dt="2026-04-01T03:48:44.609" v="191" actId="478"/>
+          <ac:picMkLst>
+            <pc:docMk/>
+            <pc:sldMk cId="3865402343" sldId="261"/>
+            <ac:picMk id="17" creationId="{1F046A89-943B-1C1D-C03E-39BA021F18FD}"/>
+          </ac:picMkLst>
+        </pc:picChg>
+        <pc:picChg chg="add del mod">
+          <ac:chgData name="Nancy A. Odhiambo" userId="9fd03ea9-f642-46ed-82e0-72dc91a725bc" providerId="ADAL" clId="{6B025E33-D5BB-5DD4-954E-4AC3FAD535B9}" dt="2026-04-01T03:48:22.992" v="184" actId="21"/>
+          <ac:picMkLst>
+            <pc:docMk/>
+            <pc:sldMk cId="3865402343" sldId="261"/>
+            <ac:picMk id="19" creationId="{F6067078-1971-2CB0-0349-F993729C3B6F}"/>
+          </ac:picMkLst>
+        </pc:picChg>
+        <pc:picChg chg="add del mod">
+          <ac:chgData name="Nancy A. Odhiambo" userId="9fd03ea9-f642-46ed-82e0-72dc91a725bc" providerId="ADAL" clId="{6B025E33-D5BB-5DD4-954E-4AC3FAD535B9}" dt="2026-04-01T03:58:19.865" v="239" actId="14100"/>
+          <ac:picMkLst>
+            <pc:docMk/>
+            <pc:sldMk cId="3865402343" sldId="261"/>
+            <ac:picMk id="20" creationId="{A2DEBB8A-F865-609C-0583-2531C5FA20D7}"/>
+          </ac:picMkLst>
+        </pc:picChg>
+        <pc:picChg chg="add mod">
+          <ac:chgData name="Nancy A. Odhiambo" userId="9fd03ea9-f642-46ed-82e0-72dc91a725bc" providerId="ADAL" clId="{6B025E33-D5BB-5DD4-954E-4AC3FAD535B9}" dt="2026-04-01T03:48:36.943" v="188"/>
+          <ac:picMkLst>
+            <pc:docMk/>
+            <pc:sldMk cId="3865402343" sldId="261"/>
+            <ac:picMk id="21" creationId="{A5C79883-2677-0EF4-103B-ADB61B21B575}"/>
+          </ac:picMkLst>
+        </pc:picChg>
+        <pc:picChg chg="add mod">
+          <ac:chgData name="Nancy A. Odhiambo" userId="9fd03ea9-f642-46ed-82e0-72dc91a725bc" providerId="ADAL" clId="{6B025E33-D5BB-5DD4-954E-4AC3FAD535B9}" dt="2026-04-01T03:57:53.317" v="237" actId="14100"/>
+          <ac:picMkLst>
+            <pc:docMk/>
+            <pc:sldMk cId="3865402343" sldId="261"/>
+            <ac:picMk id="23" creationId="{677BF915-846A-249E-4A7F-F27B275360E6}"/>
+          </ac:picMkLst>
+        </pc:picChg>
+        <pc:picChg chg="add mod">
+          <ac:chgData name="Nancy A. Odhiambo" userId="9fd03ea9-f642-46ed-82e0-72dc91a725bc" providerId="ADAL" clId="{6B025E33-D5BB-5DD4-954E-4AC3FAD535B9}" dt="2026-04-01T03:57:19.700" v="235" actId="14100"/>
+          <ac:picMkLst>
+            <pc:docMk/>
+            <pc:sldMk cId="3865402343" sldId="261"/>
+            <ac:picMk id="25" creationId="{83A2D002-4710-DA77-A88B-26210568B56D}"/>
+          </ac:picMkLst>
+        </pc:picChg>
+        <pc:picChg chg="add mod">
+          <ac:chgData name="Nancy A. Odhiambo" userId="9fd03ea9-f642-46ed-82e0-72dc91a725bc" providerId="ADAL" clId="{6B025E33-D5BB-5DD4-954E-4AC3FAD535B9}" dt="2026-04-01T03:59:28.398" v="241" actId="14100"/>
+          <ac:picMkLst>
+            <pc:docMk/>
+            <pc:sldMk cId="3865402343" sldId="261"/>
+            <ac:picMk id="27" creationId="{74E1BC0B-E930-6642-B516-85F2CB94425E}"/>
+          </ac:picMkLst>
+        </pc:picChg>
+        <pc:picChg chg="add mod">
+          <ac:chgData name="Nancy A. Odhiambo" userId="9fd03ea9-f642-46ed-82e0-72dc91a725bc" providerId="ADAL" clId="{6B025E33-D5BB-5DD4-954E-4AC3FAD535B9}" dt="2026-04-01T04:31:07.747" v="260" actId="14100"/>
+          <ac:picMkLst>
+            <pc:docMk/>
+            <pc:sldMk cId="3865402343" sldId="261"/>
+            <ac:picMk id="29" creationId="{A522BCBD-72DE-AE9D-2729-A808100AB3CD}"/>
+          </ac:picMkLst>
+        </pc:picChg>
+        <pc:picChg chg="mod">
+          <ac:chgData name="Nancy A. Odhiambo" userId="9fd03ea9-f642-46ed-82e0-72dc91a725bc" providerId="ADAL" clId="{6B025E33-D5BB-5DD4-954E-4AC3FAD535B9}" dt="2026-04-01T03:46:26.583" v="180" actId="1076"/>
+          <ac:picMkLst>
+            <pc:docMk/>
+            <pc:sldMk cId="3865402343" sldId="261"/>
+            <ac:picMk id="1026" creationId="{4B74822B-A35F-3E3A-D303-5FA0B39578AC}"/>
           </ac:picMkLst>
         </pc:picChg>
       </pc:sldChg>
@@ -4676,7 +4716,7 @@
                             </a:spcAft>
                           </a:pPr>
                           <a:r>
-                            <a:rPr lang="en-US" sz="3200" b="0" i="0" u="none" strike="noStrike" cap="none" dirty="0">
+                            <a:rPr lang="en-US" sz="3200" b="0" i="0" u="none" strike="noStrike" cap="none">
                               <a:solidFill>
                                 <a:srgbClr val="000000"/>
                               </a:solidFill>
@@ -4687,7 +4727,7 @@
                             </a:rPr>
                             <a:t>Level</a:t>
                           </a:r>
-                          <a:endParaRPr lang="en-US" sz="3200" b="0" i="0" u="none" strike="noStrike" cap="none" dirty="0">
+                          <a:endParaRPr lang="en-US" sz="3200" b="0" i="0" u="none" strike="noStrike" cap="none">
                             <a:solidFill>
                               <a:srgbClr val="000000"/>
                             </a:solidFill>
@@ -4718,7 +4758,7 @@
                             </a:spcAft>
                           </a:pPr>
                           <a:r>
-                            <a:rPr lang="en-US" sz="3200" b="0" i="0" u="none" strike="noStrike" cap="none" dirty="0">
+                            <a:rPr lang="en-US" sz="3200" b="0" i="0" u="none" strike="noStrike" cap="none">
                               <a:solidFill>
                                 <a:srgbClr val="000000"/>
                               </a:solidFill>
@@ -4729,7 +4769,7 @@
                             </a:rPr>
                             <a:t>Model</a:t>
                           </a:r>
-                          <a:endParaRPr lang="en-US" sz="3200" b="0" i="0" u="none" strike="noStrike" cap="none" dirty="0">
+                          <a:endParaRPr lang="en-US" sz="3200" b="0" i="0" u="none" strike="noStrike" cap="none">
                             <a:solidFill>
                               <a:srgbClr val="000000"/>
                             </a:solidFill>
@@ -4760,12 +4800,12 @@
                             </a:spcAft>
                           </a:pPr>
                           <a:r>
-                            <a:rPr lang="en-US" sz="3200" dirty="0">
+                            <a:rPr lang="en-US" sz="3200">
                               <a:effectLst/>
                             </a:rPr>
                             <a:t>Interpretation</a:t>
                           </a:r>
-                          <a:endParaRPr lang="en-US" sz="3200" dirty="0">
+                          <a:endParaRPr lang="en-US" sz="3200">
                             <a:effectLst/>
                             <a:latin typeface="Times New Roman" panose="02020603050405020304" pitchFamily="18" charset="0"/>
                             <a:ea typeface="Cambria" panose="02040503050406030204" pitchFamily="18" charset="0"/>
@@ -4803,7 +4843,7 @@
                             <a:buFont typeface="Arial"/>
                           </a:pPr>
                           <a:r>
-                            <a:rPr lang="en-US" sz="3200" b="0" i="0" u="none" strike="noStrike" cap="none" dirty="0">
+                            <a:rPr lang="en-US" sz="3200" b="0" i="0" u="none" strike="noStrike" cap="none">
                               <a:solidFill>
                                 <a:srgbClr val="000000"/>
                               </a:solidFill>
@@ -4814,7 +4854,7 @@
                             </a:rPr>
                             <a:t>Cluster</a:t>
                           </a:r>
-                          <a:endParaRPr lang="en-US" sz="3200" b="0" i="0" u="none" strike="noStrike" cap="none" dirty="0">
+                          <a:endParaRPr lang="en-US" sz="3200" b="0" i="0" u="none" strike="noStrike" cap="none">
                             <a:solidFill>
                               <a:srgbClr val="000000"/>
                             </a:solidFill>
@@ -4890,7 +4930,7 @@
                             <a:buFont typeface="Arial"/>
                           </a:pPr>
                           <a:r>
-                            <a:rPr lang="en-US" sz="3200" b="0" i="0" u="none" strike="noStrike" cap="none" dirty="0">
+                            <a:rPr lang="en-US" sz="3200" b="0" i="0" u="none" strike="noStrike" cap="none">
                               <a:solidFill>
                                 <a:srgbClr val="000000"/>
                               </a:solidFill>
@@ -4901,7 +4941,7 @@
                             </a:rPr>
                             <a:t>Subject</a:t>
                           </a:r>
-                          <a:endParaRPr lang="en-US" sz="3200" b="0" i="0" u="none" strike="noStrike" cap="none" dirty="0">
+                          <a:endParaRPr lang="en-US" sz="3200" b="0" i="0" u="none" strike="noStrike" cap="none">
                             <a:solidFill>
                               <a:srgbClr val="000000"/>
                             </a:solidFill>
@@ -4977,7 +5017,7 @@
                             <a:buFont typeface="Arial"/>
                           </a:pPr>
                           <a:r>
-                            <a:rPr lang="en-US" sz="3200" b="0" i="0" u="none" strike="noStrike" cap="none" dirty="0">
+                            <a:rPr lang="en-US" sz="3200" b="0" i="0" u="none" strike="noStrike" cap="none">
                               <a:solidFill>
                                 <a:srgbClr val="000000"/>
                               </a:solidFill>
@@ -4988,7 +5028,7 @@
                             </a:rPr>
                             <a:t>Observation</a:t>
                           </a:r>
-                          <a:endParaRPr lang="en-US" sz="3200" b="0" i="0" u="none" strike="noStrike" cap="none" dirty="0">
+                          <a:endParaRPr lang="en-US" sz="3200" b="0" i="0" u="none" strike="noStrike" cap="none">
                             <a:solidFill>
                               <a:srgbClr val="000000"/>
                             </a:solidFill>
@@ -6924,930 +6964,6 @@
           <a:chExt cx="0" cy="0"/>
         </a:xfrm>
       </p:grpSpPr>
-      <mc:AlternateContent xmlns:mc="http://schemas.openxmlformats.org/markup-compatibility/2006">
-        <mc:Choice xmlns:a14="http://schemas.microsoft.com/office/drawing/2010/main" Requires="a14">
-          <p:sp>
-            <p:nvSpPr>
-              <p:cNvPr id="2" name="Text Placeholder 1">
-                <a:extLst>
-                  <a:ext uri="{FF2B5EF4-FFF2-40B4-BE49-F238E27FC236}">
-                    <a16:creationId xmlns:a16="http://schemas.microsoft.com/office/drawing/2014/main" id="{22F7C748-A7B8-994F-51B5-6A10DF850565}"/>
-                  </a:ext>
-                </a:extLst>
-              </p:cNvPr>
-              <p:cNvSpPr>
-                <a:spLocks noGrp="1"/>
-              </p:cNvSpPr>
-              <p:nvPr>
-                <p:ph type="body" idx="1"/>
-              </p:nvPr>
-            </p:nvSpPr>
-            <p:spPr>
-              <a:xfrm>
-                <a:off x="0" y="5619555"/>
-                <a:ext cx="14630399" cy="24821957"/>
-              </a:xfrm>
-            </p:spPr>
-            <p:txBody>
-              <a:bodyPr/>
-              <a:lstStyle/>
-              <a:p>
-                <a:pPr marL="0" marR="0" lvl="0" indent="0" algn="l" rtl="0">
-                  <a:lnSpc>
-                    <a:spcPct val="95833"/>
-                  </a:lnSpc>
-                  <a:spcBef>
-                    <a:spcPts val="0"/>
-                  </a:spcBef>
-                  <a:spcAft>
-                    <a:spcPts val="0"/>
-                  </a:spcAft>
-                  <a:buNone/>
-                </a:pPr>
-                <a:r>
-                  <a:rPr lang="en-US" sz="4800" b="1" i="0" u="none" strike="noStrike" cap="none" dirty="0">
-                    <a:solidFill>
-                      <a:srgbClr val="005BBB"/>
-                    </a:solidFill>
-                    <a:latin typeface="Arial"/>
-                    <a:ea typeface="Arial"/>
-                    <a:cs typeface="Arial"/>
-                    <a:sym typeface="Arial"/>
-                  </a:rPr>
-                  <a:t>Introduction</a:t>
-                </a:r>
-                <a:endParaRPr lang="en-US" dirty="0"/>
-              </a:p>
-              <a:p>
-                <a:pPr marL="914400" lvl="1" indent="-457200">
-                  <a:lnSpc>
-                    <a:spcPct val="164285"/>
-                  </a:lnSpc>
-                  <a:spcBef>
-                    <a:spcPts val="1200"/>
-                  </a:spcBef>
-                  <a:buClr>
-                    <a:schemeClr val="dk2"/>
-                  </a:buClr>
-                  <a:buSzPts val="3500"/>
-                  <a:buFont typeface="Arial"/>
-                  <a:buChar char="•"/>
-                </a:pPr>
-                <a:r>
-                  <a:rPr lang="en-US" sz="3200" dirty="0">
-                    <a:solidFill>
-                      <a:schemeClr val="accent4">
-                        <a:lumMod val="50000"/>
-                      </a:schemeClr>
-                    </a:solidFill>
-                  </a:rPr>
-                  <a:t>PFAS are persistent environmental contaminants with adverse health effects.</a:t>
-                </a:r>
-              </a:p>
-              <a:p>
-                <a:pPr marL="914400" lvl="1" indent="-457200">
-                  <a:spcBef>
-                    <a:spcPts val="1200"/>
-                  </a:spcBef>
-                  <a:buSzPts val="3500"/>
-                  <a:buFont typeface="Arial"/>
-                  <a:buChar char="•"/>
-                </a:pPr>
-                <a:r>
-                  <a:rPr lang="en-US" sz="3200" dirty="0">
-                    <a:solidFill>
-                      <a:schemeClr val="accent4">
-                        <a:lumMod val="50000"/>
-                      </a:schemeClr>
-                    </a:solidFill>
-                  </a:rPr>
-                  <a:t>Analysis of monitoring data provides key insights into contamination patterns and cumulative health risks, supporting research and evidence-based policy decisions.</a:t>
-                </a:r>
-              </a:p>
-              <a:p>
-                <a:pPr marL="914400" lvl="1" indent="-457200">
-                  <a:spcBef>
-                    <a:spcPts val="1200"/>
-                  </a:spcBef>
-                  <a:buSzPts val="3500"/>
-                  <a:buFont typeface="Arial"/>
-                  <a:buChar char="•"/>
-                </a:pPr>
-                <a:r>
-                  <a:rPr lang="en-US" sz="3200" dirty="0">
-                    <a:solidFill>
-                      <a:schemeClr val="accent4">
-                        <a:lumMod val="50000"/>
-                      </a:schemeClr>
-                    </a:solidFill>
-                  </a:rPr>
-                  <a:t>As part of this work, an interactive dashboard was also developed to visualize and summarize the findings across Michigan.</a:t>
-                </a:r>
-                <a:endParaRPr lang="en-US" sz="4800" b="1" dirty="0">
-                  <a:solidFill>
-                    <a:srgbClr val="005BBB"/>
-                  </a:solidFill>
-                </a:endParaRPr>
-              </a:p>
-              <a:p>
-                <a:pPr marL="0" marR="0" lvl="0" indent="0" algn="l" rtl="0">
-                  <a:lnSpc>
-                    <a:spcPct val="95833"/>
-                  </a:lnSpc>
-                  <a:spcBef>
-                    <a:spcPts val="0"/>
-                  </a:spcBef>
-                  <a:spcAft>
-                    <a:spcPts val="0"/>
-                  </a:spcAft>
-                  <a:buNone/>
-                </a:pPr>
-                <a:r>
-                  <a:rPr lang="en-US" sz="4800" b="1" dirty="0">
-                    <a:solidFill>
-                      <a:srgbClr val="005BBB"/>
-                    </a:solidFill>
-                  </a:rPr>
-                  <a:t>Data Source</a:t>
-                </a:r>
-              </a:p>
-              <a:p>
-                <a:pPr marL="457200" marR="0" lvl="1" indent="0" algn="l" defTabSz="914400" rtl="0" eaLnBrk="1" fontAlgn="auto" latinLnBrk="0" hangingPunct="1">
-                  <a:lnSpc>
-                    <a:spcPct val="164285"/>
-                  </a:lnSpc>
-                  <a:spcBef>
-                    <a:spcPts val="1200"/>
-                  </a:spcBef>
-                  <a:spcAft>
-                    <a:spcPts val="0"/>
-                  </a:spcAft>
-                  <a:buClr>
-                    <a:srgbClr val="005BBB"/>
-                  </a:buClr>
-                  <a:buSzPts val="3500"/>
-                  <a:buFont typeface="Arial"/>
-                  <a:buNone/>
-                  <a:tabLst/>
-                  <a:defRPr/>
-                </a:pPr>
-                <a:r>
-                  <a:rPr lang="en-US" sz="3200" dirty="0">
-                    <a:solidFill>
-                      <a:srgbClr val="666666">
-                        <a:lumMod val="50000"/>
-                      </a:srgbClr>
-                    </a:solidFill>
-                  </a:rPr>
-                  <a:t>T</a:t>
-                </a:r>
-                <a:r>
-                  <a:rPr kumimoji="0" lang="en-US" sz="3200" b="0" i="0" u="none" strike="noStrike" kern="0" cap="none" spc="0" normalizeH="0" baseline="0" noProof="0" dirty="0">
-                    <a:ln>
-                      <a:noFill/>
-                    </a:ln>
-                    <a:solidFill>
-                      <a:srgbClr val="666666">
-                        <a:lumMod val="50000"/>
-                      </a:srgbClr>
-                    </a:solidFill>
-                    <a:effectLst/>
-                    <a:uLnTx/>
-                    <a:uFillTx/>
-                    <a:latin typeface="Arial"/>
-                    <a:cs typeface="Arial"/>
-                    <a:sym typeface="Arial"/>
-                  </a:rPr>
-                  <a:t>he Michigan Department of Environment, Great Lakes, and Energy (EGLE) and the Michigan PFAS Action Response Team (MPART). Datasets used;</a:t>
-                </a:r>
-              </a:p>
-              <a:p>
-                <a:pPr marL="971550" marR="0" lvl="1" indent="-514350" algn="l" defTabSz="914400" rtl="0" eaLnBrk="1" fontAlgn="auto" latinLnBrk="0" hangingPunct="1">
-                  <a:lnSpc>
-                    <a:spcPct val="164285"/>
-                  </a:lnSpc>
-                  <a:spcBef>
-                    <a:spcPts val="1200"/>
-                  </a:spcBef>
-                  <a:spcAft>
-                    <a:spcPts val="0"/>
-                  </a:spcAft>
-                  <a:buClr>
-                    <a:srgbClr val="005BBB"/>
-                  </a:buClr>
-                  <a:buSzPts val="3500"/>
-                  <a:buFont typeface="Arial" panose="020B0604020202020204" pitchFamily="34" charset="0"/>
-                  <a:buChar char="•"/>
-                  <a:tabLst/>
-                  <a:defRPr/>
-                </a:pPr>
-                <a:r>
-                  <a:rPr kumimoji="0" lang="en-US" sz="3200" b="0" i="1" u="none" strike="noStrike" kern="0" cap="none" spc="0" normalizeH="0" baseline="0" noProof="0" dirty="0">
-                    <a:ln>
-                      <a:noFill/>
-                    </a:ln>
-                    <a:solidFill>
-                      <a:srgbClr val="666666">
-                        <a:lumMod val="50000"/>
-                      </a:srgbClr>
-                    </a:solidFill>
-                    <a:effectLst/>
-                    <a:uLnTx/>
-                    <a:uFillTx/>
-                    <a:latin typeface="Arial"/>
-                    <a:cs typeface="Arial"/>
-                    <a:sym typeface="Arial"/>
-                  </a:rPr>
-                  <a:t>Surface Water Sampling Data</a:t>
-                </a:r>
-              </a:p>
-              <a:p>
-                <a:pPr marL="971550" marR="0" lvl="1" indent="-514350" algn="l" defTabSz="914400" rtl="0" eaLnBrk="1" fontAlgn="auto" latinLnBrk="0" hangingPunct="1">
-                  <a:lnSpc>
-                    <a:spcPct val="164285"/>
-                  </a:lnSpc>
-                  <a:spcBef>
-                    <a:spcPts val="1200"/>
-                  </a:spcBef>
-                  <a:spcAft>
-                    <a:spcPts val="0"/>
-                  </a:spcAft>
-                  <a:buClr>
-                    <a:srgbClr val="005BBB"/>
-                  </a:buClr>
-                  <a:buSzPts val="3500"/>
-                  <a:buFont typeface="Arial" panose="020B0604020202020204" pitchFamily="34" charset="0"/>
-                  <a:buChar char="•"/>
-                  <a:tabLst/>
-                  <a:defRPr/>
-                </a:pPr>
-                <a:r>
-                  <a:rPr kumimoji="0" lang="en-US" sz="3200" b="0" i="1" u="none" strike="noStrike" kern="0" cap="none" spc="0" normalizeH="0" baseline="0" noProof="0" dirty="0">
-                    <a:ln>
-                      <a:noFill/>
-                    </a:ln>
-                    <a:solidFill>
-                      <a:srgbClr val="666666">
-                        <a:lumMod val="50000"/>
-                      </a:srgbClr>
-                    </a:solidFill>
-                    <a:effectLst/>
-                    <a:uLnTx/>
-                    <a:uFillTx/>
-                    <a:latin typeface="Arial"/>
-                    <a:cs typeface="Arial"/>
-                    <a:sym typeface="Arial"/>
-                  </a:rPr>
-                  <a:t>Public Water Supply Sampling Data</a:t>
-                </a:r>
-              </a:p>
-              <a:p>
-                <a:pPr marL="971550" marR="0" lvl="1" indent="-514350" algn="l" defTabSz="914400" rtl="0" eaLnBrk="1" fontAlgn="auto" latinLnBrk="0" hangingPunct="1">
-                  <a:lnSpc>
-                    <a:spcPct val="164285"/>
-                  </a:lnSpc>
-                  <a:spcBef>
-                    <a:spcPts val="1200"/>
-                  </a:spcBef>
-                  <a:spcAft>
-                    <a:spcPts val="0"/>
-                  </a:spcAft>
-                  <a:buClr>
-                    <a:srgbClr val="005BBB"/>
-                  </a:buClr>
-                  <a:buSzPts val="3500"/>
-                  <a:buFont typeface="Arial" panose="020B0604020202020204" pitchFamily="34" charset="0"/>
-                  <a:buChar char="•"/>
-                  <a:tabLst/>
-                  <a:defRPr/>
-                </a:pPr>
-                <a:r>
-                  <a:rPr kumimoji="0" lang="en-US" sz="3200" b="0" i="1" u="none" strike="noStrike" kern="0" cap="none" spc="0" normalizeH="0" baseline="0" noProof="0" dirty="0">
-                    <a:ln>
-                      <a:noFill/>
-                    </a:ln>
-                    <a:solidFill>
-                      <a:srgbClr val="666666">
-                        <a:lumMod val="50000"/>
-                      </a:srgbClr>
-                    </a:solidFill>
-                    <a:effectLst/>
-                    <a:uLnTx/>
-                    <a:uFillTx/>
-                    <a:latin typeface="Arial"/>
-                    <a:cs typeface="Arial"/>
-                    <a:sym typeface="Arial"/>
-                  </a:rPr>
-                  <a:t>Michigan PFAS Sites Data</a:t>
-                </a:r>
-              </a:p>
-              <a:p>
-                <a:pPr marL="971550" marR="0" lvl="1" indent="-514350" algn="l" defTabSz="914400" rtl="0" eaLnBrk="1" fontAlgn="auto" latinLnBrk="0" hangingPunct="1">
-                  <a:lnSpc>
-                    <a:spcPct val="164285"/>
-                  </a:lnSpc>
-                  <a:spcBef>
-                    <a:spcPts val="1200"/>
-                  </a:spcBef>
-                  <a:spcAft>
-                    <a:spcPts val="0"/>
-                  </a:spcAft>
-                  <a:buClr>
-                    <a:srgbClr val="005BBB"/>
-                  </a:buClr>
-                  <a:buSzPts val="3500"/>
-                  <a:buFont typeface="Arial" panose="020B0604020202020204" pitchFamily="34" charset="0"/>
-                  <a:buChar char="•"/>
-                  <a:tabLst/>
-                  <a:defRPr/>
-                </a:pPr>
-                <a:r>
-                  <a:rPr kumimoji="0" lang="en-US" sz="3200" b="0" i="1" u="none" strike="noStrike" kern="0" cap="none" spc="0" normalizeH="0" baseline="0" noProof="0" dirty="0">
-                    <a:ln>
-                      <a:noFill/>
-                    </a:ln>
-                    <a:solidFill>
-                      <a:srgbClr val="666666">
-                        <a:lumMod val="50000"/>
-                      </a:srgbClr>
-                    </a:solidFill>
-                    <a:effectLst/>
-                    <a:uLnTx/>
-                    <a:uFillTx/>
-                    <a:latin typeface="Arial"/>
-                    <a:cs typeface="Arial"/>
-                    <a:sym typeface="Arial"/>
-                  </a:rPr>
-                  <a:t>PFAS Laboratory Analyte List (PDF)</a:t>
-                </a:r>
-              </a:p>
-              <a:p>
-                <a:pPr marL="0" lvl="0" indent="0">
-                  <a:lnSpc>
-                    <a:spcPct val="95833"/>
-                  </a:lnSpc>
-                </a:pPr>
-                <a:endParaRPr lang="en-US" sz="4800" b="1" dirty="0">
-                  <a:solidFill>
-                    <a:srgbClr val="005BBB"/>
-                  </a:solidFill>
-                </a:endParaRPr>
-              </a:p>
-              <a:p>
-                <a:pPr marL="0" lvl="0" indent="0">
-                  <a:lnSpc>
-                    <a:spcPct val="95833"/>
-                  </a:lnSpc>
-                </a:pPr>
-                <a:r>
-                  <a:rPr lang="en-US" sz="4800" b="1" dirty="0">
-                    <a:solidFill>
-                      <a:srgbClr val="005BBB"/>
-                    </a:solidFill>
-                  </a:rPr>
-                  <a:t>Hazard Index EPA Definition</a:t>
-                </a:r>
-              </a:p>
-              <a:p>
-                <a:pPr marL="0" lvl="0" indent="0">
-                  <a:lnSpc>
-                    <a:spcPct val="95833"/>
-                  </a:lnSpc>
-                </a:pPr>
-                <a14:m>
-                  <m:oMathPara xmlns:m="http://schemas.openxmlformats.org/officeDocument/2006/math">
-                    <m:oMathParaPr>
-                      <m:jc m:val="centerGroup"/>
-                    </m:oMathParaPr>
-                    <m:oMath xmlns:m="http://schemas.openxmlformats.org/officeDocument/2006/math">
-                      <a:fld id="{825F15A7-03F4-43D7-82C5-3E23DA2F108C}" type="mathplaceholder">
-                        <a:rPr lang="en-US" sz="4800" b="1" i="1" smtClean="0">
-                          <a:solidFill>
-                            <a:srgbClr val="005BBB"/>
-                          </a:solidFill>
-                          <a:latin typeface="Cambria Math" panose="02040503050406030204" pitchFamily="18" charset="0"/>
-                        </a:rPr>
-                        <a:t>Type equation here.</a:t>
-                      </a:fld>
-                    </m:oMath>
-                  </m:oMathPara>
-                </a14:m>
-                <a:endParaRPr lang="en-US" sz="4800" b="1" dirty="0">
-                  <a:solidFill>
-                    <a:srgbClr val="005BBB"/>
-                  </a:solidFill>
-                </a:endParaRPr>
-              </a:p>
-              <a:p>
-                <a:pPr marL="0" lvl="0" indent="0">
-                  <a:lnSpc>
-                    <a:spcPct val="95833"/>
-                  </a:lnSpc>
-                </a:pPr>
-                <a:endParaRPr lang="en-US" sz="3200" dirty="0">
-                  <a:solidFill>
-                    <a:srgbClr val="666666">
-                      <a:lumMod val="50000"/>
-                    </a:srgbClr>
-                  </a:solidFill>
-                </a:endParaRPr>
-              </a:p>
-              <a:p>
-                <a14:m>
-                  <m:oMath xmlns:m="http://schemas.openxmlformats.org/officeDocument/2006/math">
-                    <m:r>
-                      <a:rPr lang="en-US" b="1" i="1" smtClean="0">
-                        <a:solidFill>
-                          <a:schemeClr val="accent1">
-                            <a:lumMod val="50000"/>
-                          </a:schemeClr>
-                        </a:solidFill>
-                        <a:latin typeface="Cambria Math" panose="02040503050406030204" pitchFamily="18" charset="0"/>
-                      </a:rPr>
-                      <m:t>𝑯𝑰</m:t>
-                    </m:r>
-                    <m:r>
-                      <a:rPr lang="en-US" b="1" i="1" smtClean="0">
-                        <a:solidFill>
-                          <a:schemeClr val="accent1">
-                            <a:lumMod val="50000"/>
-                          </a:schemeClr>
-                        </a:solidFill>
-                        <a:latin typeface="Cambria Math" panose="02040503050406030204" pitchFamily="18" charset="0"/>
-                      </a:rPr>
-                      <m:t> </m:t>
-                    </m:r>
-                    <m:d>
-                      <m:dPr>
-                        <m:ctrlPr>
-                          <a:rPr lang="en-US" b="1" i="1" smtClean="0">
-                            <a:solidFill>
-                              <a:schemeClr val="accent1">
-                                <a:lumMod val="50000"/>
-                              </a:schemeClr>
-                            </a:solidFill>
-                            <a:latin typeface="Cambria Math" panose="02040503050406030204" pitchFamily="18" charset="0"/>
-                          </a:rPr>
-                        </m:ctrlPr>
-                      </m:dPr>
-                      <m:e>
-                        <m:r>
-                          <a:rPr lang="en-US" b="1" i="1" smtClean="0">
-                            <a:solidFill>
-                              <a:schemeClr val="accent1">
-                                <a:lumMod val="50000"/>
-                              </a:schemeClr>
-                            </a:solidFill>
-                            <a:latin typeface="Cambria Math" panose="02040503050406030204" pitchFamily="18" charset="0"/>
-                          </a:rPr>
-                          <m:t>𝒖𝒏𝒊𝒕𝒍𝒆𝒔𝒔</m:t>
-                        </m:r>
-                      </m:e>
-                    </m:d>
-                    <m:r>
-                      <a:rPr lang="en-US" b="1" i="1" smtClean="0">
-                        <a:solidFill>
-                          <a:schemeClr val="accent1">
-                            <a:lumMod val="50000"/>
-                          </a:schemeClr>
-                        </a:solidFill>
-                        <a:latin typeface="Cambria Math" panose="02040503050406030204" pitchFamily="18" charset="0"/>
-                      </a:rPr>
-                      <m:t>=(</m:t>
-                    </m:r>
-                    <m:r>
-                      <a:rPr lang="en-US" b="1" i="1" smtClean="0">
-                        <a:solidFill>
-                          <a:schemeClr val="accent1">
-                            <a:lumMod val="50000"/>
-                          </a:schemeClr>
-                        </a:solidFill>
-                        <a:latin typeface="Cambria Math" panose="02040503050406030204" pitchFamily="18" charset="0"/>
-                      </a:rPr>
-                      <m:t>𝑯𝑭𝑷𝑶</m:t>
-                    </m:r>
-                    <m:r>
-                      <a:rPr lang="en-US" b="1" i="1" smtClean="0">
-                        <a:solidFill>
-                          <a:schemeClr val="accent1">
-                            <a:lumMod val="50000"/>
-                          </a:schemeClr>
-                        </a:solidFill>
-                        <a:latin typeface="Cambria Math" panose="02040503050406030204" pitchFamily="18" charset="0"/>
-                      </a:rPr>
-                      <m:t>−</m:t>
-                    </m:r>
-                    <m:r>
-                      <a:rPr lang="en-US" b="1" i="1" smtClean="0">
-                        <a:solidFill>
-                          <a:schemeClr val="accent1">
-                            <a:lumMod val="50000"/>
-                          </a:schemeClr>
-                        </a:solidFill>
-                        <a:latin typeface="Cambria Math" panose="02040503050406030204" pitchFamily="18" charset="0"/>
-                      </a:rPr>
-                      <m:t>𝑫𝑨</m:t>
-                    </m:r>
-                    <m:d>
-                      <m:dPr>
-                        <m:ctrlPr>
-                          <a:rPr lang="en-US" b="1" i="1" smtClean="0">
-                            <a:solidFill>
-                              <a:schemeClr val="accent1">
-                                <a:lumMod val="50000"/>
-                              </a:schemeClr>
-                            </a:solidFill>
-                            <a:latin typeface="Cambria Math" panose="02040503050406030204" pitchFamily="18" charset="0"/>
-                          </a:rPr>
-                        </m:ctrlPr>
-                      </m:dPr>
-                      <m:e>
-                        <m:r>
-                          <a:rPr lang="en-US" b="1" i="1" smtClean="0">
-                            <a:solidFill>
-                              <a:schemeClr val="accent1">
-                                <a:lumMod val="50000"/>
-                              </a:schemeClr>
-                            </a:solidFill>
-                            <a:latin typeface="Cambria Math" panose="02040503050406030204" pitchFamily="18" charset="0"/>
-                          </a:rPr>
-                          <m:t>𝒑𝒑𝒕</m:t>
-                        </m:r>
-                      </m:e>
-                    </m:d>
-                    <m:r>
-                      <a:rPr lang="en-US" b="1" i="1" smtClean="0">
-                        <a:solidFill>
-                          <a:schemeClr val="accent1">
-                            <a:lumMod val="50000"/>
-                          </a:schemeClr>
-                        </a:solidFill>
-                        <a:latin typeface="Cambria Math" panose="02040503050406030204" pitchFamily="18" charset="0"/>
-                      </a:rPr>
-                      <m:t>/</m:t>
-                    </m:r>
-                    <m:r>
-                      <a:rPr lang="en-US" b="1" i="1" smtClean="0">
-                        <a:solidFill>
-                          <a:schemeClr val="accent1">
-                            <a:lumMod val="50000"/>
-                          </a:schemeClr>
-                        </a:solidFill>
-                        <a:latin typeface="Cambria Math" panose="02040503050406030204" pitchFamily="18" charset="0"/>
-                      </a:rPr>
-                      <m:t>𝟏𝟎</m:t>
-                    </m:r>
-                  </m:oMath>
-                </a14:m>
-                <a:r>
-                  <a:rPr lang="en-US" b="1" dirty="0">
-                    <a:solidFill>
-                      <a:schemeClr val="accent1">
-                        <a:lumMod val="50000"/>
-                      </a:schemeClr>
-                    </a:solidFill>
-                  </a:rPr>
-                  <a:t> (ppt) ) + </a:t>
-                </a:r>
-                <a14:m>
-                  <m:oMath xmlns:m="http://schemas.openxmlformats.org/officeDocument/2006/math">
-                    <m:r>
-                      <a:rPr lang="en-US" b="1" i="1">
-                        <a:solidFill>
-                          <a:schemeClr val="accent1">
-                            <a:lumMod val="50000"/>
-                          </a:schemeClr>
-                        </a:solidFill>
-                        <a:latin typeface="Cambria Math" panose="02040503050406030204" pitchFamily="18" charset="0"/>
-                      </a:rPr>
-                      <m:t>(</m:t>
-                    </m:r>
-                    <m:r>
-                      <a:rPr lang="en-US" b="1" i="1" smtClean="0">
-                        <a:solidFill>
-                          <a:schemeClr val="accent1">
-                            <a:lumMod val="50000"/>
-                          </a:schemeClr>
-                        </a:solidFill>
-                        <a:latin typeface="Cambria Math" panose="02040503050406030204" pitchFamily="18" charset="0"/>
-                      </a:rPr>
-                      <m:t>𝑷𝑭𝑩𝑺</m:t>
-                    </m:r>
-                    <m:d>
-                      <m:dPr>
-                        <m:ctrlPr>
-                          <a:rPr lang="en-US" b="1" i="1">
-                            <a:solidFill>
-                              <a:schemeClr val="accent1">
-                                <a:lumMod val="50000"/>
-                              </a:schemeClr>
-                            </a:solidFill>
-                            <a:latin typeface="Cambria Math" panose="02040503050406030204" pitchFamily="18" charset="0"/>
-                          </a:rPr>
-                        </m:ctrlPr>
-                      </m:dPr>
-                      <m:e>
-                        <m:r>
-                          <a:rPr lang="en-US" b="1" i="1">
-                            <a:solidFill>
-                              <a:schemeClr val="accent1">
-                                <a:lumMod val="50000"/>
-                              </a:schemeClr>
-                            </a:solidFill>
-                            <a:latin typeface="Cambria Math" panose="02040503050406030204" pitchFamily="18" charset="0"/>
-                          </a:rPr>
-                          <m:t>𝒑𝒑𝒕</m:t>
-                        </m:r>
-                      </m:e>
-                    </m:d>
-                    <m:r>
-                      <a:rPr lang="en-US" b="1" i="1">
-                        <a:solidFill>
-                          <a:schemeClr val="accent1">
-                            <a:lumMod val="50000"/>
-                          </a:schemeClr>
-                        </a:solidFill>
-                        <a:latin typeface="Cambria Math" panose="02040503050406030204" pitchFamily="18" charset="0"/>
-                      </a:rPr>
-                      <m:t>/</m:t>
-                    </m:r>
-                    <m:r>
-                      <a:rPr lang="en-US" b="1" i="1" smtClean="0">
-                        <a:solidFill>
-                          <a:schemeClr val="accent1">
-                            <a:lumMod val="50000"/>
-                          </a:schemeClr>
-                        </a:solidFill>
-                        <a:latin typeface="Cambria Math" panose="02040503050406030204" pitchFamily="18" charset="0"/>
-                      </a:rPr>
-                      <m:t>𝟐𝟎𝟎</m:t>
-                    </m:r>
-                    <m:r>
-                      <a:rPr lang="en-US" b="1" i="1">
-                        <a:solidFill>
-                          <a:schemeClr val="accent1">
-                            <a:lumMod val="50000"/>
-                          </a:schemeClr>
-                        </a:solidFill>
-                        <a:latin typeface="Cambria Math" panose="02040503050406030204" pitchFamily="18" charset="0"/>
-                      </a:rPr>
-                      <m:t>𝟎</m:t>
-                    </m:r>
-                  </m:oMath>
-                </a14:m>
-                <a:r>
-                  <a:rPr lang="en-US" b="1" dirty="0">
-                    <a:solidFill>
-                      <a:schemeClr val="accent1">
-                        <a:lumMod val="50000"/>
-                      </a:schemeClr>
-                    </a:solidFill>
-                  </a:rPr>
-                  <a:t> (ppt) ) + </a:t>
-                </a:r>
-                <a14:m>
-                  <m:oMath xmlns:m="http://schemas.openxmlformats.org/officeDocument/2006/math">
-                    <m:r>
-                      <a:rPr lang="en-US" b="1" i="1">
-                        <a:solidFill>
-                          <a:schemeClr val="accent1">
-                            <a:lumMod val="50000"/>
-                          </a:schemeClr>
-                        </a:solidFill>
-                        <a:latin typeface="Cambria Math" panose="02040503050406030204" pitchFamily="18" charset="0"/>
-                      </a:rPr>
-                      <m:t>(</m:t>
-                    </m:r>
-                    <m:r>
-                      <a:rPr lang="en-US" b="1" i="1" smtClean="0">
-                        <a:solidFill>
-                          <a:schemeClr val="accent1">
-                            <a:lumMod val="50000"/>
-                          </a:schemeClr>
-                        </a:solidFill>
-                        <a:latin typeface="Cambria Math" panose="02040503050406030204" pitchFamily="18" charset="0"/>
-                      </a:rPr>
-                      <m:t>𝑷𝑭𝑵𝑨</m:t>
-                    </m:r>
-                    <m:d>
-                      <m:dPr>
-                        <m:ctrlPr>
-                          <a:rPr lang="en-US" b="1" i="1">
-                            <a:solidFill>
-                              <a:schemeClr val="accent1">
-                                <a:lumMod val="50000"/>
-                              </a:schemeClr>
-                            </a:solidFill>
-                            <a:latin typeface="Cambria Math" panose="02040503050406030204" pitchFamily="18" charset="0"/>
-                          </a:rPr>
-                        </m:ctrlPr>
-                      </m:dPr>
-                      <m:e>
-                        <m:r>
-                          <a:rPr lang="en-US" b="1" i="1">
-                            <a:solidFill>
-                              <a:schemeClr val="accent1">
-                                <a:lumMod val="50000"/>
-                              </a:schemeClr>
-                            </a:solidFill>
-                            <a:latin typeface="Cambria Math" panose="02040503050406030204" pitchFamily="18" charset="0"/>
-                          </a:rPr>
-                          <m:t>𝒑𝒑𝒕</m:t>
-                        </m:r>
-                      </m:e>
-                    </m:d>
-                    <m:r>
-                      <a:rPr lang="en-US" b="1" i="1">
-                        <a:solidFill>
-                          <a:schemeClr val="accent1">
-                            <a:lumMod val="50000"/>
-                          </a:schemeClr>
-                        </a:solidFill>
-                        <a:latin typeface="Cambria Math" panose="02040503050406030204" pitchFamily="18" charset="0"/>
-                      </a:rPr>
-                      <m:t>/</m:t>
-                    </m:r>
-                    <m:r>
-                      <a:rPr lang="en-US" b="1" i="1">
-                        <a:solidFill>
-                          <a:schemeClr val="accent1">
-                            <a:lumMod val="50000"/>
-                          </a:schemeClr>
-                        </a:solidFill>
-                        <a:latin typeface="Cambria Math" panose="02040503050406030204" pitchFamily="18" charset="0"/>
-                      </a:rPr>
-                      <m:t>𝟏𝟎</m:t>
-                    </m:r>
-                  </m:oMath>
-                </a14:m>
-                <a:r>
-                  <a:rPr lang="en-US" b="1" dirty="0">
-                    <a:solidFill>
-                      <a:schemeClr val="accent1">
-                        <a:lumMod val="50000"/>
-                      </a:schemeClr>
-                    </a:solidFill>
-                  </a:rPr>
-                  <a:t> (ppt) ) + </a:t>
-                </a:r>
-                <a14:m>
-                  <m:oMath xmlns:m="http://schemas.openxmlformats.org/officeDocument/2006/math">
-                    <m:r>
-                      <a:rPr lang="en-US" b="1" i="1">
-                        <a:solidFill>
-                          <a:schemeClr val="accent1">
-                            <a:lumMod val="50000"/>
-                          </a:schemeClr>
-                        </a:solidFill>
-                        <a:latin typeface="Cambria Math" panose="02040503050406030204" pitchFamily="18" charset="0"/>
-                      </a:rPr>
-                      <m:t>(</m:t>
-                    </m:r>
-                    <m:r>
-                      <a:rPr lang="en-US" b="1" i="1" smtClean="0">
-                        <a:solidFill>
-                          <a:schemeClr val="accent1">
-                            <a:lumMod val="50000"/>
-                          </a:schemeClr>
-                        </a:solidFill>
-                        <a:latin typeface="Cambria Math" panose="02040503050406030204" pitchFamily="18" charset="0"/>
-                      </a:rPr>
-                      <m:t>𝑷𝑭𝑯𝒙𝑺</m:t>
-                    </m:r>
-                    <m:r>
-                      <a:rPr lang="en-US" b="1" i="1">
-                        <a:solidFill>
-                          <a:schemeClr val="accent1">
-                            <a:lumMod val="50000"/>
-                          </a:schemeClr>
-                        </a:solidFill>
-                        <a:latin typeface="Cambria Math" panose="02040503050406030204" pitchFamily="18" charset="0"/>
-                      </a:rPr>
-                      <m:t>/</m:t>
-                    </m:r>
-                    <m:r>
-                      <a:rPr lang="en-US" b="1" i="1">
-                        <a:solidFill>
-                          <a:schemeClr val="accent1">
-                            <a:lumMod val="50000"/>
-                          </a:schemeClr>
-                        </a:solidFill>
-                        <a:latin typeface="Cambria Math" panose="02040503050406030204" pitchFamily="18" charset="0"/>
-                      </a:rPr>
-                      <m:t>𝟏𝟎</m:t>
-                    </m:r>
-                  </m:oMath>
-                </a14:m>
-                <a:r>
-                  <a:rPr lang="en-US" b="1" dirty="0">
-                    <a:solidFill>
-                      <a:schemeClr val="accent1">
-                        <a:lumMod val="50000"/>
-                      </a:schemeClr>
-                    </a:solidFill>
-                  </a:rPr>
-                  <a:t> (ppt ) ) </a:t>
-                </a:r>
-              </a:p>
-              <a:p>
-                <a:endParaRPr lang="en-US" sz="3200" b="1" dirty="0"/>
-              </a:p>
-              <a:p>
-                <a:pPr marL="0" indent="0">
-                  <a:lnSpc>
-                    <a:spcPct val="95833"/>
-                  </a:lnSpc>
-                </a:pPr>
-                <a:r>
-                  <a:rPr lang="en-US" sz="4800" b="1" dirty="0">
-                    <a:solidFill>
-                      <a:srgbClr val="005BBB"/>
-                    </a:solidFill>
-                  </a:rPr>
-                  <a:t>Analytical Framework</a:t>
-                </a:r>
-              </a:p>
-              <a:p>
-                <a:pPr lvl="1">
-                  <a:spcBef>
-                    <a:spcPts val="1200"/>
-                  </a:spcBef>
-                  <a:buSzPts val="3500"/>
-                </a:pPr>
-                <a:r>
-                  <a:rPr lang="en-US" sz="3200" dirty="0"/>
-                  <a:t>This analysis integrates PFAS datasets into a unified framework for geospatial harmonization, data transformation, and construction of a weighted Hazard Index from key analytes, enabling hierarchical aggregation and decomposition of risk across sites, systems, and counties. It emphasizes multi-scale analytical exploration to identify dominant contributors, quantify cumulative exposure, and reveal spatial patterns of PFAS risk in Michigan</a:t>
-                </a:r>
-                <a:endParaRPr lang="en-US" sz="3200" dirty="0">
-                  <a:solidFill>
-                    <a:srgbClr val="666666">
-                      <a:lumMod val="50000"/>
-                    </a:srgbClr>
-                  </a:solidFill>
-                </a:endParaRPr>
-              </a:p>
-              <a:p>
-                <a:endParaRPr lang="en-US" dirty="0"/>
-              </a:p>
-              <a:p>
-                <a:endParaRPr lang="en-US" dirty="0"/>
-              </a:p>
-              <a:p>
-                <a:endParaRPr lang="en-US" dirty="0"/>
-              </a:p>
-              <a:p>
-                <a:endParaRPr lang="en-US" dirty="0"/>
-              </a:p>
-              <a:p>
-                <a:endParaRPr lang="en-US" dirty="0"/>
-              </a:p>
-            </p:txBody>
-          </p:sp>
-        </mc:Choice>
-        <mc:Fallback>
-          <p:sp>
-            <p:nvSpPr>
-              <p:cNvPr id="2" name="Text Placeholder 1">
-                <a:extLst>
-                  <a:ext uri="{FF2B5EF4-FFF2-40B4-BE49-F238E27FC236}">
-                    <a16:creationId xmlns:a16="http://schemas.microsoft.com/office/drawing/2014/main" id="{22F7C748-A7B8-994F-51B5-6A10DF850565}"/>
-                  </a:ext>
-                </a:extLst>
-              </p:cNvPr>
-              <p:cNvSpPr>
-                <a:spLocks noGrp="1" noRot="1" noChangeAspect="1" noMove="1" noResize="1" noEditPoints="1" noAdjustHandles="1" noChangeArrowheads="1" noChangeShapeType="1" noTextEdit="1"/>
-              </p:cNvSpPr>
-              <p:nvPr>
-                <p:ph type="body" idx="1"/>
-              </p:nvPr>
-            </p:nvSpPr>
-            <p:spPr>
-              <a:xfrm>
-                <a:off x="0" y="5619555"/>
-                <a:ext cx="14630399" cy="24821957"/>
-              </a:xfrm>
-              <a:blipFill>
-                <a:blip r:embed="rId2"/>
-                <a:stretch>
-                  <a:fillRect l="-1997" t="-716" r="-1649" b="-256"/>
-                </a:stretch>
-              </a:blipFill>
-            </p:spPr>
-            <p:txBody>
-              <a:bodyPr/>
-              <a:lstStyle/>
-              <a:p>
-                <a:r>
-                  <a:rPr lang="en-US">
-                    <a:noFill/>
-                  </a:rPr>
-                  <a:t> </a:t>
-                </a:r>
-              </a:p>
-            </p:txBody>
-          </p:sp>
-        </mc:Fallback>
-      </mc:AlternateContent>
       <p:sp>
         <p:nvSpPr>
           <p:cNvPr id="5" name="Text Placeholder 4">
@@ -7893,23 +7009,19 @@
               <a:tabLst/>
               <a:defRPr/>
             </a:pPr>
-            <a:r>
-              <a:rPr kumimoji="0" lang="en-US" sz="4800" b="1" i="0" u="none" strike="noStrike" kern="0" cap="none" spc="0" normalizeH="0" baseline="0" noProof="0" dirty="0">
-                <a:ln>
-                  <a:noFill/>
-                </a:ln>
-                <a:solidFill>
-                  <a:srgbClr val="005BBB"/>
-                </a:solidFill>
-                <a:effectLst/>
-                <a:uLnTx/>
-                <a:uFillTx/>
-                <a:latin typeface="Arial"/>
-                <a:cs typeface="Arial"/>
-                <a:sym typeface="Arial"/>
-              </a:rPr>
-              <a:t>Results and Findings</a:t>
-            </a:r>
+            <a:endParaRPr kumimoji="0" lang="en-US" sz="4800" b="1" i="0" u="none" strike="noStrike" kern="0" cap="none" spc="0" normalizeH="0" baseline="0" noProof="0" dirty="0">
+              <a:ln>
+                <a:noFill/>
+              </a:ln>
+              <a:solidFill>
+                <a:srgbClr val="005BBB"/>
+              </a:solidFill>
+              <a:effectLst/>
+              <a:uLnTx/>
+              <a:uFillTx/>
+              <a:cs typeface="Arial"/>
+              <a:sym typeface="Arial"/>
+            </a:endParaRPr>
           </a:p>
           <a:p>
             <a:pPr marL="0" marR="0" lvl="0" indent="0" algn="l" defTabSz="914400" rtl="0" eaLnBrk="1" fontAlgn="auto" latinLnBrk="0" hangingPunct="1">
@@ -7943,7 +7055,6 @@
               <a:effectLst/>
               <a:uLnTx/>
               <a:uFillTx/>
-              <a:latin typeface="Arial"/>
               <a:cs typeface="Arial"/>
               <a:sym typeface="Arial"/>
             </a:endParaRPr>
@@ -8110,7 +7221,7 @@
             </a:endParaRPr>
           </a:p>
           <a:p>
-            <a:pPr lvl="0">
+            <a:pPr>
               <a:spcBef>
                 <a:spcPts val="1800"/>
               </a:spcBef>
@@ -8120,20 +7231,11 @@
                 <a:solidFill>
                   <a:schemeClr val="lt1"/>
                 </a:solidFill>
-                <a:latin typeface="Arial"/>
                 <a:ea typeface="Arial"/>
                 <a:cs typeface="Arial"/>
                 <a:sym typeface="Arial"/>
               </a:rPr>
-              <a:t>Nancy Odhiambo</a:t>
-            </a:r>
-            <a:r>
-              <a:rPr lang="en-US" sz="3600" baseline="30000" dirty="0">
-                <a:solidFill>
-                  <a:schemeClr val="lt1"/>
-                </a:solidFill>
-              </a:rPr>
-              <a:t>, </a:t>
+              <a:t>Nancy </a:t>
             </a:r>
             <a:r>
               <a:rPr lang="en-US" sz="3600" dirty="0">
@@ -8141,9 +7243,17 @@
                   <a:schemeClr val="lt1"/>
                 </a:solidFill>
               </a:rPr>
-              <a:t>Andrew DiLernia</a:t>
+              <a:t>Odhiambo, Andrew </a:t>
             </a:r>
-            <a:endParaRPr lang="en-US" sz="3600" baseline="30000" dirty="0">
+            <a:r>
+              <a:rPr lang="en-US" sz="3600" dirty="0" err="1">
+                <a:solidFill>
+                  <a:schemeClr val="lt1"/>
+                </a:solidFill>
+              </a:rPr>
+              <a:t>DiLernia</a:t>
+            </a:r>
+            <a:endParaRPr lang="en-US" sz="3600" baseline="30000" dirty="0" err="1">
               <a:solidFill>
                 <a:schemeClr val="lt1"/>
               </a:solidFill>
@@ -8160,7 +7270,6 @@
                 <a:solidFill>
                   <a:schemeClr val="lt1"/>
                 </a:solidFill>
-                <a:latin typeface="Arial"/>
                 <a:ea typeface="Arial"/>
                 <a:cs typeface="Arial"/>
                 <a:sym typeface="Arial"/>
@@ -8241,7 +7350,7 @@
                 <a:cs typeface="Arial"/>
                 <a:sym typeface="Arial"/>
               </a:rPr>
-              <a:t>Department of Statistics</a:t>
+              <a:t>Department of Statistics,</a:t>
             </a:r>
             <a:br>
               <a:rPr lang="en-US" sz="2800" b="0" i="0" u="none" strike="noStrike" cap="none" dirty="0">
@@ -8314,41 +7423,6 @@
           </a:p>
         </p:txBody>
       </p:sp>
-      <p:pic>
-        <p:nvPicPr>
-          <p:cNvPr id="11" name="Google Shape;76;p1">
-            <a:extLst>
-              <a:ext uri="{FF2B5EF4-FFF2-40B4-BE49-F238E27FC236}">
-                <a16:creationId xmlns:a16="http://schemas.microsoft.com/office/drawing/2014/main" id="{BB728658-9F61-908A-3DCE-2DBBF3565C05}"/>
-              </a:ext>
-            </a:extLst>
-          </p:cNvPr>
-          <p:cNvPicPr preferRelativeResize="0"/>
-          <p:nvPr/>
-        </p:nvPicPr>
-        <p:blipFill rotWithShape="1">
-          <a:blip r:embed="rId3">
-            <a:alphaModFix/>
-          </a:blip>
-          <a:srcRect/>
-          <a:stretch/>
-        </p:blipFill>
-        <p:spPr>
-          <a:xfrm>
-            <a:off x="41705108" y="30752684"/>
-            <a:ext cx="1905000" cy="1905000"/>
-          </a:xfrm>
-          <a:prstGeom prst="rect">
-            <a:avLst/>
-          </a:prstGeom>
-          <a:solidFill>
-            <a:srgbClr val="D8D8D8"/>
-          </a:solidFill>
-          <a:ln>
-            <a:noFill/>
-          </a:ln>
-        </p:spPr>
-      </p:pic>
       <p:sp>
         <p:nvSpPr>
           <p:cNvPr id="50" name="Text Placeholder 48">
@@ -8553,140 +7627,22 @@
               </a:lnSpc>
               <a:buNone/>
             </a:pPr>
-            <a:r>
-              <a:rPr lang="en-US" sz="4800" b="1" dirty="0">
-                <a:solidFill>
-                  <a:srgbClr val="005BBB"/>
-                </a:solidFill>
-              </a:rPr>
-              <a:t>Conclusion</a:t>
-            </a:r>
+            <a:endParaRPr lang="en-US" sz="3200" b="1" dirty="0">
+              <a:solidFill>
+                <a:srgbClr val="005BBB"/>
+              </a:solidFill>
+            </a:endParaRPr>
           </a:p>
           <a:p>
-            <a:pPr lvl="1" indent="-457200">
-              <a:spcBef>
-                <a:spcPts val="1200"/>
-              </a:spcBef>
-              <a:buSzPts val="3500"/>
-            </a:pPr>
-            <a:r>
-              <a:rPr lang="en-US" sz="3200" dirty="0">
-                <a:solidFill>
-                  <a:schemeClr val="accent4">
-                    <a:lumMod val="50000"/>
-                  </a:schemeClr>
-                </a:solidFill>
-              </a:rPr>
-              <a:t>PFAS data analysis enhances accessibility to the cumulative risk </a:t>
-            </a:r>
-          </a:p>
-          <a:p>
-            <a:pPr lvl="1" indent="-457200">
-              <a:spcBef>
-                <a:spcPts val="1200"/>
-              </a:spcBef>
-              <a:buSzPts val="3500"/>
-            </a:pPr>
-            <a:r>
-              <a:rPr lang="en-US" sz="3200" dirty="0">
-                <a:solidFill>
-                  <a:schemeClr val="accent4">
-                    <a:lumMod val="50000"/>
-                  </a:schemeClr>
-                </a:solidFill>
-              </a:rPr>
-              <a:t>The hazard Index consolidates multiple chemicals into an intuitive scale for public awareness and policy improvement</a:t>
-            </a:r>
-          </a:p>
-          <a:p>
-            <a:pPr lvl="1" indent="-457200">
-              <a:spcBef>
-                <a:spcPts val="1200"/>
-              </a:spcBef>
-              <a:buSzPts val="3500"/>
-            </a:pPr>
-            <a:r>
-              <a:rPr lang="en-US" sz="3200" dirty="0">
-                <a:solidFill>
-                  <a:schemeClr val="accent4">
-                    <a:lumMod val="50000"/>
-                  </a:schemeClr>
-                </a:solidFill>
-              </a:rPr>
-              <a:t>The insights that have been discovered from this analysis enables evidence-based decisions, improve transparency, and guide environmental management</a:t>
-            </a:r>
-          </a:p>
-          <a:p>
-            <a:pPr marL="0" indent="0">
+            <a:pPr marL="0" lvl="0" indent="0">
               <a:lnSpc>
                 <a:spcPct val="95833"/>
               </a:lnSpc>
               <a:buNone/>
             </a:pPr>
-            <a:r>
-              <a:rPr lang="en-US" sz="4800" b="1" dirty="0">
-                <a:solidFill>
-                  <a:srgbClr val="005BBB"/>
-                </a:solidFill>
-              </a:rPr>
-              <a:t>Software &amp; Tools</a:t>
-            </a:r>
-          </a:p>
-          <a:p>
-            <a:pPr marL="0" lvl="0" indent="0">
-              <a:spcBef>
-                <a:spcPts val="1200"/>
-              </a:spcBef>
-              <a:spcAft>
-                <a:spcPts val="1200"/>
-              </a:spcAft>
-            </a:pPr>
-            <a:r>
-              <a:rPr lang="en-US" sz="3200" dirty="0">
-                <a:solidFill>
-                  <a:schemeClr val="accent4">
-                    <a:lumMod val="50000"/>
-                  </a:schemeClr>
-                </a:solidFill>
-              </a:rPr>
-              <a:t>Frontend: Leaflet, Plotly – Backend: R, Quarto, Markdown, JavaScript</a:t>
-            </a:r>
-          </a:p>
-          <a:p>
-            <a:pPr marL="0" lvl="0" indent="0">
-              <a:spcBef>
-                <a:spcPts val="1200"/>
-              </a:spcBef>
-              <a:spcAft>
-                <a:spcPts val="1200"/>
-              </a:spcAft>
-            </a:pPr>
-            <a:r>
-              <a:rPr lang="en-US" sz="3200" dirty="0">
-                <a:solidFill>
-                  <a:schemeClr val="accent4">
-                    <a:lumMod val="50000"/>
-                  </a:schemeClr>
-                </a:solidFill>
-              </a:rPr>
-              <a:t>Hosting: GitHub: </a:t>
-            </a:r>
-            <a:r>
-              <a:rPr lang="en-US" sz="3200" dirty="0">
-                <a:solidFill>
-                  <a:schemeClr val="accent4">
-                    <a:lumMod val="50000"/>
-                  </a:schemeClr>
-                </a:solidFill>
-                <a:hlinkClick r:id="rId4"/>
-              </a:rPr>
-              <a:t>https://github.com/Nancy-Odhiambo/Michigan-PFAS-Data</a:t>
-            </a:r>
-            <a:endParaRPr lang="en-US" sz="1600" dirty="0">
+            <a:endParaRPr lang="en-US" sz="4800" b="1" dirty="0">
               <a:solidFill>
-                <a:schemeClr val="accent4">
-                  <a:lumMod val="50000"/>
-                </a:schemeClr>
+                <a:srgbClr val="005BBB"/>
               </a:solidFill>
             </a:endParaRPr>
           </a:p>
@@ -8703,8 +7659,152 @@
                   <a:srgbClr val="005BBB"/>
                 </a:solidFill>
               </a:rPr>
+              <a:t>Conclusion</a:t>
+            </a:r>
+          </a:p>
+          <a:p>
+            <a:pPr lvl="1" indent="-457200">
+              <a:spcBef>
+                <a:spcPts val="1200"/>
+              </a:spcBef>
+              <a:buSzPts val="3500"/>
+            </a:pPr>
+            <a:r>
+              <a:rPr lang="en-US" sz="3200" dirty="0" err="1">
+                <a:solidFill>
+                  <a:schemeClr val="accent4">
+                    <a:lumMod val="50000"/>
+                  </a:schemeClr>
+                </a:solidFill>
+              </a:rPr>
+              <a:t>PFHxS</a:t>
+            </a:r>
+            <a:r>
+              <a:rPr lang="en-US" sz="3200" dirty="0">
+                <a:solidFill>
+                  <a:schemeClr val="accent4">
+                    <a:lumMod val="50000"/>
+                  </a:schemeClr>
+                </a:solidFill>
+              </a:rPr>
+              <a:t> dominates as the analyte with the greatest impact on hazard index levels in drinking water samples</a:t>
+            </a:r>
+          </a:p>
+          <a:p>
+            <a:pPr lvl="1" indent="-457200">
+              <a:spcBef>
+                <a:spcPts val="1200"/>
+              </a:spcBef>
+              <a:buSzPts val="3500"/>
+            </a:pPr>
+            <a:r>
+              <a:rPr lang="en-US" sz="3200" dirty="0">
+                <a:solidFill>
+                  <a:schemeClr val="accent4">
+                    <a:lumMod val="50000"/>
+                  </a:schemeClr>
+                </a:solidFill>
+              </a:rPr>
+              <a:t>Many of the sites with the highest hazard index levels were water systems located in school areas.</a:t>
+            </a:r>
+          </a:p>
+          <a:p>
+            <a:pPr lvl="1" indent="-457200">
+              <a:spcBef>
+                <a:spcPts val="1200"/>
+              </a:spcBef>
+              <a:buClr>
+                <a:srgbClr val="005BBB"/>
+              </a:buClr>
+              <a:buSzPts val="3500"/>
+            </a:pPr>
+            <a:r>
+              <a:rPr lang="en-US" sz="3200" dirty="0">
+                <a:solidFill>
+                  <a:schemeClr val="accent4">
+                    <a:lumMod val="50000"/>
+                  </a:schemeClr>
+                </a:solidFill>
+              </a:rPr>
+              <a:t>There are many drinking water sites and systems with hazard index greater than 1 which surpasses the set Maximum Contamination Level</a:t>
+            </a:r>
+          </a:p>
+          <a:p>
+            <a:pPr lvl="1" indent="-457200">
+              <a:spcBef>
+                <a:spcPts val="1200"/>
+              </a:spcBef>
+              <a:buClr>
+                <a:srgbClr val="005BBB"/>
+              </a:buClr>
+              <a:buSzPts val="3500"/>
+            </a:pPr>
+            <a:r>
+              <a:rPr lang="en-US" sz="3200" dirty="0">
+                <a:solidFill>
+                  <a:schemeClr val="accent4">
+                    <a:lumMod val="50000"/>
+                  </a:schemeClr>
+                </a:solidFill>
+              </a:rPr>
+              <a:t>We also developed an interactive dashboard published on GitHub: https://</a:t>
+            </a:r>
+            <a:r>
+              <a:rPr lang="en-US" sz="3200" dirty="0" err="1">
+                <a:solidFill>
+                  <a:schemeClr val="accent4">
+                    <a:lumMod val="50000"/>
+                  </a:schemeClr>
+                </a:solidFill>
+              </a:rPr>
+              <a:t>github.com</a:t>
+            </a:r>
+            <a:r>
+              <a:rPr lang="en-US" sz="3200" dirty="0">
+                <a:solidFill>
+                  <a:schemeClr val="accent4">
+                    <a:lumMod val="50000"/>
+                  </a:schemeClr>
+                </a:solidFill>
+              </a:rPr>
+              <a:t>/Nancy-Odhiambo/Michigan-PFAS-Data</a:t>
+            </a:r>
+            <a:endParaRPr lang="en-US" sz="3200" b="1" dirty="0">
+              <a:solidFill>
+                <a:srgbClr val="005BBB"/>
+              </a:solidFill>
+              <a:ea typeface="Calibri"/>
+            </a:endParaRPr>
+          </a:p>
+          <a:p>
+            <a:pPr marL="0" indent="0">
+              <a:lnSpc>
+                <a:spcPct val="95833"/>
+              </a:lnSpc>
+              <a:buNone/>
+            </a:pPr>
+            <a:endParaRPr lang="en-US" sz="4800" b="1" dirty="0">
+              <a:solidFill>
+                <a:srgbClr val="005BBB"/>
+              </a:solidFill>
+            </a:endParaRPr>
+          </a:p>
+          <a:p>
+            <a:pPr marL="0" indent="0">
+              <a:lnSpc>
+                <a:spcPct val="95833"/>
+              </a:lnSpc>
+              <a:buNone/>
+            </a:pPr>
+            <a:r>
+              <a:rPr lang="en-US" sz="4800" b="1" dirty="0">
+                <a:solidFill>
+                  <a:srgbClr val="005BBB"/>
+                </a:solidFill>
+              </a:rPr>
               <a:t>References</a:t>
             </a:r>
+            <a:endParaRPr lang="en-US" dirty="0"/>
           </a:p>
           <a:p>
             <a:pPr marL="514350" lvl="0" indent="-514350">
@@ -8726,7 +7826,7 @@
             </a:endParaRPr>
           </a:p>
           <a:p>
-            <a:pPr marL="514350" lvl="0" indent="-514350">
+            <a:pPr marL="514350" indent="-514350">
               <a:lnSpc>
                 <a:spcPct val="95833"/>
               </a:lnSpc>
@@ -8749,9 +7849,25 @@
                     <a:lumMod val="50000"/>
                   </a:schemeClr>
                 </a:solidFill>
-                <a:hlinkClick r:id="rId5"/>
               </a:rPr>
-              <a:t>https://www.epa.gov/system/files/documents/2024-04/pfas-npdwr_fact-sheet_hazard-index_4.8.24.pdf</a:t>
+              <a:t>Environmental Protection Agency. (2025, September 30). PFAS explained. </a:t>
+            </a:r>
+            <a:r>
+              <a:rPr lang="en-US" sz="2500" dirty="0">
+                <a:solidFill>
+                  <a:schemeClr val="accent4">
+                    <a:lumMod val="50000"/>
+                  </a:schemeClr>
+                </a:solidFill>
+                <a:hlinkClick r:id="rId2">
+                  <a:extLst>
+                    <a:ext uri="{A12FA001-AC4F-418D-AE19-62706E023703}">
+                      <ahyp:hlinkClr xmlns:ahyp="http://schemas.microsoft.com/office/drawing/2018/hyperlinkcolor" val="tx"/>
+                    </a:ext>
+                  </a:extLst>
+                </a:hlinkClick>
+              </a:rPr>
+              <a:t>https://www.epa.gov/pfas/pfas-explained</a:t>
             </a:r>
             <a:endParaRPr lang="en-US" sz="2500" dirty="0">
               <a:solidFill>
@@ -8759,10 +7875,38 @@
                   <a:lumMod val="50000"/>
                 </a:schemeClr>
               </a:solidFill>
+              <a:hlinkClick r:id="rId2"/>
             </a:endParaRPr>
           </a:p>
           <a:p>
-            <a:pPr marL="514350" lvl="0" indent="-514350">
+            <a:pPr marL="514350" indent="-514350">
+              <a:lnSpc>
+                <a:spcPct val="95833"/>
+              </a:lnSpc>
+              <a:spcBef>
+                <a:spcPts val="1200"/>
+              </a:spcBef>
+              <a:spcAft>
+                <a:spcPts val="1200"/>
+              </a:spcAft>
+              <a:buClr>
+                <a:schemeClr val="dk1"/>
+              </a:buClr>
+              <a:buAutoNum type="arabicPeriod"/>
+            </a:pPr>
+            <a:r>
+              <a:rPr lang="en-US" sz="2500" dirty="0">
+                <a:solidFill>
+                  <a:schemeClr val="accent4">
+                    <a:lumMod val="50000"/>
+                  </a:schemeClr>
+                </a:solidFill>
+              </a:rPr>
+              <a:t>U.S. Environmental Protection Agency. (2024, April 8). Understanding the final PFAS national primary drinking water regulation: Hazard index maximum contaminant level [Fact sheet]. https://www.epa.gov/system/files/documents/2024-04/pfas-npdwr_fact-sheet_hazard-index_4.8.24.pdf</a:t>
+            </a:r>
+          </a:p>
+          <a:p>
+            <a:pPr marL="514350" indent="-514350">
               <a:lnSpc>
                 <a:spcPct val="95833"/>
               </a:lnSpc>
@@ -8785,9 +7929,25 @@
                     <a:lumMod val="50000"/>
                   </a:schemeClr>
                 </a:solidFill>
-                <a:hlinkClick r:id="rId6"/>
               </a:rPr>
-              <a:t>https://gis-egle.hub.arcgis.com/datasets/egle::pfas-surface-water-sampling/about</a:t>
+              <a:t>Michigan Department of Environment, Great Lakes, and Energy (EGLE). (2026). MPART PFAS Geographic Information System [Data set]. Michigan PFAS Action Response Team. </a:t>
+            </a:r>
+            <a:r>
+              <a:rPr lang="en-US" sz="2500" dirty="0">
+                <a:solidFill>
+                  <a:schemeClr val="accent4">
+                    <a:lumMod val="50000"/>
+                  </a:schemeClr>
+                </a:solidFill>
+                <a:hlinkClick r:id="rId3">
+                  <a:extLst>
+                    <a:ext uri="{A12FA001-AC4F-418D-AE19-62706E023703}">
+                      <ahyp:hlinkClr xmlns:ahyp="http://schemas.microsoft.com/office/drawing/2018/hyperlinkcolor" val="tx"/>
+                    </a:ext>
+                  </a:extLst>
+                </a:hlinkClick>
+              </a:rPr>
+              <a:t>https://www.michigan.gov/egle/maps-data/mpart-pfas-gis</a:t>
             </a:r>
             <a:endParaRPr lang="en-US" sz="2500" dirty="0">
               <a:solidFill>
@@ -8795,10 +7955,11 @@
                   <a:lumMod val="50000"/>
                 </a:schemeClr>
               </a:solidFill>
+              <a:hlinkClick r:id="rId3"/>
             </a:endParaRPr>
           </a:p>
           <a:p>
-            <a:pPr marL="514350" lvl="0" indent="-514350">
+            <a:pPr marL="514350" indent="-514350">
               <a:lnSpc>
                 <a:spcPct val="95833"/>
               </a:lnSpc>
@@ -8811,92 +7972,8 @@
               <a:buClr>
                 <a:schemeClr val="dk1"/>
               </a:buClr>
-              <a:buFont typeface="+mj-lt"/>
               <a:buAutoNum type="arabicPeriod"/>
             </a:pPr>
-            <a:r>
-              <a:rPr lang="en-US" sz="2500" dirty="0">
-                <a:solidFill>
-                  <a:schemeClr val="accent4">
-                    <a:lumMod val="50000"/>
-                  </a:schemeClr>
-                </a:solidFill>
-                <a:hlinkClick r:id="rId7"/>
-              </a:rPr>
-              <a:t>https://gis-egle.hub.arcgis.com/search?q=pfasgis</a:t>
-            </a:r>
-            <a:endParaRPr lang="en-US" sz="2500" dirty="0">
-              <a:solidFill>
-                <a:schemeClr val="accent4">
-                  <a:lumMod val="50000"/>
-                </a:schemeClr>
-              </a:solidFill>
-            </a:endParaRPr>
-          </a:p>
-          <a:p>
-            <a:pPr marL="514350" lvl="0" indent="-514350">
-              <a:lnSpc>
-                <a:spcPct val="95833"/>
-              </a:lnSpc>
-              <a:spcBef>
-                <a:spcPts val="1200"/>
-              </a:spcBef>
-              <a:spcAft>
-                <a:spcPts val="1200"/>
-              </a:spcAft>
-              <a:buClr>
-                <a:schemeClr val="dk1"/>
-              </a:buClr>
-              <a:buFont typeface="+mj-lt"/>
-              <a:buAutoNum type="arabicPeriod"/>
-            </a:pPr>
-            <a:r>
-              <a:rPr lang="en-US" sz="2500" dirty="0">
-                <a:solidFill>
-                  <a:schemeClr val="accent4">
-                    <a:lumMod val="50000"/>
-                  </a:schemeClr>
-                </a:solidFill>
-                <a:hlinkClick r:id="rId8"/>
-              </a:rPr>
-              <a:t>https://www.michigan.gov/pfasresponse/investigations/sites-aoi</a:t>
-            </a:r>
-            <a:endParaRPr lang="en-US" sz="2500" dirty="0">
-              <a:solidFill>
-                <a:schemeClr val="accent4">
-                  <a:lumMod val="50000"/>
-                </a:schemeClr>
-              </a:solidFill>
-            </a:endParaRPr>
-          </a:p>
-          <a:p>
-            <a:pPr marL="514350" lvl="0" indent="-514350">
-              <a:lnSpc>
-                <a:spcPct val="95833"/>
-              </a:lnSpc>
-              <a:spcBef>
-                <a:spcPts val="1200"/>
-              </a:spcBef>
-              <a:spcAft>
-                <a:spcPts val="1200"/>
-              </a:spcAft>
-              <a:buClr>
-                <a:schemeClr val="dk1"/>
-              </a:buClr>
-              <a:buFont typeface="+mj-lt"/>
-              <a:buAutoNum type="arabicPeriod"/>
-            </a:pPr>
-            <a:r>
-              <a:rPr lang="en-US" sz="2500" dirty="0">
-                <a:solidFill>
-                  <a:schemeClr val="accent4">
-                    <a:lumMod val="50000"/>
-                  </a:schemeClr>
-                </a:solidFill>
-                <a:hlinkClick r:id="rId9"/>
-              </a:rPr>
-              <a:t>https://www.michigan.gov/pfasresponse/-/media/Project/Websites/PFAS-Response/Sampling-Guidance/Minimum-Laboratory-Analyte-List.pdf?rev=a35aba56ec5a4922b986f01e25c1a19d&amp;hash=04E6F164AA5F5CD29B83B39983341345</a:t>
-            </a:r>
             <a:endParaRPr lang="en-US" sz="2500" dirty="0">
               <a:solidFill>
                 <a:schemeClr val="accent4">
@@ -9006,32 +8083,7 @@
             </a:endParaRPr>
           </a:p>
           <a:p>
-            <a:pPr marL="514350" lvl="0" indent="-514350">
-              <a:lnSpc>
-                <a:spcPct val="95833"/>
-              </a:lnSpc>
-              <a:spcBef>
-                <a:spcPts val="1200"/>
-              </a:spcBef>
-              <a:spcAft>
-                <a:spcPts val="1200"/>
-              </a:spcAft>
-              <a:buClr>
-                <a:schemeClr val="dk1"/>
-              </a:buClr>
-              <a:buFont typeface="+mj-lt"/>
-              <a:buAutoNum type="arabicPeriod"/>
-            </a:pPr>
-            <a:endParaRPr lang="en-US" sz="2500" dirty="0">
-              <a:solidFill>
-                <a:schemeClr val="accent4">
-                  <a:lumMod val="50000"/>
-                </a:schemeClr>
-              </a:solidFill>
-            </a:endParaRPr>
-          </a:p>
-          <a:p>
-            <a:pPr marL="0" indent="0">
+            <a:pPr marL="0" lvl="0" indent="0">
               <a:lnSpc>
                 <a:spcPct val="95833"/>
               </a:lnSpc>
@@ -9043,37 +8095,859 @@
             <a:endParaRPr lang="en-US" sz="2500" dirty="0"/>
           </a:p>
           <a:p>
-            <a:pPr marL="514350" lvl="0" indent="-514350">
+            <a:pPr marL="514350" indent="-514350">
               <a:lnSpc>
                 <a:spcPct val="95833"/>
               </a:lnSpc>
               <a:buClr>
                 <a:schemeClr val="dk1"/>
               </a:buClr>
-              <a:buFont typeface="+mj-lt"/>
               <a:buAutoNum type="arabicPeriod"/>
             </a:pPr>
             <a:endParaRPr lang="en-US" sz="3000" dirty="0">
               <a:solidFill>
-                <a:schemeClr val="accent4">
-                  <a:lumMod val="50000"/>
-                </a:schemeClr>
+                <a:srgbClr val="333333"/>
               </a:solidFill>
               <a:ea typeface="Cambria" panose="02040503050406030204" pitchFamily="18" charset="0"/>
               <a:cs typeface="Times New Roman" panose="02020603050405020304" pitchFamily="18" charset="0"/>
             </a:endParaRPr>
           </a:p>
           <a:p>
-            <a:endParaRPr lang="en-US" dirty="0"/>
+            <a:pPr lvl="0">
+              <a:buFont typeface="+mj-lt"/>
+              <a:buChar char="•"/>
+            </a:pPr>
+            <a:endParaRPr lang="en-US" dirty="0">
+              <a:ea typeface="Cambria" panose="02040503050406030204" pitchFamily="18" charset="0"/>
+            </a:endParaRPr>
           </a:p>
         </p:txBody>
       </p:sp>
+      <mc:AlternateContent xmlns:mc="http://schemas.openxmlformats.org/markup-compatibility/2006">
+        <mc:Choice xmlns:a14="http://schemas.microsoft.com/office/drawing/2010/main" Requires="a14">
+          <p:sp>
+            <p:nvSpPr>
+              <p:cNvPr id="6" name="Text Placeholder 5">
+                <a:extLst>
+                  <a:ext uri="{FF2B5EF4-FFF2-40B4-BE49-F238E27FC236}">
+                    <a16:creationId xmlns:a16="http://schemas.microsoft.com/office/drawing/2014/main" id="{61173C06-0403-2A94-6AF8-40D60FE4BD9D}"/>
+                  </a:ext>
+                </a:extLst>
+              </p:cNvPr>
+              <p:cNvSpPr>
+                <a:spLocks noGrp="1"/>
+              </p:cNvSpPr>
+              <p:nvPr>
+                <p:ph type="body" idx="1"/>
+              </p:nvPr>
+            </p:nvSpPr>
+            <p:spPr>
+              <a:xfrm>
+                <a:off x="499504" y="5607056"/>
+                <a:ext cx="14231103" cy="24812176"/>
+              </a:xfrm>
+            </p:spPr>
+            <p:txBody>
+              <a:bodyPr/>
+              <a:lstStyle/>
+              <a:p>
+                <a:pPr marL="0" indent="0">
+                  <a:lnSpc>
+                    <a:spcPct val="95833"/>
+                  </a:lnSpc>
+                </a:pPr>
+                <a:r>
+                  <a:rPr lang="en-US" sz="4800" b="1" dirty="0">
+                    <a:solidFill>
+                      <a:srgbClr val="005BBB"/>
+                    </a:solidFill>
+                  </a:rPr>
+                  <a:t>Introduction</a:t>
+                </a:r>
+                <a:endParaRPr lang="en-US" sz="4800" dirty="0"/>
+              </a:p>
+              <a:p>
+                <a:pPr marL="742950" lvl="1" indent="-457200">
+                  <a:spcBef>
+                    <a:spcPts val="1200"/>
+                  </a:spcBef>
+                  <a:buChar char="•"/>
+                </a:pPr>
+                <a:r>
+                  <a:rPr lang="en-US" sz="3200" dirty="0">
+                    <a:solidFill>
+                      <a:schemeClr val="accent4">
+                        <a:lumMod val="50000"/>
+                      </a:schemeClr>
+                    </a:solidFill>
+                  </a:rPr>
+                  <a:t>Per- and polyfluoroalkyl substances (PFAS) are synthetic “forever” chemicals that are widely used in everyday products.¹</a:t>
+                </a:r>
+              </a:p>
+              <a:p>
+                <a:pPr marL="742950" lvl="1" indent="-457200">
+                  <a:spcBef>
+                    <a:spcPts val="1200"/>
+                  </a:spcBef>
+                  <a:buChar char="•"/>
+                </a:pPr>
+                <a:r>
+                  <a:rPr lang="en-US" sz="3200" dirty="0">
+                    <a:solidFill>
+                      <a:schemeClr val="accent4">
+                        <a:lumMod val="50000"/>
+                      </a:schemeClr>
+                    </a:solidFill>
+                  </a:rPr>
+                  <a:t>PFAS do not break down easily in the environment or the human body.</a:t>
+                </a:r>
+              </a:p>
+              <a:p>
+                <a:pPr marL="742950" lvl="1" indent="-457200">
+                  <a:spcBef>
+                    <a:spcPts val="1200"/>
+                  </a:spcBef>
+                  <a:buChar char="•"/>
+                </a:pPr>
+                <a:r>
+                  <a:rPr lang="en-US" sz="3200" dirty="0">
+                    <a:solidFill>
+                      <a:schemeClr val="accent4">
+                        <a:lumMod val="50000"/>
+                      </a:schemeClr>
+                    </a:solidFill>
+                  </a:rPr>
+                  <a:t>Research indicates that PFAS exposure may be linked to harmful health effects², so monitoring PFAS pollution levels is important for public health research and evidence-based policy decisions.</a:t>
+                </a:r>
+                <a:endParaRPr lang="en-US" dirty="0">
+                  <a:solidFill>
+                    <a:schemeClr val="accent4">
+                      <a:lumMod val="50000"/>
+                    </a:schemeClr>
+                  </a:solidFill>
+                </a:endParaRPr>
+              </a:p>
+              <a:p>
+                <a:pPr marL="742950" lvl="1" indent="-457200">
+                  <a:spcBef>
+                    <a:spcPts val="1200"/>
+                  </a:spcBef>
+                  <a:buChar char="•"/>
+                </a:pPr>
+                <a:r>
+                  <a:rPr lang="en-US" sz="3200" dirty="0">
+                    <a:solidFill>
+                      <a:schemeClr val="accent4">
+                        <a:lumMod val="50000"/>
+                      </a:schemeClr>
+                    </a:solidFill>
+                  </a:rPr>
+                  <a:t>We analyzed data on PFAS pollution from the Michigan Department of Environmental Great Lakes and Energy and the Michigan PFAS Action Response Team³, summarizing patterns in PFAS pollution in Michigan.</a:t>
+                </a:r>
+                <a:endParaRPr lang="en-US" sz="3200" b="1" dirty="0">
+                  <a:solidFill>
+                    <a:srgbClr val="005BBB"/>
+                  </a:solidFill>
+                  <a:ea typeface="Verdana"/>
+                </a:endParaRPr>
+              </a:p>
+              <a:p>
+                <a:pPr marL="0" indent="0">
+                  <a:lnSpc>
+                    <a:spcPct val="95833"/>
+                  </a:lnSpc>
+                </a:pPr>
+                <a:r>
+                  <a:rPr lang="en-US" sz="4800" b="1" dirty="0">
+                    <a:solidFill>
+                      <a:srgbClr val="005BBB"/>
+                    </a:solidFill>
+                  </a:rPr>
+                  <a:t>Hazard Index</a:t>
+                </a:r>
+                <a:endParaRPr lang="en-US" sz="4800" dirty="0">
+                  <a:solidFill>
+                    <a:srgbClr val="666666"/>
+                  </a:solidFill>
+                </a:endParaRPr>
+              </a:p>
+              <a:p>
+                <a:pPr marL="742950" lvl="1" indent="-457200">
+                  <a:spcBef>
+                    <a:spcPts val="1200"/>
+                  </a:spcBef>
+                  <a:buClr>
+                    <a:srgbClr val="005BBB"/>
+                  </a:buClr>
+                  <a:buFont typeface="Arial,Sans-Serif"/>
+                  <a:buChar char="•"/>
+                </a:pPr>
+                <a:r>
+                  <a:rPr lang="en-US" sz="3200" dirty="0">
+                    <a:solidFill>
+                      <a:schemeClr val="accent4">
+                        <a:lumMod val="50000"/>
+                      </a:schemeClr>
+                    </a:solidFill>
+                  </a:rPr>
+                  <a:t>The hazard index is a unitless metric from the Environmental Protection Agency (EPA) that summarizes the adverse health effects associated with exposure to mixtures of different PFAS analytes.²</a:t>
+                </a:r>
+                <a:endParaRPr lang="en-US" dirty="0">
+                  <a:solidFill>
+                    <a:schemeClr val="accent4">
+                      <a:lumMod val="50000"/>
+                    </a:schemeClr>
+                  </a:solidFill>
+                </a:endParaRPr>
+              </a:p>
+              <a:p>
+                <a:pPr marL="285750" lvl="1">
+                  <a:spcBef>
+                    <a:spcPts val="1200"/>
+                  </a:spcBef>
+                  <a:buClr>
+                    <a:srgbClr val="005BBB"/>
+                  </a:buClr>
+                </a:pPr>
+                <a14:m>
+                  <m:oMathPara xmlns:m="http://schemas.openxmlformats.org/officeDocument/2006/math">
+                    <m:oMathParaPr>
+                      <m:jc m:val="centerGroup"/>
+                    </m:oMathParaPr>
+                    <m:oMath xmlns:m="http://schemas.openxmlformats.org/officeDocument/2006/math">
+                      <m:r>
+                        <m:rPr>
+                          <m:nor/>
+                        </m:rPr>
+                        <a:rPr lang="en-US" sz="3000"/>
+                        <m:t>Hazard</m:t>
+                      </m:r>
+                      <m:r>
+                        <m:rPr>
+                          <m:nor/>
+                        </m:rPr>
+                        <a:rPr lang="en-US" sz="3000"/>
+                        <m:t> </m:t>
+                      </m:r>
+                      <m:r>
+                        <m:rPr>
+                          <m:nor/>
+                        </m:rPr>
+                        <a:rPr lang="en-US" sz="3000"/>
+                        <m:t>Index</m:t>
+                      </m:r>
+                      <m:r>
+                        <a:rPr lang="en-US" sz="3000">
+                          <a:latin typeface="Cambria Math" panose="02040503050406030204" pitchFamily="18" charset="0"/>
+                        </a:rPr>
+                        <m:t>=</m:t>
+                      </m:r>
+                      <m:d>
+                        <m:dPr>
+                          <m:ctrlPr>
+                            <a:rPr lang="en-US" sz="3000" i="1">
+                              <a:latin typeface="Cambria Math" panose="02040503050406030204" pitchFamily="18" charset="0"/>
+                            </a:rPr>
+                          </m:ctrlPr>
+                        </m:dPr>
+                        <m:e>
+                          <m:f>
+                            <m:fPr>
+                              <m:ctrlPr>
+                                <a:rPr lang="en-US" sz="3000" i="1">
+                                  <a:latin typeface="Cambria Math" panose="02040503050406030204" pitchFamily="18" charset="0"/>
+                                </a:rPr>
+                              </m:ctrlPr>
+                            </m:fPr>
+                            <m:num>
+                              <m:r>
+                                <m:rPr>
+                                  <m:nor/>
+                                </m:rPr>
+                                <a:rPr lang="en-US" sz="3000"/>
+                                <m:t>HFPODA</m:t>
+                              </m:r>
+                              <m:r>
+                                <m:rPr>
+                                  <m:nor/>
+                                </m:rPr>
+                                <a:rPr lang="en-US" sz="3000"/>
+                                <m:t> </m:t>
+                              </m:r>
+                              <m:r>
+                                <m:rPr>
+                                  <m:nor/>
+                                </m:rPr>
+                                <a:rPr lang="en-US" sz="3000"/>
+                                <m:t>ppt</m:t>
+                              </m:r>
+                            </m:num>
+                            <m:den>
+                              <m:r>
+                                <a:rPr lang="en-US" sz="3000" i="1">
+                                  <a:latin typeface="Cambria Math" panose="02040503050406030204" pitchFamily="18" charset="0"/>
+                                </a:rPr>
+                                <m:t>10</m:t>
+                              </m:r>
+                              <m:r>
+                                <m:rPr>
+                                  <m:nor/>
+                                </m:rPr>
+                                <a:rPr lang="en-US" sz="3000"/>
+                                <m:t> </m:t>
+                              </m:r>
+                              <m:r>
+                                <m:rPr>
+                                  <m:nor/>
+                                </m:rPr>
+                                <a:rPr lang="en-US" sz="3000"/>
+                                <m:t>ppt</m:t>
+                              </m:r>
+                            </m:den>
+                          </m:f>
+                        </m:e>
+                      </m:d>
+                      <m:r>
+                        <a:rPr lang="en-US" sz="3000">
+                          <a:latin typeface="Cambria Math" panose="02040503050406030204" pitchFamily="18" charset="0"/>
+                        </a:rPr>
+                        <m:t>+</m:t>
+                      </m:r>
+                      <m:d>
+                        <m:dPr>
+                          <m:ctrlPr>
+                            <a:rPr lang="en-US" sz="3000" i="1">
+                              <a:latin typeface="Cambria Math" panose="02040503050406030204" pitchFamily="18" charset="0"/>
+                            </a:rPr>
+                          </m:ctrlPr>
+                        </m:dPr>
+                        <m:e>
+                          <m:f>
+                            <m:fPr>
+                              <m:ctrlPr>
+                                <a:rPr lang="en-US" sz="3000" i="1">
+                                  <a:latin typeface="Cambria Math" panose="02040503050406030204" pitchFamily="18" charset="0"/>
+                                </a:rPr>
+                              </m:ctrlPr>
+                            </m:fPr>
+                            <m:num>
+                              <m:r>
+                                <m:rPr>
+                                  <m:nor/>
+                                </m:rPr>
+                                <a:rPr lang="en-US" sz="3000"/>
+                                <m:t>PFBS</m:t>
+                              </m:r>
+                              <m:r>
+                                <m:rPr>
+                                  <m:nor/>
+                                </m:rPr>
+                                <a:rPr lang="en-US" sz="3000"/>
+                                <m:t> </m:t>
+                              </m:r>
+                              <m:r>
+                                <m:rPr>
+                                  <m:nor/>
+                                </m:rPr>
+                                <a:rPr lang="en-US" sz="3000"/>
+                                <m:t>ppt</m:t>
+                              </m:r>
+                            </m:num>
+                            <m:den>
+                              <m:r>
+                                <a:rPr lang="en-US" sz="3000" i="1">
+                                  <a:latin typeface="Cambria Math" panose="02040503050406030204" pitchFamily="18" charset="0"/>
+                                </a:rPr>
+                                <m:t>2000</m:t>
+                              </m:r>
+                              <m:r>
+                                <m:rPr>
+                                  <m:nor/>
+                                </m:rPr>
+                                <a:rPr lang="en-US" sz="3000"/>
+                                <m:t> </m:t>
+                              </m:r>
+                              <m:r>
+                                <m:rPr>
+                                  <m:nor/>
+                                </m:rPr>
+                                <a:rPr lang="en-US" sz="3000"/>
+                                <m:t>ppt</m:t>
+                              </m:r>
+                            </m:den>
+                          </m:f>
+                        </m:e>
+                      </m:d>
+                      <m:r>
+                        <a:rPr lang="en-US" sz="3000">
+                          <a:latin typeface="Cambria Math" panose="02040503050406030204" pitchFamily="18" charset="0"/>
+                        </a:rPr>
+                        <m:t>+</m:t>
+                      </m:r>
+                      <m:d>
+                        <m:dPr>
+                          <m:ctrlPr>
+                            <a:rPr lang="en-US" sz="3000" i="1">
+                              <a:latin typeface="Cambria Math" panose="02040503050406030204" pitchFamily="18" charset="0"/>
+                            </a:rPr>
+                          </m:ctrlPr>
+                        </m:dPr>
+                        <m:e>
+                          <m:f>
+                            <m:fPr>
+                              <m:ctrlPr>
+                                <a:rPr lang="en-US" sz="3000" i="1">
+                                  <a:latin typeface="Cambria Math" panose="02040503050406030204" pitchFamily="18" charset="0"/>
+                                </a:rPr>
+                              </m:ctrlPr>
+                            </m:fPr>
+                            <m:num>
+                              <m:r>
+                                <m:rPr>
+                                  <m:nor/>
+                                </m:rPr>
+                                <a:rPr lang="en-US" sz="3000"/>
+                                <m:t>PFNA</m:t>
+                              </m:r>
+                              <m:r>
+                                <m:rPr>
+                                  <m:nor/>
+                                </m:rPr>
+                                <a:rPr lang="en-US" sz="3000"/>
+                                <m:t> </m:t>
+                              </m:r>
+                              <m:r>
+                                <m:rPr>
+                                  <m:nor/>
+                                </m:rPr>
+                                <a:rPr lang="en-US" sz="3000"/>
+                                <m:t>ppt</m:t>
+                              </m:r>
+                            </m:num>
+                            <m:den>
+                              <m:r>
+                                <a:rPr lang="en-US" sz="3000" i="1">
+                                  <a:latin typeface="Cambria Math" panose="02040503050406030204" pitchFamily="18" charset="0"/>
+                                </a:rPr>
+                                <m:t>10</m:t>
+                              </m:r>
+                              <m:r>
+                                <m:rPr>
+                                  <m:nor/>
+                                </m:rPr>
+                                <a:rPr lang="en-US" sz="3000"/>
+                                <m:t> </m:t>
+                              </m:r>
+                              <m:r>
+                                <m:rPr>
+                                  <m:nor/>
+                                </m:rPr>
+                                <a:rPr lang="en-US" sz="3000"/>
+                                <m:t>ppt</m:t>
+                              </m:r>
+                            </m:den>
+                          </m:f>
+                        </m:e>
+                      </m:d>
+                      <m:r>
+                        <a:rPr lang="en-US" sz="3000">
+                          <a:latin typeface="Cambria Math" panose="02040503050406030204" pitchFamily="18" charset="0"/>
+                        </a:rPr>
+                        <m:t>+</m:t>
+                      </m:r>
+                      <m:d>
+                        <m:dPr>
+                          <m:ctrlPr>
+                            <a:rPr lang="en-US" sz="3000" i="1">
+                              <a:latin typeface="Cambria Math" panose="02040503050406030204" pitchFamily="18" charset="0"/>
+                            </a:rPr>
+                          </m:ctrlPr>
+                        </m:dPr>
+                        <m:e>
+                          <m:f>
+                            <m:fPr>
+                              <m:ctrlPr>
+                                <a:rPr lang="en-US" sz="3000" i="1">
+                                  <a:latin typeface="Cambria Math" panose="02040503050406030204" pitchFamily="18" charset="0"/>
+                                </a:rPr>
+                              </m:ctrlPr>
+                            </m:fPr>
+                            <m:num>
+                              <m:r>
+                                <m:rPr>
+                                  <m:nor/>
+                                </m:rPr>
+                                <a:rPr lang="en-US" sz="3000"/>
+                                <m:t>PFHxS</m:t>
+                              </m:r>
+                              <m:r>
+                                <m:rPr>
+                                  <m:nor/>
+                                </m:rPr>
+                                <a:rPr lang="en-US" sz="3000"/>
+                                <m:t> </m:t>
+                              </m:r>
+                              <m:r>
+                                <m:rPr>
+                                  <m:nor/>
+                                </m:rPr>
+                                <a:rPr lang="en-US" sz="3000"/>
+                                <m:t>ppt</m:t>
+                              </m:r>
+                            </m:num>
+                            <m:den>
+                              <m:r>
+                                <a:rPr lang="en-US" sz="3000" i="1">
+                                  <a:latin typeface="Cambria Math" panose="02040503050406030204" pitchFamily="18" charset="0"/>
+                                </a:rPr>
+                                <m:t>10</m:t>
+                              </m:r>
+                              <m:r>
+                                <m:rPr>
+                                  <m:nor/>
+                                </m:rPr>
+                                <a:rPr lang="en-US" sz="3000"/>
+                                <m:t> </m:t>
+                              </m:r>
+                              <m:r>
+                                <m:rPr>
+                                  <m:nor/>
+                                </m:rPr>
+                                <a:rPr lang="en-US" sz="3000"/>
+                                <m:t>ppt</m:t>
+                              </m:r>
+                            </m:den>
+                          </m:f>
+                        </m:e>
+                      </m:d>
+                    </m:oMath>
+                  </m:oMathPara>
+                </a14:m>
+                <a:endParaRPr lang="en-US" sz="3000" dirty="0">
+                  <a:solidFill>
+                    <a:schemeClr val="accent4">
+                      <a:lumMod val="50000"/>
+                    </a:schemeClr>
+                  </a:solidFill>
+                </a:endParaRPr>
+              </a:p>
+              <a:p>
+                <a:pPr marL="742950" lvl="1" indent="-457200">
+                  <a:spcBef>
+                    <a:spcPts val="1200"/>
+                  </a:spcBef>
+                  <a:buClr>
+                    <a:srgbClr val="005BBB"/>
+                  </a:buClr>
+                  <a:buFont typeface="Arial,Sans-Serif"/>
+                  <a:buChar char="•"/>
+                </a:pPr>
+                <a:r>
+                  <a:rPr lang="en-US" sz="3200" dirty="0">
+                    <a:solidFill>
+                      <a:schemeClr val="accent4">
+                        <a:lumMod val="50000"/>
+                      </a:schemeClr>
+                    </a:solidFill>
+                  </a:rPr>
+                  <a:t>The EPA’s Hazard Index Maximum Contaminant Level (MCL) is set at 1, meaning there are potential elevated health risks for drinking water with hazard index levels exceeding 1.</a:t>
+                </a:r>
+              </a:p>
+              <a:p>
+                <a:pPr marL="0" marR="0" lvl="0" indent="0" algn="l" defTabSz="914400" rtl="0" eaLnBrk="1" fontAlgn="auto" latinLnBrk="0" hangingPunct="1">
+                  <a:lnSpc>
+                    <a:spcPct val="95833"/>
+                  </a:lnSpc>
+                  <a:spcBef>
+                    <a:spcPts val="0"/>
+                  </a:spcBef>
+                  <a:spcAft>
+                    <a:spcPts val="0"/>
+                  </a:spcAft>
+                  <a:buClr>
+                    <a:srgbClr val="666666"/>
+                  </a:buClr>
+                  <a:buSzPts val="2800"/>
+                  <a:buFont typeface="Arial"/>
+                  <a:buNone/>
+                  <a:tabLst/>
+                  <a:defRPr/>
+                </a:pPr>
+                <a:r>
+                  <a:rPr lang="en-US" sz="4800" b="1" dirty="0">
+                    <a:solidFill>
+                      <a:srgbClr val="005BBB"/>
+                    </a:solidFill>
+                  </a:rPr>
+                  <a:t>Results</a:t>
+                </a:r>
+                <a:endParaRPr kumimoji="0" lang="en-US" sz="4800" b="0" i="0" u="none" strike="noStrike" kern="0" cap="none" spc="0" normalizeH="0" baseline="0" noProof="0" dirty="0">
+                  <a:ln>
+                    <a:noFill/>
+                  </a:ln>
+                  <a:solidFill>
+                    <a:srgbClr val="666666"/>
+                  </a:solidFill>
+                  <a:effectLst/>
+                  <a:uLnTx/>
+                  <a:uFillTx/>
+                  <a:latin typeface="Arial"/>
+                  <a:cs typeface="Arial"/>
+                  <a:sym typeface="Arial"/>
+                </a:endParaRPr>
+              </a:p>
+              <a:p>
+                <a:pPr marL="285750" lvl="1">
+                  <a:spcBef>
+                    <a:spcPts val="1200"/>
+                  </a:spcBef>
+                  <a:buClr>
+                    <a:srgbClr val="005BBB"/>
+                  </a:buClr>
+                </a:pPr>
+                <a:endParaRPr lang="en-US" sz="3200" dirty="0">
+                  <a:solidFill>
+                    <a:schemeClr val="accent4">
+                      <a:lumMod val="50000"/>
+                    </a:schemeClr>
+                  </a:solidFill>
+                </a:endParaRPr>
+              </a:p>
+              <a:p>
+                <a:pPr marL="0" indent="0">
+                  <a:lnSpc>
+                    <a:spcPct val="95833"/>
+                  </a:lnSpc>
+                </a:pPr>
+                <a:endParaRPr lang="en-US" sz="4800" b="1" dirty="0">
+                  <a:solidFill>
+                    <a:srgbClr val="005BBB"/>
+                  </a:solidFill>
+                </a:endParaRPr>
+              </a:p>
+              <a:p>
+                <a:endParaRPr lang="en-US" dirty="0"/>
+              </a:p>
+            </p:txBody>
+          </p:sp>
+        </mc:Choice>
+        <mc:Fallback>
+          <p:sp>
+            <p:nvSpPr>
+              <p:cNvPr id="6" name="Text Placeholder 5">
+                <a:extLst>
+                  <a:ext uri="{FF2B5EF4-FFF2-40B4-BE49-F238E27FC236}">
+                    <a16:creationId xmlns:a16="http://schemas.microsoft.com/office/drawing/2014/main" id="{61173C06-0403-2A94-6AF8-40D60FE4BD9D}"/>
+                  </a:ext>
+                </a:extLst>
+              </p:cNvPr>
+              <p:cNvSpPr>
+                <a:spLocks noGrp="1" noRot="1" noChangeAspect="1" noMove="1" noResize="1" noEditPoints="1" noAdjustHandles="1" noChangeArrowheads="1" noChangeShapeType="1" noTextEdit="1"/>
+              </p:cNvSpPr>
+              <p:nvPr>
+                <p:ph type="body" idx="1"/>
+              </p:nvPr>
+            </p:nvSpPr>
+            <p:spPr>
+              <a:xfrm>
+                <a:off x="499504" y="5607056"/>
+                <a:ext cx="14231103" cy="24812176"/>
+              </a:xfrm>
+              <a:blipFill>
+                <a:blip r:embed="rId4"/>
+                <a:stretch>
+                  <a:fillRect l="-1963" t="-716" r="-1784"/>
+                </a:stretch>
+              </a:blipFill>
+            </p:spPr>
+            <p:txBody>
+              <a:bodyPr/>
+              <a:lstStyle/>
+              <a:p>
+                <a:r>
+                  <a:rPr lang="en-US">
+                    <a:noFill/>
+                  </a:rPr>
+                  <a:t> </a:t>
+                </a:r>
+              </a:p>
+            </p:txBody>
+          </p:sp>
+        </mc:Fallback>
+      </mc:AlternateContent>
       <p:pic>
         <p:nvPicPr>
-          <p:cNvPr id="4" name="Picture 3">
+          <p:cNvPr id="1026" name="Picture 2" descr="QR Code">
             <a:extLst>
               <a:ext uri="{FF2B5EF4-FFF2-40B4-BE49-F238E27FC236}">
-                <a16:creationId xmlns:a16="http://schemas.microsoft.com/office/drawing/2014/main" id="{2275A505-4BB7-0C64-4386-A57A3D5AAC1E}"/>
+                <a16:creationId xmlns:a16="http://schemas.microsoft.com/office/drawing/2014/main" id="{4B74822B-A35F-3E3A-D303-5FA0B39578AC}"/>
+              </a:ext>
+            </a:extLst>
+          </p:cNvPr>
+          <p:cNvPicPr>
+            <a:picLocks noChangeAspect="1" noChangeArrowheads="1"/>
+          </p:cNvPicPr>
+          <p:nvPr/>
+        </p:nvPicPr>
+        <p:blipFill>
+          <a:blip r:embed="rId5">
+            <a:extLst>
+              <a:ext uri="{28A0092B-C50C-407E-A947-70E740481C1C}">
+                <a14:useLocalDpi xmlns:a14="http://schemas.microsoft.com/office/drawing/2010/main" val="0"/>
+              </a:ext>
+            </a:extLst>
+          </a:blip>
+          <a:srcRect/>
+          <a:stretch>
+            <a:fillRect/>
+          </a:stretch>
+        </p:blipFill>
+        <p:spPr bwMode="auto">
+          <a:xfrm>
+            <a:off x="41352959" y="30653139"/>
+            <a:ext cx="1871088" cy="1871088"/>
+          </a:xfrm>
+          <a:prstGeom prst="rect">
+            <a:avLst/>
+          </a:prstGeom>
+          <a:noFill/>
+          <a:extLst>
+            <a:ext uri="{909E8E84-426E-40DD-AFC4-6F175D3DCCD1}">
+              <a14:hiddenFill xmlns:a14="http://schemas.microsoft.com/office/drawing/2010/main">
+                <a:solidFill>
+                  <a:srgbClr val="FFFFFF"/>
+                </a:solidFill>
+              </a14:hiddenFill>
+            </a:ext>
+          </a:extLst>
+        </p:spPr>
+      </p:pic>
+      <p:pic>
+        <p:nvPicPr>
+          <p:cNvPr id="20" name="Picture 19">
+            <a:extLst>
+              <a:ext uri="{FF2B5EF4-FFF2-40B4-BE49-F238E27FC236}">
+                <a16:creationId xmlns:a16="http://schemas.microsoft.com/office/drawing/2014/main" id="{A2DEBB8A-F865-609C-0583-2531C5FA20D7}"/>
+              </a:ext>
+            </a:extLst>
+          </p:cNvPr>
+          <p:cNvPicPr>
+            <a:picLocks noChangeAspect="1"/>
+          </p:cNvPicPr>
+          <p:nvPr/>
+        </p:nvPicPr>
+        <p:blipFill>
+          <a:blip r:embed="rId6"/>
+          <a:stretch>
+            <a:fillRect/>
+          </a:stretch>
+        </p:blipFill>
+        <p:spPr>
+          <a:xfrm>
+            <a:off x="29430526" y="5619555"/>
+            <a:ext cx="14460674" cy="10317131"/>
+          </a:xfrm>
+          <a:prstGeom prst="rect">
+            <a:avLst/>
+          </a:prstGeom>
+        </p:spPr>
+      </p:pic>
+      <p:pic>
+        <p:nvPicPr>
+          <p:cNvPr id="23" name="Picture 22">
+            <a:extLst>
+              <a:ext uri="{FF2B5EF4-FFF2-40B4-BE49-F238E27FC236}">
+                <a16:creationId xmlns:a16="http://schemas.microsoft.com/office/drawing/2014/main" id="{677BF915-846A-249E-4A7F-F27B275360E6}"/>
+              </a:ext>
+            </a:extLst>
+          </p:cNvPr>
+          <p:cNvPicPr>
+            <a:picLocks noChangeAspect="1"/>
+          </p:cNvPicPr>
+          <p:nvPr/>
+        </p:nvPicPr>
+        <p:blipFill>
+          <a:blip r:embed="rId7"/>
+          <a:stretch>
+            <a:fillRect/>
+          </a:stretch>
+        </p:blipFill>
+        <p:spPr>
+          <a:xfrm>
+            <a:off x="14895094" y="22837911"/>
+            <a:ext cx="14231103" cy="7593822"/>
+          </a:xfrm>
+          <a:prstGeom prst="rect">
+            <a:avLst/>
+          </a:prstGeom>
+        </p:spPr>
+      </p:pic>
+      <p:pic>
+        <p:nvPicPr>
+          <p:cNvPr id="25" name="Picture 24">
+            <a:extLst>
+              <a:ext uri="{FF2B5EF4-FFF2-40B4-BE49-F238E27FC236}">
+                <a16:creationId xmlns:a16="http://schemas.microsoft.com/office/drawing/2014/main" id="{83A2D002-4710-DA77-A88B-26210568B56D}"/>
+              </a:ext>
+            </a:extLst>
+          </p:cNvPr>
+          <p:cNvPicPr>
+            <a:picLocks noChangeAspect="1"/>
+          </p:cNvPicPr>
+          <p:nvPr/>
+        </p:nvPicPr>
+        <p:blipFill>
+          <a:blip r:embed="rId8"/>
+          <a:stretch>
+            <a:fillRect/>
+          </a:stretch>
+        </p:blipFill>
+        <p:spPr>
+          <a:xfrm>
+            <a:off x="14895095" y="14238514"/>
+            <a:ext cx="14231102" cy="8712274"/>
+          </a:xfrm>
+          <a:prstGeom prst="rect">
+            <a:avLst/>
+          </a:prstGeom>
+        </p:spPr>
+      </p:pic>
+      <p:pic>
+        <p:nvPicPr>
+          <p:cNvPr id="27" name="Picture 26">
+            <a:extLst>
+              <a:ext uri="{FF2B5EF4-FFF2-40B4-BE49-F238E27FC236}">
+                <a16:creationId xmlns:a16="http://schemas.microsoft.com/office/drawing/2014/main" id="{74E1BC0B-E930-6642-B516-85F2CB94425E}"/>
+              </a:ext>
+            </a:extLst>
+          </p:cNvPr>
+          <p:cNvPicPr>
+            <a:picLocks noChangeAspect="1"/>
+          </p:cNvPicPr>
+          <p:nvPr/>
+        </p:nvPicPr>
+        <p:blipFill>
+          <a:blip r:embed="rId9"/>
+          <a:stretch>
+            <a:fillRect/>
+          </a:stretch>
+        </p:blipFill>
+        <p:spPr>
+          <a:xfrm>
+            <a:off x="14895093" y="5607055"/>
+            <a:ext cx="14231101" cy="8712274"/>
+          </a:xfrm>
+          <a:prstGeom prst="rect">
+            <a:avLst/>
+          </a:prstGeom>
+        </p:spPr>
+      </p:pic>
+      <p:pic>
+        <p:nvPicPr>
+          <p:cNvPr id="29" name="Picture 28">
+            <a:extLst>
+              <a:ext uri="{FF2B5EF4-FFF2-40B4-BE49-F238E27FC236}">
+                <a16:creationId xmlns:a16="http://schemas.microsoft.com/office/drawing/2014/main" id="{A522BCBD-72DE-AE9D-2729-A808100AB3CD}"/>
               </a:ext>
             </a:extLst>
           </p:cNvPr>
@@ -9090,98 +8964,8 @@
         </p:blipFill>
         <p:spPr>
           <a:xfrm>
-            <a:off x="14951033" y="6614556"/>
-            <a:ext cx="12365181" cy="8243454"/>
-          </a:xfrm>
-          <a:prstGeom prst="rect">
-            <a:avLst/>
-          </a:prstGeom>
-        </p:spPr>
-      </p:pic>
-      <p:pic>
-        <p:nvPicPr>
-          <p:cNvPr id="7" name="Picture 6">
-            <a:extLst>
-              <a:ext uri="{FF2B5EF4-FFF2-40B4-BE49-F238E27FC236}">
-                <a16:creationId xmlns:a16="http://schemas.microsoft.com/office/drawing/2014/main" id="{8DB399D0-5D23-D139-707D-865B3CB825B9}"/>
-              </a:ext>
-            </a:extLst>
-          </p:cNvPr>
-          <p:cNvPicPr>
-            <a:picLocks noChangeAspect="1"/>
-          </p:cNvPicPr>
-          <p:nvPr/>
-        </p:nvPicPr>
-        <p:blipFill>
-          <a:blip r:embed="rId11"/>
-          <a:stretch>
-            <a:fillRect/>
-          </a:stretch>
-        </p:blipFill>
-        <p:spPr>
-          <a:xfrm>
-            <a:off x="14065131" y="15267285"/>
-            <a:ext cx="12670183" cy="9050129"/>
-          </a:xfrm>
-          <a:prstGeom prst="rect">
-            <a:avLst/>
-          </a:prstGeom>
-        </p:spPr>
-      </p:pic>
-      <p:pic>
-        <p:nvPicPr>
-          <p:cNvPr id="12" name="Picture 11">
-            <a:extLst>
-              <a:ext uri="{FF2B5EF4-FFF2-40B4-BE49-F238E27FC236}">
-                <a16:creationId xmlns:a16="http://schemas.microsoft.com/office/drawing/2014/main" id="{04858FAE-1C8D-0946-B8C3-06B7A8DBCB97}"/>
-              </a:ext>
-            </a:extLst>
-          </p:cNvPr>
-          <p:cNvPicPr>
-            <a:picLocks noChangeAspect="1"/>
-          </p:cNvPicPr>
-          <p:nvPr/>
-        </p:nvPicPr>
-        <p:blipFill>
-          <a:blip r:embed="rId12"/>
-          <a:stretch>
-            <a:fillRect/>
-          </a:stretch>
-        </p:blipFill>
-        <p:spPr>
-          <a:xfrm>
-            <a:off x="29812065" y="5707504"/>
-            <a:ext cx="13383695" cy="9559782"/>
-          </a:xfrm>
-          <a:prstGeom prst="rect">
-            <a:avLst/>
-          </a:prstGeom>
-        </p:spPr>
-      </p:pic>
-      <p:pic>
-        <p:nvPicPr>
-          <p:cNvPr id="14" name="Picture 13">
-            <a:extLst>
-              <a:ext uri="{FF2B5EF4-FFF2-40B4-BE49-F238E27FC236}">
-                <a16:creationId xmlns:a16="http://schemas.microsoft.com/office/drawing/2014/main" id="{B5BA9DBB-2550-B185-75A1-8A4A4386A3B4}"/>
-              </a:ext>
-            </a:extLst>
-          </p:cNvPr>
-          <p:cNvPicPr>
-            <a:picLocks noChangeAspect="1"/>
-          </p:cNvPicPr>
-          <p:nvPr/>
-        </p:nvPicPr>
-        <p:blipFill>
-          <a:blip r:embed="rId13"/>
-          <a:stretch>
-            <a:fillRect/>
-          </a:stretch>
-        </p:blipFill>
-        <p:spPr>
-          <a:xfrm>
-            <a:off x="15179475" y="24561462"/>
-            <a:ext cx="13816630" cy="5526652"/>
+            <a:off x="-1" y="23774400"/>
+            <a:ext cx="14895094" cy="6644832"/>
           </a:xfrm>
           <a:prstGeom prst="rect">
             <a:avLst/>

--- a/MichiganPFAS_ResearchPoster.pptx
+++ b/MichiganPFAS_ResearchPoster.pptx
@@ -257,7 +257,7 @@
       </p15:sldGuideLst>
     </p:ext>
     <p:ext uri="http://customooxmlschemas.google.com/">
-      <go:slidesCustomData xmlns="" xmlns:go="http://customooxmlschemas.google.com/" xmlns:ahyp="http://schemas.microsoft.com/office/drawing/2018/hyperlinkcolor" xmlns:p15="http://schemas.microsoft.com/office/powerpoint/2012/main" xmlns:p14="http://schemas.microsoft.com/office/powerpoint/2010/main" xmlns:com="http://schemas.openxmlformats.org/drawingml/2006/compatibility" xmlns:pvml="urn:schemas-microsoft-com:office:powerpoint" xmlns:v="urn:schemas-microsoft-com:vml" xmlns:o="urn:schemas-microsoft-com:office:office" xmlns:dgm="http://schemas.openxmlformats.org/drawingml/2006/diagram" xmlns:c="http://schemas.openxmlformats.org/drawingml/2006/chart" xmlns:mv="urn:schemas-microsoft-com:mac:vml" xmlns:mc="http://schemas.openxmlformats.org/markup-compatibility/2006" r:id="rId9" roundtripDataSignature="AMtx7mi8fLYElh59t4jHQwYsQUndL0Eu8g=="/>
+      <go:slidesCustomData xmlns:mc="http://schemas.openxmlformats.org/markup-compatibility/2006" xmlns:mv="urn:schemas-microsoft-com:mac:vml" xmlns:c="http://schemas.openxmlformats.org/drawingml/2006/chart" xmlns:dgm="http://schemas.openxmlformats.org/drawingml/2006/diagram" xmlns:o="urn:schemas-microsoft-com:office:office" xmlns:v="urn:schemas-microsoft-com:vml" xmlns:pvml="urn:schemas-microsoft-com:office:powerpoint" xmlns:com="http://schemas.openxmlformats.org/drawingml/2006/compatibility" xmlns:p14="http://schemas.microsoft.com/office/powerpoint/2010/main" xmlns:p15="http://schemas.microsoft.com/office/powerpoint/2012/main" xmlns:ahyp="http://schemas.microsoft.com/office/drawing/2018/hyperlinkcolor" xmlns:go="http://customooxmlschemas.google.com/" xmlns="" r:id="rId9" roundtripDataSignature="AMtx7mi8fLYElh59t4jHQwYsQUndL0Eu8g=="/>
     </p:ext>
   </p:extLst>
 </p:presentation>
@@ -266,7 +266,7 @@
 <file path=ppt/revisionInfo.xml><?xml version="1.0" encoding="utf-8"?>
 <p1510:revInfo xmlns:a="http://schemas.openxmlformats.org/drawingml/2006/main" xmlns:r="http://schemas.openxmlformats.org/officeDocument/2006/relationships" xmlns:p1510="http://schemas.microsoft.com/office/powerpoint/2015/10/main">
   <p1510:revLst>
-    <p1510:client id="{878780F1-3F5F-9B49-AE34-5CCFF222A762}" v="33" dt="2026-04-01T03:48:39.410"/>
+    <p1510:client id="{878780F1-3F5F-9B49-AE34-5CCFF222A762}" v="43" dt="2026-04-01T04:36:17.962"/>
   </p1510:revLst>
 </p1510:revInfo>
 </file>
@@ -275,13 +275,13 @@
 <pc:chgInfo xmlns:a="http://schemas.openxmlformats.org/drawingml/2006/main" xmlns:r="http://schemas.openxmlformats.org/officeDocument/2006/relationships" xmlns:ac="http://schemas.microsoft.com/office/drawing/2013/main/command" xmlns:pc="http://schemas.microsoft.com/office/powerpoint/2013/main/command">
   <pc:docChgLst>
     <pc:chgData name="Nancy A. Odhiambo" userId="9fd03ea9-f642-46ed-82e0-72dc91a725bc" providerId="ADAL" clId="{6B025E33-D5BB-5DD4-954E-4AC3FAD535B9}"/>
-    <pc:docChg chg="undo custSel modSld">
-      <pc:chgData name="Nancy A. Odhiambo" userId="9fd03ea9-f642-46ed-82e0-72dc91a725bc" providerId="ADAL" clId="{6B025E33-D5BB-5DD4-954E-4AC3FAD535B9}" dt="2026-04-01T04:31:07.747" v="260" actId="14100"/>
+    <pc:docChg chg="undo custSel modSld modMainMaster">
+      <pc:chgData name="Nancy A. Odhiambo" userId="9fd03ea9-f642-46ed-82e0-72dc91a725bc" providerId="ADAL" clId="{6B025E33-D5BB-5DD4-954E-4AC3FAD535B9}" dt="2026-04-01T04:36:17.962" v="270"/>
       <pc:docMkLst>
         <pc:docMk/>
       </pc:docMkLst>
-      <pc:sldChg chg="addSp delSp modSp mod">
-        <pc:chgData name="Nancy A. Odhiambo" userId="9fd03ea9-f642-46ed-82e0-72dc91a725bc" providerId="ADAL" clId="{6B025E33-D5BB-5DD4-954E-4AC3FAD535B9}" dt="2026-04-01T04:31:07.747" v="260" actId="14100"/>
+      <pc:sldChg chg="addSp delSp modSp mod setBg">
+        <pc:chgData name="Nancy A. Odhiambo" userId="9fd03ea9-f642-46ed-82e0-72dc91a725bc" providerId="ADAL" clId="{6B025E33-D5BB-5DD4-954E-4AC3FAD535B9}" dt="2026-04-01T04:36:17.962" v="270"/>
         <pc:sldMkLst>
           <pc:docMk/>
           <pc:sldMk cId="3865402343" sldId="261"/>
@@ -455,6 +455,37 @@
           </ac:picMkLst>
         </pc:picChg>
       </pc:sldChg>
+      <pc:sldMasterChg chg="setBg modSldLayout">
+        <pc:chgData name="Nancy A. Odhiambo" userId="9fd03ea9-f642-46ed-82e0-72dc91a725bc" providerId="ADAL" clId="{6B025E33-D5BB-5DD4-954E-4AC3FAD535B9}" dt="2026-04-01T04:36:17.962" v="270"/>
+        <pc:sldMasterMkLst>
+          <pc:docMk/>
+          <pc:sldMasterMk cId="0" sldId="2147483648"/>
+        </pc:sldMasterMkLst>
+        <pc:sldLayoutChg chg="setBg">
+          <pc:chgData name="Nancy A. Odhiambo" userId="9fd03ea9-f642-46ed-82e0-72dc91a725bc" providerId="ADAL" clId="{6B025E33-D5BB-5DD4-954E-4AC3FAD535B9}" dt="2026-04-01T04:36:17.962" v="270"/>
+          <pc:sldLayoutMkLst>
+            <pc:docMk/>
+            <pc:sldMasterMk cId="0" sldId="2147483648"/>
+            <pc:sldLayoutMk cId="0" sldId="2147483650"/>
+          </pc:sldLayoutMkLst>
+        </pc:sldLayoutChg>
+        <pc:sldLayoutChg chg="setBg">
+          <pc:chgData name="Nancy A. Odhiambo" userId="9fd03ea9-f642-46ed-82e0-72dc91a725bc" providerId="ADAL" clId="{6B025E33-D5BB-5DD4-954E-4AC3FAD535B9}" dt="2026-04-01T04:36:17.962" v="270"/>
+          <pc:sldLayoutMkLst>
+            <pc:docMk/>
+            <pc:sldMasterMk cId="0" sldId="2147483648"/>
+            <pc:sldLayoutMk cId="2802221383" sldId="2147483651"/>
+          </pc:sldLayoutMkLst>
+        </pc:sldLayoutChg>
+        <pc:sldLayoutChg chg="setBg">
+          <pc:chgData name="Nancy A. Odhiambo" userId="9fd03ea9-f642-46ed-82e0-72dc91a725bc" providerId="ADAL" clId="{6B025E33-D5BB-5DD4-954E-4AC3FAD535B9}" dt="2026-04-01T04:36:17.962" v="270"/>
+          <pc:sldLayoutMkLst>
+            <pc:docMk/>
+            <pc:sldMasterMk cId="0" sldId="2147483648"/>
+            <pc:sldLayoutMk cId="1060449366" sldId="2147483652"/>
+          </pc:sldLayoutMkLst>
+        </pc:sldLayoutChg>
+      </pc:sldMasterChg>
     </pc:docChg>
   </pc:docChgLst>
 </pc:chgInfo>
@@ -6003,7 +6034,9 @@
     <p:bg>
       <p:bgPr>
         <a:solidFill>
-          <a:schemeClr val="lt1"/>
+          <a:schemeClr val="bg1">
+            <a:lumMod val="95000"/>
+          </a:schemeClr>
         </a:solidFill>
         <a:effectLst/>
       </p:bgPr>
@@ -8123,8 +8156,8 @@
           </a:p>
         </p:txBody>
       </p:sp>
-      <mc:AlternateContent xmlns:mc="http://schemas.openxmlformats.org/markup-compatibility/2006">
-        <mc:Choice xmlns:a14="http://schemas.microsoft.com/office/drawing/2010/main" Requires="a14">
+      <mc:AlternateContent xmlns:mc="http://schemas.openxmlformats.org/markup-compatibility/2006" xmlns:a14="http://schemas.microsoft.com/office/drawing/2010/main">
+        <mc:Choice Requires="a14">
           <p:sp>
             <p:nvSpPr>
               <p:cNvPr id="6" name="Text Placeholder 5">
@@ -8731,7 +8764,7 @@
             </p:txBody>
           </p:sp>
         </mc:Choice>
-        <mc:Fallback>
+        <mc:Fallback xmlns="">
           <p:sp>
             <p:nvSpPr>
               <p:cNvPr id="6" name="Text Placeholder 5">
